--- a/public/MilkIQ_Tanitim_Sunumu.pptx
+++ b/public/MilkIQ_Tanitim_Sunumu.pptx
@@ -2645,7 +2645,7 @@
                 <a:ea typeface="Segoe UI" pitchFamily="34" charset="-122"/>
                 <a:cs typeface="Segoe UI" pitchFamily="34" charset="-120"/>
               </a:rPr>
-              <a:t>Destek &amp; İletişim: erkanerdem8254@gmail.com</a:t>
+              <a:t>7/24 Kesintisiz Geliştirici Takibi &amp; Teknik Destek</a:t>
             </a:r>
             <a:endParaRPr lang="en-US" sz="1100" dirty="0"/>
           </a:p>
@@ -9066,7 +9066,7 @@
                 <a:ea typeface="Segoe UI" pitchFamily="34" charset="-122"/>
                 <a:cs typeface="Segoe UI" pitchFamily="34" charset="-120"/>
               </a:rPr>
-              <a:t>• Doğrudan yetkili e-posta adresine detaylı hata raporu.</a:t>
+              <a:t>• Geliştirici Erkan Erdem'e hata detayları anında iletilir (7/24 Takip).</a:t>
             </a:r>
             <a:endParaRPr lang="en-US" sz="1050" dirty="0"/>
           </a:p>

--- a/public/MilkIQ_Tanitim_Sunumu.pptx
+++ b/public/MilkIQ_Tanitim_Sunumu.pptx
@@ -19,8 +19,8 @@
   <p:notesMasterIdLst>
     <p:notesMasterId r:id="rId12"/>
   </p:notesMasterIdLst>
-  <p:sldSz cx="9144000" cy="5143500"/>
-  <p:notesSz cx="5143500" cy="9144000"/>
+  <p:sldSz cx="12192000" cy="6858000"/>
+  <p:notesSz cx="6858000" cy="12192000"/>
   <p:defaultTextStyle>
     <a:lvl1pPr marL="0" algn="l" defTabSz="914400" rtl="0" eaLnBrk="1" latinLnBrk="0" hangingPunct="1">
       <a:defRPr sz="1800" kern="1200">
@@ -1676,40 +1676,9 @@
           <a:chExt cx="0" cy="0"/>
         </a:xfrm>
       </p:grpSpPr>
-      <p:sp>
-        <p:nvSpPr>
-          <p:cNvPr id="2" name="Shape 0"/>
-          <p:cNvSpPr/>
-          <p:nvPr/>
-        </p:nvSpPr>
-        <p:spPr>
-          <a:xfrm>
-            <a:off x="7772400" y="-914400"/>
-            <a:ext cx="5486400" cy="5486400"/>
-          </a:xfrm>
-          <a:prstGeom prst="roundRect">
-            <a:avLst>
-              <a:gd name="adj" fmla="val 8333"/>
-            </a:avLst>
-          </a:prstGeom>
-          <a:solidFill>
-            <a:srgbClr val="10B981">
-              <a:alpha val="8000"/>
-            </a:srgbClr>
-          </a:solidFill>
-          <a:ln w="12700">
-            <a:solidFill>
-              <a:srgbClr val="10B981">
-                <a:alpha val="20000"/>
-              </a:srgbClr>
-            </a:solidFill>
-            <a:prstDash val="solid"/>
-          </a:ln>
-        </p:spPr>
-      </p:sp>
       <p:pic>
         <p:nvPicPr>
-          <p:cNvPr id="3" name="Image 0" descr="D:\RASYON\public\logo.png">    </p:cNvPr>
+          <p:cNvPr id="2" name="Image 0" descr="D:\RASYON\public\logo.png">    </p:cNvPr>
           <p:cNvPicPr>
             <a:picLocks noChangeAspect="1"/>
           </p:cNvPicPr>
@@ -1723,8 +1692,8 @@
         </p:blipFill>
         <p:spPr>
           <a:xfrm>
-            <a:off x="914400" y="1097280"/>
-            <a:ext cx="1463040" cy="1463040"/>
+            <a:off x="914400" y="822960"/>
+            <a:ext cx="1371600" cy="1371600"/>
           </a:xfrm>
           <a:prstGeom prst="rect">
             <a:avLst/>
@@ -1733,40 +1702,79 @@
       </p:pic>
       <p:sp>
         <p:nvSpPr>
+          <p:cNvPr id="3" name="Text 0"/>
+          <p:cNvSpPr/>
+          <p:nvPr/>
+        </p:nvSpPr>
+        <p:spPr>
+          <a:xfrm>
+            <a:off x="914400" y="2377440"/>
+            <a:ext cx="5669280" cy="320040"/>
+          </a:xfrm>
+          <a:prstGeom prst="rect">
+            <a:avLst/>
+          </a:prstGeom>
+          <a:noFill/>
+          <a:ln/>
+        </p:spPr>
+        <p:txBody>
+          <a:bodyPr wrap="square" rtlCol="0" anchor="ctr"/>
+          <a:lstStyle/>
+          <a:p>
+            <a:pPr indent="0" marL="0">
+              <a:buNone/>
+            </a:pPr>
+            <a:r>
+              <a:rPr lang="en-US" sz="1100" b="1" spc="200" kern="0" dirty="0">
+                <a:solidFill>
+                  <a:srgbClr val="34D399"/>
+                </a:solidFill>
+                <a:latin typeface="Segoe UI" pitchFamily="34" charset="0"/>
+                <a:ea typeface="Segoe UI" pitchFamily="34" charset="-122"/>
+                <a:cs typeface="Segoe UI" pitchFamily="34" charset="-120"/>
+              </a:rPr>
+              <a:t>AKILLI SÜT SIĞIRCILIĞI TEKNOLOJİSİ</a:t>
+            </a:r>
+            <a:endParaRPr lang="en-US" sz="1100" dirty="0"/>
+          </a:p>
+        </p:txBody>
+      </p:sp>
+      <p:sp>
+        <p:nvSpPr>
           <p:cNvPr id="4" name="Text 1"/>
           <p:cNvSpPr/>
           <p:nvPr/>
         </p:nvSpPr>
         <p:spPr>
           <a:xfrm>
-            <a:off x="914400" y="2834640"/>
-            <a:ext cx="7315200" cy="365760"/>
-          </a:xfrm>
-          <a:prstGeom prst="rect">
-            <a:avLst/>
-          </a:prstGeom>
-          <a:noFill/>
-          <a:ln/>
-        </p:spPr>
-        <p:txBody>
-          <a:bodyPr wrap="square" rtlCol="0" anchor="ctr"/>
-          <a:lstStyle/>
-          <a:p>
-            <a:pPr indent="0" marL="0">
-              <a:buNone/>
-            </a:pPr>
-            <a:r>
-              <a:rPr lang="en-US" sz="1200" b="1" spc="200" kern="0" dirty="0">
-                <a:solidFill>
-                  <a:srgbClr val="34D399"/>
-                </a:solidFill>
-                <a:latin typeface="Segoe UI" pitchFamily="34" charset="0"/>
-                <a:ea typeface="Segoe UI" pitchFamily="34" charset="-122"/>
-                <a:cs typeface="Segoe UI" pitchFamily="34" charset="-120"/>
-              </a:rPr>
-              <a:t>AKILLI SÜT SIĞIRCILIĞI TEKNOLOJİSİ</a:t>
-            </a:r>
-            <a:endParaRPr lang="en-US" sz="1200" dirty="0"/>
+            <a:off x="914400" y="2697480"/>
+            <a:ext cx="5669280" cy="1005840"/>
+          </a:xfrm>
+          <a:prstGeom prst="rect">
+            <a:avLst/>
+          </a:prstGeom>
+          <a:noFill/>
+          <a:ln/>
+        </p:spPr>
+        <p:txBody>
+          <a:bodyPr wrap="square" rtlCol="0" anchor="ctr"/>
+          <a:lstStyle/>
+          <a:p>
+            <a:pPr indent="0" marL="0">
+              <a:buNone/>
+            </a:pPr>
+            <a:r>
+              <a:rPr lang="en-US" sz="5400" b="1" dirty="0">
+                <a:solidFill>
+                  <a:srgbClr val="FFFFFF"/>
+                </a:solidFill>
+                <a:latin typeface="Segoe UI" pitchFamily="34" charset="0"/>
+                <a:ea typeface="Segoe UI" pitchFamily="34" charset="-122"/>
+                <a:cs typeface="Segoe UI" pitchFamily="34" charset="-120"/>
+              </a:rPr>
+              <a:t>MilkIQ</a:t>
+            </a:r>
+            <a:endParaRPr lang="en-US" sz="5400" dirty="0"/>
           </a:p>
         </p:txBody>
       </p:sp>
@@ -1778,34 +1786,34 @@
         </p:nvSpPr>
         <p:spPr>
           <a:xfrm>
-            <a:off x="914400" y="3200400"/>
-            <a:ext cx="7315200" cy="1097280"/>
-          </a:xfrm>
-          <a:prstGeom prst="rect">
-            <a:avLst/>
-          </a:prstGeom>
-          <a:noFill/>
-          <a:ln/>
-        </p:spPr>
-        <p:txBody>
-          <a:bodyPr wrap="square" rtlCol="0" anchor="ctr"/>
-          <a:lstStyle/>
-          <a:p>
-            <a:pPr indent="0" marL="0">
-              <a:buNone/>
-            </a:pPr>
-            <a:r>
-              <a:rPr lang="en-US" sz="5400" b="1" dirty="0">
-                <a:solidFill>
-                  <a:srgbClr val="FFFFFF"/>
-                </a:solidFill>
-                <a:latin typeface="Segoe UI" pitchFamily="34" charset="0"/>
-                <a:ea typeface="Segoe UI" pitchFamily="34" charset="-122"/>
-                <a:cs typeface="Segoe UI" pitchFamily="34" charset="-120"/>
-              </a:rPr>
-              <a:t>MilkIQ</a:t>
-            </a:r>
-            <a:endParaRPr lang="en-US" sz="5400" dirty="0"/>
+            <a:off x="914400" y="3794760"/>
+            <a:ext cx="5669280" cy="457200"/>
+          </a:xfrm>
+          <a:prstGeom prst="rect">
+            <a:avLst/>
+          </a:prstGeom>
+          <a:noFill/>
+          <a:ln/>
+        </p:spPr>
+        <p:txBody>
+          <a:bodyPr wrap="square" rtlCol="0" anchor="ctr"/>
+          <a:lstStyle/>
+          <a:p>
+            <a:pPr indent="0" marL="0">
+              <a:buNone/>
+            </a:pPr>
+            <a:r>
+              <a:rPr lang="en-US" sz="1800" dirty="0">
+                <a:solidFill>
+                  <a:srgbClr val="94A3B8"/>
+                </a:solidFill>
+                <a:latin typeface="Segoe UI" pitchFamily="34" charset="0"/>
+                <a:ea typeface="Segoe UI" pitchFamily="34" charset="-122"/>
+                <a:cs typeface="Segoe UI" pitchFamily="34" charset="-120"/>
+              </a:rPr>
+              <a:t>Rasyon, Karlılık &amp; Sürü Yönetim Sistemi</a:t>
+            </a:r>
+            <a:endParaRPr lang="en-US" sz="1800" dirty="0"/>
           </a:p>
         </p:txBody>
       </p:sp>
@@ -1817,63 +1825,24 @@
         </p:nvSpPr>
         <p:spPr>
           <a:xfrm>
-            <a:off x="914400" y="4297680"/>
-            <a:ext cx="9144000" cy="548640"/>
-          </a:xfrm>
-          <a:prstGeom prst="rect">
-            <a:avLst/>
-          </a:prstGeom>
-          <a:noFill/>
-          <a:ln/>
-        </p:spPr>
-        <p:txBody>
-          <a:bodyPr wrap="square" rtlCol="0" anchor="ctr"/>
-          <a:lstStyle/>
-          <a:p>
-            <a:pPr indent="0" marL="0">
-              <a:buNone/>
-            </a:pPr>
-            <a:r>
-              <a:rPr lang="en-US" sz="2200" dirty="0">
-                <a:solidFill>
-                  <a:srgbClr val="94A3B8"/>
-                </a:solidFill>
-                <a:latin typeface="Segoe UI" pitchFamily="34" charset="0"/>
-                <a:ea typeface="Segoe UI" pitchFamily="34" charset="-122"/>
-                <a:cs typeface="Segoe UI" pitchFamily="34" charset="-120"/>
-              </a:rPr>
-              <a:t>Rasyon, Karlılık &amp; Sürü Yönetim Sistemi</a:t>
-            </a:r>
-            <a:endParaRPr lang="en-US" sz="2200" dirty="0"/>
-          </a:p>
-        </p:txBody>
-      </p:sp>
-      <p:sp>
-        <p:nvSpPr>
-          <p:cNvPr id="7" name="Text 4"/>
-          <p:cNvSpPr/>
-          <p:nvPr/>
-        </p:nvSpPr>
-        <p:spPr>
-          <a:xfrm>
-            <a:off x="914400" y="4937760"/>
-            <a:ext cx="9144000" cy="457200"/>
-          </a:xfrm>
-          <a:prstGeom prst="rect">
-            <a:avLst/>
-          </a:prstGeom>
-          <a:noFill/>
-          <a:ln/>
-        </p:spPr>
-        <p:txBody>
-          <a:bodyPr wrap="square" rtlCol="0" anchor="ctr"/>
-          <a:lstStyle/>
-          <a:p>
-            <a:pPr indent="0" marL="0">
-              <a:buNone/>
-            </a:pPr>
-            <a:r>
-              <a:rPr lang="en-US" sz="1300" dirty="0">
+            <a:off x="914400" y="4343400"/>
+            <a:ext cx="5669280" cy="548640"/>
+          </a:xfrm>
+          <a:prstGeom prst="rect">
+            <a:avLst/>
+          </a:prstGeom>
+          <a:noFill/>
+          <a:ln/>
+        </p:spPr>
+        <p:txBody>
+          <a:bodyPr wrap="square" rtlCol="0" anchor="ctr"/>
+          <a:lstStyle/>
+          <a:p>
+            <a:pPr indent="0" marL="0">
+              <a:buNone/>
+            </a:pPr>
+            <a:r>
+              <a:rPr lang="en-US" sz="1150" dirty="0">
                 <a:solidFill>
                   <a:srgbClr val="38BDF8"/>
                 </a:solidFill>
@@ -1881,34 +1850,222 @@
                 <a:ea typeface="Segoe UI" pitchFamily="34" charset="-122"/>
                 <a:cs typeface="Segoe UI" pitchFamily="34" charset="-120"/>
               </a:rPr>
-              <a:t>NRC Standartlarında Bilimsel Besleme • Dinamik Süt/Yem Paritesi • Kapsamlı Maliyet Denetimi</a:t>
-            </a:r>
-            <a:endParaRPr lang="en-US" sz="1300" dirty="0"/>
-          </a:p>
-        </p:txBody>
-      </p:sp>
-      <p:sp>
-        <p:nvSpPr>
-          <p:cNvPr id="8" name="Shape 5"/>
-          <p:cNvSpPr/>
-          <p:nvPr/>
-        </p:nvSpPr>
-        <p:spPr>
-          <a:xfrm>
-            <a:off x="914400" y="5669280"/>
-            <a:ext cx="5029200" cy="731520"/>
+              <a:t>NRC Standartlarında Bilimsel Besleme  •  Dinamik Süt/Yem Paritesi  •  Net Maliyet Analizi</a:t>
+            </a:r>
+            <a:endParaRPr lang="en-US" sz="1150" dirty="0"/>
+          </a:p>
+        </p:txBody>
+      </p:sp>
+      <p:sp>
+        <p:nvSpPr>
+          <p:cNvPr id="7" name="Shape 4"/>
+          <p:cNvSpPr/>
+          <p:nvPr/>
+        </p:nvSpPr>
+        <p:spPr>
+          <a:xfrm>
+            <a:off x="914400" y="5166360"/>
+            <a:ext cx="5486400" cy="868680"/>
           </a:xfrm>
           <a:prstGeom prst="roundRect">
             <a:avLst>
-              <a:gd name="adj" fmla="val 25000"/>
+              <a:gd name="adj" fmla="val 15789"/>
             </a:avLst>
           </a:prstGeom>
           <a:solidFill>
-            <a:srgbClr val="1E293B"/>
+            <a:srgbClr val="152238"/>
+          </a:solidFill>
+          <a:ln w="19050">
+            <a:solidFill>
+              <a:srgbClr val="283852"/>
+            </a:solidFill>
+            <a:prstDash val="solid"/>
+          </a:ln>
+        </p:spPr>
+      </p:sp>
+      <p:sp>
+        <p:nvSpPr>
+          <p:cNvPr id="8" name="Text 5"/>
+          <p:cNvSpPr/>
+          <p:nvPr/>
+        </p:nvSpPr>
+        <p:spPr>
+          <a:xfrm>
+            <a:off x="1097280" y="5257800"/>
+            <a:ext cx="5120640" cy="685800"/>
+          </a:xfrm>
+          <a:prstGeom prst="rect">
+            <a:avLst/>
+          </a:prstGeom>
+          <a:noFill/>
+          <a:ln/>
+        </p:spPr>
+        <p:txBody>
+          <a:bodyPr wrap="square" rtlCol="0" anchor="ctr"/>
+          <a:lstStyle/>
+          <a:p>
+            <a:pPr indent="0" marL="0">
+              <a:buNone/>
+            </a:pPr>
+            <a:r>
+              <a:rPr lang="en-US" sz="1000" dirty="0">
+                <a:solidFill>
+                  <a:srgbClr val="E2E8F0"/>
+                </a:solidFill>
+                <a:latin typeface="Segoe UI" pitchFamily="34" charset="0"/>
+                <a:ea typeface="Segoe UI" pitchFamily="34" charset="-122"/>
+                <a:cs typeface="Segoe UI" pitchFamily="34" charset="-120"/>
+              </a:rPr>
+              <a:t>Geliştirici: Erkan Erdem  |  erkanerdem.online</a:t>
+            </a:r>
+            <a:endParaRPr lang="en-US" sz="1000" dirty="0"/>
+          </a:p>
+          <a:p>
+            <a:pPr indent="0" marL="0">
+              <a:buNone/>
+            </a:pPr>
+            <a:r>
+              <a:rPr lang="en-US" sz="1000" dirty="0">
+                <a:solidFill>
+                  <a:srgbClr val="E2E8F0"/>
+                </a:solidFill>
+                <a:latin typeface="Segoe UI" pitchFamily="34" charset="0"/>
+                <a:ea typeface="Segoe UI" pitchFamily="34" charset="-122"/>
+                <a:cs typeface="Segoe UI" pitchFamily="34" charset="-120"/>
+              </a:rPr>
+              <a:t>Sürüm: v1.0 Production Ready • PWA &amp; Mobil Uyumlu • 7/24 Kesintisiz Takip</a:t>
+            </a:r>
+            <a:endParaRPr lang="en-US" sz="1000" dirty="0"/>
+          </a:p>
+        </p:txBody>
+      </p:sp>
+      <p:sp>
+        <p:nvSpPr>
+          <p:cNvPr id="9" name="Shape 6"/>
+          <p:cNvSpPr/>
+          <p:nvPr/>
+        </p:nvSpPr>
+        <p:spPr>
+          <a:xfrm>
+            <a:off x="6949440" y="822960"/>
+            <a:ext cx="4480560" cy="5212080"/>
+          </a:xfrm>
+          <a:prstGeom prst="roundRect">
+            <a:avLst>
+              <a:gd name="adj" fmla="val 5102"/>
+            </a:avLst>
+          </a:prstGeom>
+          <a:solidFill>
+            <a:srgbClr val="152238"/>
+          </a:solidFill>
+          <a:ln w="19050">
+            <a:solidFill>
+              <a:srgbClr val="283852"/>
+            </a:solidFill>
+            <a:prstDash val="solid"/>
+          </a:ln>
+        </p:spPr>
+      </p:sp>
+      <p:sp>
+        <p:nvSpPr>
+          <p:cNvPr id="10" name="Text 7"/>
+          <p:cNvSpPr/>
+          <p:nvPr/>
+        </p:nvSpPr>
+        <p:spPr>
+          <a:xfrm>
+            <a:off x="7223760" y="1097280"/>
+            <a:ext cx="3931920" cy="274320"/>
+          </a:xfrm>
+          <a:prstGeom prst="rect">
+            <a:avLst/>
+          </a:prstGeom>
+          <a:noFill/>
+          <a:ln/>
+        </p:spPr>
+        <p:txBody>
+          <a:bodyPr wrap="square" rtlCol="0" anchor="ctr"/>
+          <a:lstStyle/>
+          <a:p>
+            <a:pPr indent="0" marL="0">
+              <a:buNone/>
+            </a:pPr>
+            <a:r>
+              <a:rPr lang="en-US" sz="1000" b="1" spc="150" kern="0" dirty="0">
+                <a:solidFill>
+                  <a:srgbClr val="34D399"/>
+                </a:solidFill>
+                <a:latin typeface="Segoe UI" pitchFamily="34" charset="0"/>
+                <a:ea typeface="Segoe UI" pitchFamily="34" charset="-122"/>
+                <a:cs typeface="Segoe UI" pitchFamily="34" charset="-120"/>
+              </a:rPr>
+              <a:t>ÖNE ÇIKAN YETENEKLER</a:t>
+            </a:r>
+            <a:endParaRPr lang="en-US" sz="1000" dirty="0"/>
+          </a:p>
+        </p:txBody>
+      </p:sp>
+      <p:sp>
+        <p:nvSpPr>
+          <p:cNvPr id="11" name="Text 8"/>
+          <p:cNvSpPr/>
+          <p:nvPr/>
+        </p:nvSpPr>
+        <p:spPr>
+          <a:xfrm>
+            <a:off x="7223760" y="1371600"/>
+            <a:ext cx="3931920" cy="411480"/>
+          </a:xfrm>
+          <a:prstGeom prst="rect">
+            <a:avLst/>
+          </a:prstGeom>
+          <a:noFill/>
+          <a:ln/>
+        </p:spPr>
+        <p:txBody>
+          <a:bodyPr wrap="square" rtlCol="0" anchor="ctr"/>
+          <a:lstStyle/>
+          <a:p>
+            <a:pPr indent="0" marL="0">
+              <a:buNone/>
+            </a:pPr>
+            <a:r>
+              <a:rPr lang="en-US" sz="1500" b="1" dirty="0">
+                <a:solidFill>
+                  <a:srgbClr val="FFFFFF"/>
+                </a:solidFill>
+                <a:latin typeface="Segoe UI" pitchFamily="34" charset="0"/>
+                <a:ea typeface="Segoe UI" pitchFamily="34" charset="-122"/>
+                <a:cs typeface="Segoe UI" pitchFamily="34" charset="-120"/>
+              </a:rPr>
+              <a:t>Yeni Nesil Karar Destek Platformu</a:t>
+            </a:r>
+            <a:endParaRPr lang="en-US" sz="1500" dirty="0"/>
+          </a:p>
+        </p:txBody>
+      </p:sp>
+      <p:sp>
+        <p:nvSpPr>
+          <p:cNvPr id="12" name="Shape 9"/>
+          <p:cNvSpPr/>
+          <p:nvPr/>
+        </p:nvSpPr>
+        <p:spPr>
+          <a:xfrm>
+            <a:off x="7223760" y="1920240"/>
+            <a:ext cx="3931920" cy="685800"/>
+          </a:xfrm>
+          <a:prstGeom prst="roundRect">
+            <a:avLst>
+              <a:gd name="adj" fmla="val 13333"/>
+            </a:avLst>
+          </a:prstGeom>
+          <a:solidFill>
+            <a:srgbClr val="0D1728"/>
           </a:solidFill>
           <a:ln w="12700">
             <a:solidFill>
-              <a:srgbClr val="334155"/>
+              <a:srgbClr val="233348"/>
             </a:solidFill>
             <a:prstDash val="solid"/>
           </a:ln>
@@ -1916,30 +2073,66 @@
       </p:sp>
       <p:sp>
         <p:nvSpPr>
-          <p:cNvPr id="9" name="Text 6"/>
-          <p:cNvSpPr/>
-          <p:nvPr/>
-        </p:nvSpPr>
-        <p:spPr>
-          <a:xfrm>
-            <a:off x="1097280" y="5715000"/>
-            <a:ext cx="4663440" cy="640080"/>
-          </a:xfrm>
-          <a:prstGeom prst="rect">
-            <a:avLst/>
-          </a:prstGeom>
-          <a:noFill/>
-          <a:ln/>
-        </p:spPr>
-        <p:txBody>
-          <a:bodyPr wrap="square" rtlCol="0" anchor="ctr"/>
-          <a:lstStyle/>
-          <a:p>
-            <a:pPr indent="0" marL="0">
-              <a:buNone/>
-            </a:pPr>
-            <a:r>
-              <a:rPr lang="en-US" sz="1000" dirty="0">
+          <p:cNvPr id="13" name="Text 10"/>
+          <p:cNvSpPr/>
+          <p:nvPr/>
+        </p:nvSpPr>
+        <p:spPr>
+          <a:xfrm>
+            <a:off x="7360920" y="2029968"/>
+            <a:ext cx="411480" cy="457200"/>
+          </a:xfrm>
+          <a:prstGeom prst="rect">
+            <a:avLst/>
+          </a:prstGeom>
+          <a:noFill/>
+          <a:ln/>
+        </p:spPr>
+        <p:txBody>
+          <a:bodyPr wrap="square" rtlCol="0" anchor="ctr"/>
+          <a:lstStyle/>
+          <a:p>
+            <a:pPr indent="0" marL="0">
+              <a:buNone/>
+            </a:pPr>
+            <a:r>
+              <a:rPr lang="en-US" sz="1600" dirty="0">
+                <a:solidFill>
+                  <a:srgbClr val="000000"/>
+                </a:solidFill>
+              </a:rPr>
+              <a:t>🌿</a:t>
+            </a:r>
+            <a:endParaRPr lang="en-US" sz="1600" dirty="0"/>
+          </a:p>
+        </p:txBody>
+      </p:sp>
+      <p:sp>
+        <p:nvSpPr>
+          <p:cNvPr id="14" name="Text 11"/>
+          <p:cNvSpPr/>
+          <p:nvPr/>
+        </p:nvSpPr>
+        <p:spPr>
+          <a:xfrm>
+            <a:off x="7818120" y="2011680"/>
+            <a:ext cx="3200400" cy="256032"/>
+          </a:xfrm>
+          <a:prstGeom prst="rect">
+            <a:avLst/>
+          </a:prstGeom>
+          <a:noFill/>
+          <a:ln/>
+        </p:spPr>
+        <p:txBody>
+          <a:bodyPr wrap="square" rtlCol="0" anchor="ctr"/>
+          <a:lstStyle/>
+          <a:p>
+            <a:pPr indent="0" marL="0">
+              <a:buNone/>
+            </a:pPr>
+            <a:r>
+              <a:rPr lang="en-US" sz="1100" b="1" dirty="0">
                 <a:solidFill>
                   <a:srgbClr val="FFFFFF"/>
                 </a:solidFill>
@@ -1947,16 +2140,140 @@
                 <a:ea typeface="Segoe UI" pitchFamily="34" charset="-122"/>
                 <a:cs typeface="Segoe UI" pitchFamily="34" charset="-120"/>
               </a:rPr>
-              <a:t>Geliştirici: Erkan Erdem | erkanerdem.online</a:t>
-            </a:r>
-            <a:endParaRPr lang="en-US" sz="1000" dirty="0"/>
-          </a:p>
-          <a:p>
-            <a:pPr indent="0" marL="0">
-              <a:buNone/>
-            </a:pPr>
-            <a:r>
-              <a:rPr lang="en-US" sz="1000" dirty="0">
+              <a:t>Hassas Rasyon Hesaplama</a:t>
+            </a:r>
+            <a:endParaRPr lang="en-US" sz="1100" dirty="0"/>
+          </a:p>
+        </p:txBody>
+      </p:sp>
+      <p:sp>
+        <p:nvSpPr>
+          <p:cNvPr id="15" name="Text 12"/>
+          <p:cNvSpPr/>
+          <p:nvPr/>
+        </p:nvSpPr>
+        <p:spPr>
+          <a:xfrm>
+            <a:off x="7818120" y="2267712"/>
+            <a:ext cx="3200400" cy="292608"/>
+          </a:xfrm>
+          <a:prstGeom prst="rect">
+            <a:avLst/>
+          </a:prstGeom>
+          <a:noFill/>
+          <a:ln/>
+        </p:spPr>
+        <p:txBody>
+          <a:bodyPr wrap="square" rtlCol="0" anchor="ctr"/>
+          <a:lstStyle/>
+          <a:p>
+            <a:pPr indent="0" marL="0">
+              <a:buNone/>
+            </a:pPr>
+            <a:r>
+              <a:rPr lang="en-US" sz="900" dirty="0">
+                <a:solidFill>
+                  <a:srgbClr val="94A3B8"/>
+                </a:solidFill>
+                <a:latin typeface="Segoe UI" pitchFamily="34" charset="0"/>
+                <a:ea typeface="Segoe UI" pitchFamily="34" charset="-122"/>
+                <a:cs typeface="Segoe UI" pitchFamily="34" charset="-120"/>
+              </a:rPr>
+              <a:t>KM, HP, Nişasta ve Kaba/Kesif dengesi canlı simülasyonu.</a:t>
+            </a:r>
+            <a:endParaRPr lang="en-US" sz="900" dirty="0"/>
+          </a:p>
+        </p:txBody>
+      </p:sp>
+      <p:sp>
+        <p:nvSpPr>
+          <p:cNvPr id="16" name="Shape 13"/>
+          <p:cNvSpPr/>
+          <p:nvPr/>
+        </p:nvSpPr>
+        <p:spPr>
+          <a:xfrm>
+            <a:off x="7223760" y="2706624"/>
+            <a:ext cx="3931920" cy="685800"/>
+          </a:xfrm>
+          <a:prstGeom prst="roundRect">
+            <a:avLst>
+              <a:gd name="adj" fmla="val 13333"/>
+            </a:avLst>
+          </a:prstGeom>
+          <a:solidFill>
+            <a:srgbClr val="0D1728"/>
+          </a:solidFill>
+          <a:ln w="12700">
+            <a:solidFill>
+              <a:srgbClr val="233348"/>
+            </a:solidFill>
+            <a:prstDash val="solid"/>
+          </a:ln>
+        </p:spPr>
+      </p:sp>
+      <p:sp>
+        <p:nvSpPr>
+          <p:cNvPr id="17" name="Text 14"/>
+          <p:cNvSpPr/>
+          <p:nvPr/>
+        </p:nvSpPr>
+        <p:spPr>
+          <a:xfrm>
+            <a:off x="7360920" y="2816352"/>
+            <a:ext cx="411480" cy="457200"/>
+          </a:xfrm>
+          <a:prstGeom prst="rect">
+            <a:avLst/>
+          </a:prstGeom>
+          <a:noFill/>
+          <a:ln/>
+        </p:spPr>
+        <p:txBody>
+          <a:bodyPr wrap="square" rtlCol="0" anchor="ctr"/>
+          <a:lstStyle/>
+          <a:p>
+            <a:pPr indent="0" marL="0">
+              <a:buNone/>
+            </a:pPr>
+            <a:r>
+              <a:rPr lang="en-US" sz="1600" dirty="0">
+                <a:solidFill>
+                  <a:srgbClr val="000000"/>
+                </a:solidFill>
+              </a:rPr>
+              <a:t>📊</a:t>
+            </a:r>
+            <a:endParaRPr lang="en-US" sz="1600" dirty="0"/>
+          </a:p>
+        </p:txBody>
+      </p:sp>
+      <p:sp>
+        <p:nvSpPr>
+          <p:cNvPr id="18" name="Text 15"/>
+          <p:cNvSpPr/>
+          <p:nvPr/>
+        </p:nvSpPr>
+        <p:spPr>
+          <a:xfrm>
+            <a:off x="7818120" y="2798064"/>
+            <a:ext cx="3200400" cy="256032"/>
+          </a:xfrm>
+          <a:prstGeom prst="rect">
+            <a:avLst/>
+          </a:prstGeom>
+          <a:noFill/>
+          <a:ln/>
+        </p:spPr>
+        <p:txBody>
+          <a:bodyPr wrap="square" rtlCol="0" anchor="ctr"/>
+          <a:lstStyle/>
+          <a:p>
+            <a:pPr indent="0" marL="0">
+              <a:buNone/>
+            </a:pPr>
+            <a:r>
+              <a:rPr lang="en-US" sz="1100" b="1" dirty="0">
                 <a:solidFill>
                   <a:srgbClr val="FFFFFF"/>
                 </a:solidFill>
@@ -1964,9 +2281,471 @@
                 <a:ea typeface="Segoe UI" pitchFamily="34" charset="-122"/>
                 <a:cs typeface="Segoe UI" pitchFamily="34" charset="-120"/>
               </a:rPr>
-              <a:t>Sürüm: v1.0 Production Ready • PWA &amp; Mobil Uyumlu</a:t>
-            </a:r>
-            <a:endParaRPr lang="en-US" sz="1000" dirty="0"/>
+              <a:t>Dinamik Süt / Yem Paritesi</a:t>
+            </a:r>
+            <a:endParaRPr lang="en-US" sz="1100" dirty="0"/>
+          </a:p>
+        </p:txBody>
+      </p:sp>
+      <p:sp>
+        <p:nvSpPr>
+          <p:cNvPr id="19" name="Text 16"/>
+          <p:cNvSpPr/>
+          <p:nvPr/>
+        </p:nvSpPr>
+        <p:spPr>
+          <a:xfrm>
+            <a:off x="7818120" y="3054096"/>
+            <a:ext cx="3200400" cy="292608"/>
+          </a:xfrm>
+          <a:prstGeom prst="rect">
+            <a:avLst/>
+          </a:prstGeom>
+          <a:noFill/>
+          <a:ln/>
+        </p:spPr>
+        <p:txBody>
+          <a:bodyPr wrap="square" rtlCol="0" anchor="ctr"/>
+          <a:lstStyle/>
+          <a:p>
+            <a:pPr indent="0" marL="0">
+              <a:buNone/>
+            </a:pPr>
+            <a:r>
+              <a:rPr lang="en-US" sz="900" dirty="0">
+                <a:solidFill>
+                  <a:srgbClr val="94A3B8"/>
+                </a:solidFill>
+                <a:latin typeface="Segoe UI" pitchFamily="34" charset="0"/>
+                <a:ea typeface="Segoe UI" pitchFamily="34" charset="-122"/>
+                <a:cs typeface="Segoe UI" pitchFamily="34" charset="-120"/>
+              </a:rPr>
+              <a:t>1 Litre sütün yem maliyeti ve başa baş katsayı takibi.</a:t>
+            </a:r>
+            <a:endParaRPr lang="en-US" sz="900" dirty="0"/>
+          </a:p>
+        </p:txBody>
+      </p:sp>
+      <p:sp>
+        <p:nvSpPr>
+          <p:cNvPr id="20" name="Shape 17"/>
+          <p:cNvSpPr/>
+          <p:nvPr/>
+        </p:nvSpPr>
+        <p:spPr>
+          <a:xfrm>
+            <a:off x="7223760" y="3493008"/>
+            <a:ext cx="3931920" cy="685800"/>
+          </a:xfrm>
+          <a:prstGeom prst="roundRect">
+            <a:avLst>
+              <a:gd name="adj" fmla="val 13333"/>
+            </a:avLst>
+          </a:prstGeom>
+          <a:solidFill>
+            <a:srgbClr val="0D1728"/>
+          </a:solidFill>
+          <a:ln w="12700">
+            <a:solidFill>
+              <a:srgbClr val="233348"/>
+            </a:solidFill>
+            <a:prstDash val="solid"/>
+          </a:ln>
+        </p:spPr>
+      </p:sp>
+      <p:sp>
+        <p:nvSpPr>
+          <p:cNvPr id="21" name="Text 18"/>
+          <p:cNvSpPr/>
+          <p:nvPr/>
+        </p:nvSpPr>
+        <p:spPr>
+          <a:xfrm>
+            <a:off x="7360920" y="3602736"/>
+            <a:ext cx="411480" cy="457200"/>
+          </a:xfrm>
+          <a:prstGeom prst="rect">
+            <a:avLst/>
+          </a:prstGeom>
+          <a:noFill/>
+          <a:ln/>
+        </p:spPr>
+        <p:txBody>
+          <a:bodyPr wrap="square" rtlCol="0" anchor="ctr"/>
+          <a:lstStyle/>
+          <a:p>
+            <a:pPr indent="0" marL="0">
+              <a:buNone/>
+            </a:pPr>
+            <a:r>
+              <a:rPr lang="en-US" sz="1600" dirty="0">
+                <a:solidFill>
+                  <a:srgbClr val="000000"/>
+                </a:solidFill>
+              </a:rPr>
+              <a:t>🌾</a:t>
+            </a:r>
+            <a:endParaRPr lang="en-US" sz="1600" dirty="0"/>
+          </a:p>
+        </p:txBody>
+      </p:sp>
+      <p:sp>
+        <p:nvSpPr>
+          <p:cNvPr id="22" name="Text 19"/>
+          <p:cNvSpPr/>
+          <p:nvPr/>
+        </p:nvSpPr>
+        <p:spPr>
+          <a:xfrm>
+            <a:off x="7818120" y="3584448"/>
+            <a:ext cx="3200400" cy="256032"/>
+          </a:xfrm>
+          <a:prstGeom prst="rect">
+            <a:avLst/>
+          </a:prstGeom>
+          <a:noFill/>
+          <a:ln/>
+        </p:spPr>
+        <p:txBody>
+          <a:bodyPr wrap="square" rtlCol="0" anchor="ctr"/>
+          <a:lstStyle/>
+          <a:p>
+            <a:pPr indent="0" marL="0">
+              <a:buNone/>
+            </a:pPr>
+            <a:r>
+              <a:rPr lang="en-US" sz="1100" b="1" dirty="0">
+                <a:solidFill>
+                  <a:srgbClr val="FFFFFF"/>
+                </a:solidFill>
+                <a:latin typeface="Segoe UI" pitchFamily="34" charset="0"/>
+                <a:ea typeface="Segoe UI" pitchFamily="34" charset="-122"/>
+                <a:cs typeface="Segoe UI" pitchFamily="34" charset="-120"/>
+              </a:rPr>
+              <a:t>Geniş Yem &amp; Fabrika Kataloğu</a:t>
+            </a:r>
+            <a:endParaRPr lang="en-US" sz="1100" dirty="0"/>
+          </a:p>
+        </p:txBody>
+      </p:sp>
+      <p:sp>
+        <p:nvSpPr>
+          <p:cNvPr id="23" name="Text 20"/>
+          <p:cNvSpPr/>
+          <p:nvPr/>
+        </p:nvSpPr>
+        <p:spPr>
+          <a:xfrm>
+            <a:off x="7818120" y="3840480"/>
+            <a:ext cx="3200400" cy="292608"/>
+          </a:xfrm>
+          <a:prstGeom prst="rect">
+            <a:avLst/>
+          </a:prstGeom>
+          <a:noFill/>
+          <a:ln/>
+        </p:spPr>
+        <p:txBody>
+          <a:bodyPr wrap="square" rtlCol="0" anchor="ctr"/>
+          <a:lstStyle/>
+          <a:p>
+            <a:pPr indent="0" marL="0">
+              <a:buNone/>
+            </a:pPr>
+            <a:r>
+              <a:rPr lang="en-US" sz="900" dirty="0">
+                <a:solidFill>
+                  <a:srgbClr val="94A3B8"/>
+                </a:solidFill>
+                <a:latin typeface="Segoe UI" pitchFamily="34" charset="0"/>
+                <a:ea typeface="Segoe UI" pitchFamily="34" charset="-122"/>
+                <a:cs typeface="Segoe UI" pitchFamily="34" charset="-120"/>
+              </a:rPr>
+              <a:t>13+ standart hammadde ve Türkiye tescilli fabrika yemleri.</a:t>
+            </a:r>
+            <a:endParaRPr lang="en-US" sz="900" dirty="0"/>
+          </a:p>
+        </p:txBody>
+      </p:sp>
+      <p:sp>
+        <p:nvSpPr>
+          <p:cNvPr id="24" name="Shape 21"/>
+          <p:cNvSpPr/>
+          <p:nvPr/>
+        </p:nvSpPr>
+        <p:spPr>
+          <a:xfrm>
+            <a:off x="7223760" y="4279392"/>
+            <a:ext cx="3931920" cy="685800"/>
+          </a:xfrm>
+          <a:prstGeom prst="roundRect">
+            <a:avLst>
+              <a:gd name="adj" fmla="val 13333"/>
+            </a:avLst>
+          </a:prstGeom>
+          <a:solidFill>
+            <a:srgbClr val="0D1728"/>
+          </a:solidFill>
+          <a:ln w="12700">
+            <a:solidFill>
+              <a:srgbClr val="233348"/>
+            </a:solidFill>
+            <a:prstDash val="solid"/>
+          </a:ln>
+        </p:spPr>
+      </p:sp>
+      <p:sp>
+        <p:nvSpPr>
+          <p:cNvPr id="25" name="Text 22"/>
+          <p:cNvSpPr/>
+          <p:nvPr/>
+        </p:nvSpPr>
+        <p:spPr>
+          <a:xfrm>
+            <a:off x="7360920" y="4389120"/>
+            <a:ext cx="411480" cy="457200"/>
+          </a:xfrm>
+          <a:prstGeom prst="rect">
+            <a:avLst/>
+          </a:prstGeom>
+          <a:noFill/>
+          <a:ln/>
+        </p:spPr>
+        <p:txBody>
+          <a:bodyPr wrap="square" rtlCol="0" anchor="ctr"/>
+          <a:lstStyle/>
+          <a:p>
+            <a:pPr indent="0" marL="0">
+              <a:buNone/>
+            </a:pPr>
+            <a:r>
+              <a:rPr lang="en-US" sz="1600" dirty="0">
+                <a:solidFill>
+                  <a:srgbClr val="000000"/>
+                </a:solidFill>
+              </a:rPr>
+              <a:t>💰</a:t>
+            </a:r>
+            <a:endParaRPr lang="en-US" sz="1600" dirty="0"/>
+          </a:p>
+        </p:txBody>
+      </p:sp>
+      <p:sp>
+        <p:nvSpPr>
+          <p:cNvPr id="26" name="Text 23"/>
+          <p:cNvSpPr/>
+          <p:nvPr/>
+        </p:nvSpPr>
+        <p:spPr>
+          <a:xfrm>
+            <a:off x="7818120" y="4370832"/>
+            <a:ext cx="3200400" cy="256032"/>
+          </a:xfrm>
+          <a:prstGeom prst="rect">
+            <a:avLst/>
+          </a:prstGeom>
+          <a:noFill/>
+          <a:ln/>
+        </p:spPr>
+        <p:txBody>
+          <a:bodyPr wrap="square" rtlCol="0" anchor="ctr"/>
+          <a:lstStyle/>
+          <a:p>
+            <a:pPr indent="0" marL="0">
+              <a:buNone/>
+            </a:pPr>
+            <a:r>
+              <a:rPr lang="en-US" sz="1100" b="1" dirty="0">
+                <a:solidFill>
+                  <a:srgbClr val="FFFFFF"/>
+                </a:solidFill>
+                <a:latin typeface="Segoe UI" pitchFamily="34" charset="0"/>
+                <a:ea typeface="Segoe UI" pitchFamily="34" charset="-122"/>
+                <a:cs typeface="Segoe UI" pitchFamily="34" charset="-120"/>
+              </a:rPr>
+              <a:t>Çiftlik Bütçe &amp; Net Karlılık</a:t>
+            </a:r>
+            <a:endParaRPr lang="en-US" sz="1100" dirty="0"/>
+          </a:p>
+        </p:txBody>
+      </p:sp>
+      <p:sp>
+        <p:nvSpPr>
+          <p:cNvPr id="27" name="Text 24"/>
+          <p:cNvSpPr/>
+          <p:nvPr/>
+        </p:nvSpPr>
+        <p:spPr>
+          <a:xfrm>
+            <a:off x="7818120" y="4626864"/>
+            <a:ext cx="3200400" cy="292608"/>
+          </a:xfrm>
+          <a:prstGeom prst="rect">
+            <a:avLst/>
+          </a:prstGeom>
+          <a:noFill/>
+          <a:ln/>
+        </p:spPr>
+        <p:txBody>
+          <a:bodyPr wrap="square" rtlCol="0" anchor="ctr"/>
+          <a:lstStyle/>
+          <a:p>
+            <a:pPr indent="0" marL="0">
+              <a:buNone/>
+            </a:pPr>
+            <a:r>
+              <a:rPr lang="en-US" sz="900" dirty="0">
+                <a:solidFill>
+                  <a:srgbClr val="94A3B8"/>
+                </a:solidFill>
+                <a:latin typeface="Segoe UI" pitchFamily="34" charset="0"/>
+                <a:ea typeface="Segoe UI" pitchFamily="34" charset="-122"/>
+                <a:cs typeface="Segoe UI" pitchFamily="34" charset="-120"/>
+              </a:rPr>
+              <a:t>Genel giderler ile harmanlanmış gerçek 1L süt maliyeti.</a:t>
+            </a:r>
+            <a:endParaRPr lang="en-US" sz="900" dirty="0"/>
+          </a:p>
+        </p:txBody>
+      </p:sp>
+      <p:sp>
+        <p:nvSpPr>
+          <p:cNvPr id="28" name="Shape 25"/>
+          <p:cNvSpPr/>
+          <p:nvPr/>
+        </p:nvSpPr>
+        <p:spPr>
+          <a:xfrm>
+            <a:off x="7223760" y="5065776"/>
+            <a:ext cx="3931920" cy="685800"/>
+          </a:xfrm>
+          <a:prstGeom prst="roundRect">
+            <a:avLst>
+              <a:gd name="adj" fmla="val 13333"/>
+            </a:avLst>
+          </a:prstGeom>
+          <a:solidFill>
+            <a:srgbClr val="0D1728"/>
+          </a:solidFill>
+          <a:ln w="12700">
+            <a:solidFill>
+              <a:srgbClr val="233348"/>
+            </a:solidFill>
+            <a:prstDash val="solid"/>
+          </a:ln>
+        </p:spPr>
+      </p:sp>
+      <p:sp>
+        <p:nvSpPr>
+          <p:cNvPr id="29" name="Text 26"/>
+          <p:cNvSpPr/>
+          <p:nvPr/>
+        </p:nvSpPr>
+        <p:spPr>
+          <a:xfrm>
+            <a:off x="7360920" y="5175504"/>
+            <a:ext cx="411480" cy="457200"/>
+          </a:xfrm>
+          <a:prstGeom prst="rect">
+            <a:avLst/>
+          </a:prstGeom>
+          <a:noFill/>
+          <a:ln/>
+        </p:spPr>
+        <p:txBody>
+          <a:bodyPr wrap="square" rtlCol="0" anchor="ctr"/>
+          <a:lstStyle/>
+          <a:p>
+            <a:pPr indent="0" marL="0">
+              <a:buNone/>
+            </a:pPr>
+            <a:r>
+              <a:rPr lang="en-US" sz="1600" dirty="0">
+                <a:solidFill>
+                  <a:srgbClr val="000000"/>
+                </a:solidFill>
+              </a:rPr>
+              <a:t>🛡️</a:t>
+            </a:r>
+            <a:endParaRPr lang="en-US" sz="1600" dirty="0"/>
+          </a:p>
+        </p:txBody>
+      </p:sp>
+      <p:sp>
+        <p:nvSpPr>
+          <p:cNvPr id="30" name="Text 27"/>
+          <p:cNvSpPr/>
+          <p:nvPr/>
+        </p:nvSpPr>
+        <p:spPr>
+          <a:xfrm>
+            <a:off x="7818120" y="5157216"/>
+            <a:ext cx="3200400" cy="256032"/>
+          </a:xfrm>
+          <a:prstGeom prst="rect">
+            <a:avLst/>
+          </a:prstGeom>
+          <a:noFill/>
+          <a:ln/>
+        </p:spPr>
+        <p:txBody>
+          <a:bodyPr wrap="square" rtlCol="0" anchor="ctr"/>
+          <a:lstStyle/>
+          <a:p>
+            <a:pPr indent="0" marL="0">
+              <a:buNone/>
+            </a:pPr>
+            <a:r>
+              <a:rPr lang="en-US" sz="1100" b="1" dirty="0">
+                <a:solidFill>
+                  <a:srgbClr val="FFFFFF"/>
+                </a:solidFill>
+                <a:latin typeface="Segoe UI" pitchFamily="34" charset="0"/>
+                <a:ea typeface="Segoe UI" pitchFamily="34" charset="-122"/>
+                <a:cs typeface="Segoe UI" pitchFamily="34" charset="-120"/>
+              </a:rPr>
+              <a:t>Audit Log &amp; 7/24 Takip</a:t>
+            </a:r>
+            <a:endParaRPr lang="en-US" sz="1100" dirty="0"/>
+          </a:p>
+        </p:txBody>
+      </p:sp>
+      <p:sp>
+        <p:nvSpPr>
+          <p:cNvPr id="31" name="Text 28"/>
+          <p:cNvSpPr/>
+          <p:nvPr/>
+        </p:nvSpPr>
+        <p:spPr>
+          <a:xfrm>
+            <a:off x="7818120" y="5413248"/>
+            <a:ext cx="3200400" cy="292608"/>
+          </a:xfrm>
+          <a:prstGeom prst="rect">
+            <a:avLst/>
+          </a:prstGeom>
+          <a:noFill/>
+          <a:ln/>
+        </p:spPr>
+        <p:txBody>
+          <a:bodyPr wrap="square" rtlCol="0" anchor="ctr"/>
+          <a:lstStyle/>
+          <a:p>
+            <a:pPr indent="0" marL="0">
+              <a:buNone/>
+            </a:pPr>
+            <a:r>
+              <a:rPr lang="en-US" sz="900" dirty="0">
+                <a:solidFill>
+                  <a:srgbClr val="94A3B8"/>
+                </a:solidFill>
+                <a:latin typeface="Segoe UI" pitchFamily="34" charset="0"/>
+                <a:ea typeface="Segoe UI" pitchFamily="34" charset="-122"/>
+                <a:cs typeface="Segoe UI" pitchFamily="34" charset="-120"/>
+              </a:rPr>
+              <a:t>Kullanıcı hareket denetimi ve otomatik Gmail hata bildirimi.</a:t>
+            </a:r>
+            <a:endParaRPr lang="en-US" sz="900" dirty="0"/>
           </a:p>
         </p:txBody>
       </p:sp>
@@ -2010,24 +2789,24 @@
         </p:nvSpPr>
         <p:spPr>
           <a:xfrm>
-            <a:off x="731520" y="548640"/>
-            <a:ext cx="9144000" cy="274320"/>
-          </a:xfrm>
-          <a:prstGeom prst="rect">
-            <a:avLst/>
-          </a:prstGeom>
-          <a:noFill/>
-          <a:ln/>
-        </p:spPr>
-        <p:txBody>
-          <a:bodyPr wrap="square" rtlCol="0" anchor="ctr"/>
-          <a:lstStyle/>
-          <a:p>
-            <a:pPr indent="0" marL="0">
-              <a:buNone/>
-            </a:pPr>
-            <a:r>
-              <a:rPr lang="en-US" sz="1100" b="1" dirty="0">
+            <a:off x="731520" y="411480"/>
+            <a:ext cx="10728655" cy="274320"/>
+          </a:xfrm>
+          <a:prstGeom prst="rect">
+            <a:avLst/>
+          </a:prstGeom>
+          <a:noFill/>
+          <a:ln/>
+        </p:spPr>
+        <p:txBody>
+          <a:bodyPr wrap="square" rtlCol="0" anchor="ctr"/>
+          <a:lstStyle/>
+          <a:p>
+            <a:pPr indent="0" marL="0">
+              <a:buNone/>
+            </a:pPr>
+            <a:r>
+              <a:rPr lang="en-US" sz="1050" b="1" spc="150" kern="0" dirty="0">
                 <a:solidFill>
                   <a:srgbClr val="34D399"/>
                 </a:solidFill>
@@ -2035,9 +2814,9 @@
                 <a:ea typeface="Segoe UI" pitchFamily="34" charset="-122"/>
                 <a:cs typeface="Segoe UI" pitchFamily="34" charset="-120"/>
               </a:rPr>
-              <a:t>STRATEJİK KAZANIMLAR &amp; HEMEN BAŞLAYIN</a:t>
-            </a:r>
-            <a:endParaRPr lang="en-US" sz="1100" dirty="0"/>
+              <a:t>STRATEJIK KAZANIMLAR &amp; HEMEN BAŞLAYIN</a:t>
+            </a:r>
+            <a:endParaRPr lang="en-US" sz="1050" dirty="0"/>
           </a:p>
         </p:txBody>
       </p:sp>
@@ -2049,24 +2828,24 @@
         </p:nvSpPr>
         <p:spPr>
           <a:xfrm>
-            <a:off x="731520" y="822960"/>
-            <a:ext cx="9144000" cy="548640"/>
-          </a:xfrm>
-          <a:prstGeom prst="rect">
-            <a:avLst/>
-          </a:prstGeom>
-          <a:noFill/>
-          <a:ln/>
-        </p:spPr>
-        <p:txBody>
-          <a:bodyPr wrap="square" rtlCol="0" anchor="ctr"/>
-          <a:lstStyle/>
-          <a:p>
-            <a:pPr indent="0" marL="0">
-              <a:buNone/>
-            </a:pPr>
-            <a:r>
-              <a:rPr lang="en-US" sz="2600" b="1" dirty="0">
+            <a:off x="731520" y="685800"/>
+            <a:ext cx="10728655" cy="548640"/>
+          </a:xfrm>
+          <a:prstGeom prst="rect">
+            <a:avLst/>
+          </a:prstGeom>
+          <a:noFill/>
+          <a:ln/>
+        </p:spPr>
+        <p:txBody>
+          <a:bodyPr wrap="square" rtlCol="0" anchor="ctr"/>
+          <a:lstStyle/>
+          <a:p>
+            <a:pPr indent="0" marL="0">
+              <a:buNone/>
+            </a:pPr>
+            <a:r>
+              <a:rPr lang="en-US" sz="2400" b="1" dirty="0">
                 <a:solidFill>
                   <a:srgbClr val="FFFFFF"/>
                 </a:solidFill>
@@ -2076,7 +2855,7 @@
               </a:rPr>
               <a:t>MilkIQ ile Çiftliğinizin Geleceğini Yönetin</a:t>
             </a:r>
-            <a:endParaRPr lang="en-US" sz="2600" dirty="0"/>
+            <a:endParaRPr lang="en-US" sz="2400" dirty="0"/>
           </a:p>
         </p:txBody>
       </p:sp>
@@ -2088,16 +2867,16 @@
         </p:nvSpPr>
         <p:spPr>
           <a:xfrm>
-            <a:off x="731520" y="1645920"/>
-            <a:ext cx="3429000" cy="2194560"/>
+            <a:off x="731520" y="1371600"/>
+            <a:ext cx="3429000" cy="2103120"/>
           </a:xfrm>
           <a:prstGeom prst="roundRect">
             <a:avLst>
-              <a:gd name="adj" fmla="val 10417"/>
+              <a:gd name="adj" fmla="val 7826"/>
             </a:avLst>
           </a:prstGeom>
           <a:solidFill>
-            <a:srgbClr val="1E293B"/>
+            <a:srgbClr val="152238"/>
           </a:solidFill>
           <a:ln w="19050">
             <a:solidFill>
@@ -2115,8 +2894,8 @@
         </p:nvSpPr>
         <p:spPr>
           <a:xfrm>
-            <a:off x="914400" y="1828800"/>
-            <a:ext cx="3063240" cy="640080"/>
+            <a:off x="914400" y="1554480"/>
+            <a:ext cx="3063240" cy="594360"/>
           </a:xfrm>
           <a:prstGeom prst="rect">
             <a:avLst/>
@@ -2132,7 +2911,7 @@
               <a:buNone/>
             </a:pPr>
             <a:r>
-              <a:rPr lang="en-US" sz="3200" b="1" dirty="0">
+              <a:rPr lang="en-US" sz="3000" b="1" dirty="0">
                 <a:solidFill>
                   <a:srgbClr val="34D399"/>
                 </a:solidFill>
@@ -2142,7 +2921,7 @@
               </a:rPr>
               <a:t>%15 - 25</a:t>
             </a:r>
-            <a:endParaRPr lang="en-US" sz="3200" dirty="0"/>
+            <a:endParaRPr lang="en-US" sz="3000" dirty="0"/>
           </a:p>
         </p:txBody>
       </p:sp>
@@ -2154,8 +2933,8 @@
         </p:nvSpPr>
         <p:spPr>
           <a:xfrm>
-            <a:off x="914400" y="2514600"/>
-            <a:ext cx="3063240" cy="365760"/>
+            <a:off x="914400" y="2194560"/>
+            <a:ext cx="3063240" cy="320040"/>
           </a:xfrm>
           <a:prstGeom prst="rect">
             <a:avLst/>
@@ -2193,7 +2972,7 @@
         </p:nvSpPr>
         <p:spPr>
           <a:xfrm>
-            <a:off x="914400" y="2926080"/>
+            <a:off x="914400" y="2560320"/>
             <a:ext cx="3063240" cy="731520"/>
           </a:xfrm>
           <a:prstGeom prst="rect">
@@ -2210,7 +2989,7 @@
               <a:buNone/>
             </a:pPr>
             <a:r>
-              <a:rPr lang="en-US" sz="950" dirty="0">
+              <a:rPr lang="en-US" sz="1000" dirty="0">
                 <a:solidFill>
                   <a:srgbClr val="94A3B8"/>
                 </a:solidFill>
@@ -2218,9 +2997,9 @@
                 <a:ea typeface="Segoe UI" pitchFamily="34" charset="-122"/>
                 <a:cs typeface="Segoe UI" pitchFamily="34" charset="-120"/>
               </a:rPr>
-              <a:t>Fazladan protein/enerji israfının bilimsel olarak önlenmesi.</a:t>
-            </a:r>
-            <a:endParaRPr lang="en-US" sz="950" dirty="0"/>
+              <a:t>Fazladan protein ve enerji israfının bilimsel olarak önlenmesi.</a:t>
+            </a:r>
+            <a:endParaRPr lang="en-US" sz="1000" dirty="0"/>
           </a:p>
         </p:txBody>
       </p:sp>
@@ -2232,16 +3011,16 @@
         </p:nvSpPr>
         <p:spPr>
           <a:xfrm>
-            <a:off x="4343400" y="1645920"/>
-            <a:ext cx="3429000" cy="2194560"/>
+            <a:off x="4380890" y="1371600"/>
+            <a:ext cx="3429000" cy="2103120"/>
           </a:xfrm>
           <a:prstGeom prst="roundRect">
             <a:avLst>
-              <a:gd name="adj" fmla="val 10417"/>
+              <a:gd name="adj" fmla="val 7826"/>
             </a:avLst>
           </a:prstGeom>
           <a:solidFill>
-            <a:srgbClr val="1E293B"/>
+            <a:srgbClr val="152238"/>
           </a:solidFill>
           <a:ln w="19050">
             <a:solidFill>
@@ -2259,8 +3038,8 @@
         </p:nvSpPr>
         <p:spPr>
           <a:xfrm>
-            <a:off x="4526280" y="1828800"/>
-            <a:ext cx="3063240" cy="640080"/>
+            <a:off x="4563770" y="1554480"/>
+            <a:ext cx="3063240" cy="594360"/>
           </a:xfrm>
           <a:prstGeom prst="rect">
             <a:avLst/>
@@ -2276,7 +3055,7 @@
               <a:buNone/>
             </a:pPr>
             <a:r>
-              <a:rPr lang="en-US" sz="3200" b="1" dirty="0">
+              <a:rPr lang="en-US" sz="3000" b="1" dirty="0">
                 <a:solidFill>
                   <a:srgbClr val="34D399"/>
                 </a:solidFill>
@@ -2286,7 +3065,7 @@
               </a:rPr>
               <a:t>+%12</a:t>
             </a:r>
-            <a:endParaRPr lang="en-US" sz="3200" dirty="0"/>
+            <a:endParaRPr lang="en-US" sz="3000" dirty="0"/>
           </a:p>
         </p:txBody>
       </p:sp>
@@ -2298,8 +3077,8 @@
         </p:nvSpPr>
         <p:spPr>
           <a:xfrm>
-            <a:off x="4526280" y="2514600"/>
-            <a:ext cx="3063240" cy="365760"/>
+            <a:off x="4563770" y="2194560"/>
+            <a:ext cx="3063240" cy="320040"/>
           </a:xfrm>
           <a:prstGeom prst="rect">
             <a:avLst/>
@@ -2337,7 +3116,7 @@
         </p:nvSpPr>
         <p:spPr>
           <a:xfrm>
-            <a:off x="4526280" y="2926080"/>
+            <a:off x="4563770" y="2560320"/>
             <a:ext cx="3063240" cy="731520"/>
           </a:xfrm>
           <a:prstGeom prst="rect">
@@ -2354,7 +3133,7 @@
               <a:buNone/>
             </a:pPr>
             <a:r>
-              <a:rPr lang="en-US" sz="950" dirty="0">
+              <a:rPr lang="en-US" sz="1000" dirty="0">
                 <a:solidFill>
                   <a:srgbClr val="94A3B8"/>
                 </a:solidFill>
@@ -2364,7 +3143,7 @@
               </a:rPr>
               <a:t>Dengeli rumen pH ve optimum laktasyon piki yönetimi.</a:t>
             </a:r>
-            <a:endParaRPr lang="en-US" sz="950" dirty="0"/>
+            <a:endParaRPr lang="en-US" sz="1000" dirty="0"/>
           </a:p>
         </p:txBody>
       </p:sp>
@@ -2376,16 +3155,16 @@
         </p:nvSpPr>
         <p:spPr>
           <a:xfrm>
-            <a:off x="7955280" y="1645920"/>
-            <a:ext cx="3429000" cy="2194560"/>
+            <a:off x="8030261" y="1371600"/>
+            <a:ext cx="3429000" cy="2103120"/>
           </a:xfrm>
           <a:prstGeom prst="roundRect">
             <a:avLst>
-              <a:gd name="adj" fmla="val 10417"/>
+              <a:gd name="adj" fmla="val 7826"/>
             </a:avLst>
           </a:prstGeom>
           <a:solidFill>
-            <a:srgbClr val="1E293B"/>
+            <a:srgbClr val="152238"/>
           </a:solidFill>
           <a:ln w="19050">
             <a:solidFill>
@@ -2403,8 +3182,8 @@
         </p:nvSpPr>
         <p:spPr>
           <a:xfrm>
-            <a:off x="8138160" y="1828800"/>
-            <a:ext cx="3063240" cy="640080"/>
+            <a:off x="8213141" y="1554480"/>
+            <a:ext cx="3063240" cy="594360"/>
           </a:xfrm>
           <a:prstGeom prst="rect">
             <a:avLst/>
@@ -2420,7 +3199,7 @@
               <a:buNone/>
             </a:pPr>
             <a:r>
-              <a:rPr lang="en-US" sz="3200" b="1" dirty="0">
+              <a:rPr lang="en-US" sz="3000" b="1" dirty="0">
                 <a:solidFill>
                   <a:srgbClr val="34D399"/>
                 </a:solidFill>
@@ -2430,7 +3209,7 @@
               </a:rPr>
               <a:t>360°</a:t>
             </a:r>
-            <a:endParaRPr lang="en-US" sz="3200" dirty="0"/>
+            <a:endParaRPr lang="en-US" sz="3000" dirty="0"/>
           </a:p>
         </p:txBody>
       </p:sp>
@@ -2442,8 +3221,8 @@
         </p:nvSpPr>
         <p:spPr>
           <a:xfrm>
-            <a:off x="8138160" y="2514600"/>
-            <a:ext cx="3063240" cy="365760"/>
+            <a:off x="8213141" y="2194560"/>
+            <a:ext cx="3063240" cy="320040"/>
           </a:xfrm>
           <a:prstGeom prst="rect">
             <a:avLst/>
@@ -2481,7 +3260,7 @@
         </p:nvSpPr>
         <p:spPr>
           <a:xfrm>
-            <a:off x="8138160" y="2926080"/>
+            <a:off x="8213141" y="2560320"/>
             <a:ext cx="3063240" cy="731520"/>
           </a:xfrm>
           <a:prstGeom prst="rect">
@@ -2498,7 +3277,7 @@
               <a:buNone/>
             </a:pPr>
             <a:r>
-              <a:rPr lang="en-US" sz="950" dirty="0">
+              <a:rPr lang="en-US" sz="1000" dirty="0">
                 <a:solidFill>
                   <a:srgbClr val="94A3B8"/>
                 </a:solidFill>
@@ -2508,7 +3287,7 @@
               </a:rPr>
               <a:t>1 Litre sütün gerçek maliyeti ve günlük hayvan başı net kar.</a:t>
             </a:r>
-            <a:endParaRPr lang="en-US" sz="950" dirty="0"/>
+            <a:endParaRPr lang="en-US" sz="1000" dirty="0"/>
           </a:p>
         </p:txBody>
       </p:sp>
@@ -2520,16 +3299,16 @@
         </p:nvSpPr>
         <p:spPr>
           <a:xfrm>
-            <a:off x="731520" y="4114800"/>
-            <a:ext cx="10607040" cy="1920240"/>
+            <a:off x="731520" y="3657600"/>
+            <a:ext cx="10728655" cy="2377440"/>
           </a:xfrm>
           <a:prstGeom prst="roundRect">
             <a:avLst>
-              <a:gd name="adj" fmla="val 11905"/>
+              <a:gd name="adj" fmla="val 7692"/>
             </a:avLst>
           </a:prstGeom>
           <a:solidFill>
-            <a:srgbClr val="1E293B"/>
+            <a:srgbClr val="152238"/>
           </a:solidFill>
           <a:ln w="25400">
             <a:solidFill>
@@ -2547,24 +3326,24 @@
         </p:nvSpPr>
         <p:spPr>
           <a:xfrm>
-            <a:off x="1097280" y="4343400"/>
-            <a:ext cx="5486400" cy="365760"/>
-          </a:xfrm>
-          <a:prstGeom prst="rect">
-            <a:avLst/>
-          </a:prstGeom>
-          <a:noFill/>
-          <a:ln/>
-        </p:spPr>
-        <p:txBody>
-          <a:bodyPr wrap="square" rtlCol="0" anchor="ctr"/>
-          <a:lstStyle/>
-          <a:p>
-            <a:pPr indent="0" marL="0">
-              <a:buNone/>
-            </a:pPr>
-            <a:r>
-              <a:rPr lang="en-US" sz="1600" b="1" dirty="0">
+            <a:off x="1097280" y="3931920"/>
+            <a:ext cx="5943600" cy="365760"/>
+          </a:xfrm>
+          <a:prstGeom prst="rect">
+            <a:avLst/>
+          </a:prstGeom>
+          <a:noFill/>
+          <a:ln/>
+        </p:spPr>
+        <p:txBody>
+          <a:bodyPr wrap="square" rtlCol="0" anchor="ctr"/>
+          <a:lstStyle/>
+          <a:p>
+            <a:pPr indent="0" marL="0">
+              <a:buNone/>
+            </a:pPr>
+            <a:r>
+              <a:rPr lang="en-US" sz="1650" b="1" dirty="0">
                 <a:solidFill>
                   <a:srgbClr val="FFFFFF"/>
                 </a:solidFill>
@@ -2574,7 +3353,7 @@
               </a:rPr>
               <a:t>Canlı Uygulama &amp; İletişim</a:t>
             </a:r>
-            <a:endParaRPr lang="en-US" sz="1600" dirty="0"/>
+            <a:endParaRPr lang="en-US" sz="1650" dirty="0"/>
           </a:p>
         </p:txBody>
       </p:sp>
@@ -2586,24 +3365,24 @@
         </p:nvSpPr>
         <p:spPr>
           <a:xfrm>
-            <a:off x="1097280" y="4800600"/>
-            <a:ext cx="5943600" cy="1005840"/>
-          </a:xfrm>
-          <a:prstGeom prst="rect">
-            <a:avLst/>
-          </a:prstGeom>
-          <a:noFill/>
-          <a:ln/>
-        </p:spPr>
-        <p:txBody>
-          <a:bodyPr wrap="square" rtlCol="0" anchor="ctr"/>
-          <a:lstStyle/>
-          <a:p>
-            <a:pPr indent="0" marL="0">
-              <a:buNone/>
-            </a:pPr>
-            <a:r>
-              <a:rPr lang="en-US" sz="1100" dirty="0">
+            <a:off x="1097280" y="4434840"/>
+            <a:ext cx="5943600" cy="1188720"/>
+          </a:xfrm>
+          <a:prstGeom prst="rect">
+            <a:avLst/>
+          </a:prstGeom>
+          <a:noFill/>
+          <a:ln/>
+        </p:spPr>
+        <p:txBody>
+          <a:bodyPr wrap="square" rtlCol="0" anchor="ctr"/>
+          <a:lstStyle/>
+          <a:p>
+            <a:pPr indent="0" marL="0">
+              <a:buNone/>
+            </a:pPr>
+            <a:r>
+              <a:rPr lang="en-US" sz="1150" dirty="0">
                 <a:solidFill>
                   <a:srgbClr val="CBD5E1"/>
                 </a:solidFill>
@@ -2613,14 +3392,14 @@
               </a:rPr>
               <a:t>Canlı Sistem: https://milkiq.erkanerdem.online</a:t>
             </a:r>
-            <a:endParaRPr lang="en-US" sz="1100" dirty="0"/>
-          </a:p>
-          <a:p>
-            <a:pPr indent="0" marL="0">
-              <a:buNone/>
-            </a:pPr>
-            <a:r>
-              <a:rPr lang="en-US" sz="1100" dirty="0">
+            <a:endParaRPr lang="en-US" sz="1150" dirty="0"/>
+          </a:p>
+          <a:p>
+            <a:pPr indent="0" marL="0">
+              <a:buNone/>
+            </a:pPr>
+            <a:r>
+              <a:rPr lang="en-US" sz="1150" dirty="0">
                 <a:solidFill>
                   <a:srgbClr val="CBD5E1"/>
                 </a:solidFill>
@@ -2630,14 +3409,14 @@
               </a:rPr>
               <a:t>Geliştirici Portfolyosu: https://erkanerdem.online</a:t>
             </a:r>
-            <a:endParaRPr lang="en-US" sz="1100" dirty="0"/>
-          </a:p>
-          <a:p>
-            <a:pPr indent="0" marL="0">
-              <a:buNone/>
-            </a:pPr>
-            <a:r>
-              <a:rPr lang="en-US" sz="1100" dirty="0">
+            <a:endParaRPr lang="en-US" sz="1150" dirty="0"/>
+          </a:p>
+          <a:p>
+            <a:pPr indent="0" marL="0">
+              <a:buNone/>
+            </a:pPr>
+            <a:r>
+              <a:rPr lang="en-US" sz="1150" dirty="0">
                 <a:solidFill>
                   <a:srgbClr val="CBD5E1"/>
                 </a:solidFill>
@@ -2647,7 +3426,7 @@
               </a:rPr>
               <a:t>7/24 Kesintisiz Geliştirici Takibi &amp; Teknik Destek</a:t>
             </a:r>
-            <a:endParaRPr lang="en-US" sz="1100" dirty="0"/>
+            <a:endParaRPr lang="en-US" sz="1150" dirty="0"/>
           </a:p>
         </p:txBody>
       </p:sp>
@@ -2659,12 +3438,12 @@
         </p:nvSpPr>
         <p:spPr>
           <a:xfrm>
-            <a:off x="7680960" y="4526280"/>
-            <a:ext cx="3291840" cy="1097280"/>
+            <a:off x="7498080" y="4251960"/>
+            <a:ext cx="3474720" cy="1188720"/>
           </a:xfrm>
           <a:prstGeom prst="roundRect">
             <a:avLst>
-              <a:gd name="adj" fmla="val 16667"/>
+              <a:gd name="adj" fmla="val 13846"/>
             </a:avLst>
           </a:prstGeom>
           <a:solidFill>
@@ -2681,8 +3460,8 @@
         </p:nvSpPr>
         <p:spPr>
           <a:xfrm>
-            <a:off x="7772400" y="4754880"/>
-            <a:ext cx="3108960" cy="640080"/>
+            <a:off x="7589520" y="4434840"/>
+            <a:ext cx="3291840" cy="777240"/>
           </a:xfrm>
           <a:prstGeom prst="rect">
             <a:avLst/>
@@ -2698,7 +3477,7 @@
               <a:buNone/>
             </a:pPr>
             <a:r>
-              <a:rPr lang="en-US" sz="1300" b="1" dirty="0">
+              <a:rPr lang="en-US" sz="1400" b="1" dirty="0">
                 <a:solidFill>
                   <a:srgbClr val="FFFFFF"/>
                 </a:solidFill>
@@ -2708,14 +3487,14 @@
               </a:rPr>
               <a:t>MilkIQ İle Başlayın</a:t>
             </a:r>
-            <a:endParaRPr lang="en-US" sz="1300" dirty="0"/>
+            <a:endParaRPr lang="en-US" sz="1400" dirty="0"/>
           </a:p>
           <a:p>
             <a:pPr algn="ctr" indent="0" marL="0">
               <a:buNone/>
             </a:pPr>
             <a:r>
-              <a:rPr lang="en-US" sz="1300" b="1" dirty="0">
+              <a:rPr lang="en-US" sz="1400" b="1" dirty="0">
                 <a:solidFill>
                   <a:srgbClr val="FFFFFF"/>
                 </a:solidFill>
@@ -2725,7 +3504,7 @@
               </a:rPr>
               <a:t>Akıllı Çiftlik Yönetimi</a:t>
             </a:r>
-            <a:endParaRPr lang="en-US" sz="1300" dirty="0"/>
+            <a:endParaRPr lang="en-US" sz="1400" dirty="0"/>
           </a:p>
         </p:txBody>
       </p:sp>
@@ -2737,8 +3516,8 @@
         </p:nvSpPr>
         <p:spPr>
           <a:xfrm>
-            <a:off x="731520" y="6400800"/>
-            <a:ext cx="10698480" cy="0"/>
+            <a:off x="731520" y="6263640"/>
+            <a:ext cx="10728655" cy="0"/>
           </a:xfrm>
           <a:prstGeom prst="line">
             <a:avLst/>
@@ -2746,7 +3525,7 @@
           <a:noFill/>
           <a:ln w="12700">
             <a:solidFill>
-              <a:srgbClr val="1E293B"/>
+              <a:srgbClr val="233348"/>
             </a:solidFill>
             <a:prstDash val="solid"/>
           </a:ln>
@@ -2760,7 +3539,7 @@
         </p:nvSpPr>
         <p:spPr>
           <a:xfrm>
-            <a:off x="731520" y="6446520"/>
+            <a:off x="731520" y="6327648"/>
             <a:ext cx="5486400" cy="320040"/>
           </a:xfrm>
           <a:prstGeom prst="rect">
@@ -2799,8 +3578,8 @@
         </p:nvSpPr>
         <p:spPr>
           <a:xfrm>
-            <a:off x="6217920" y="6446520"/>
-            <a:ext cx="5212080" cy="320040"/>
+            <a:off x="6217920" y="6327648"/>
+            <a:ext cx="5242255" cy="320040"/>
           </a:xfrm>
           <a:prstGeom prst="rect">
             <a:avLst/>
@@ -2870,24 +3649,24 @@
         </p:nvSpPr>
         <p:spPr>
           <a:xfrm>
-            <a:off x="731520" y="548640"/>
-            <a:ext cx="9144000" cy="274320"/>
-          </a:xfrm>
-          <a:prstGeom prst="rect">
-            <a:avLst/>
-          </a:prstGeom>
-          <a:noFill/>
-          <a:ln/>
-        </p:spPr>
-        <p:txBody>
-          <a:bodyPr wrap="square" rtlCol="0" anchor="ctr"/>
-          <a:lstStyle/>
-          <a:p>
-            <a:pPr indent="0" marL="0">
-              <a:buNone/>
-            </a:pPr>
-            <a:r>
-              <a:rPr lang="en-US" sz="1100" b="1" dirty="0">
+            <a:off x="731520" y="411480"/>
+            <a:ext cx="10728655" cy="274320"/>
+          </a:xfrm>
+          <a:prstGeom prst="rect">
+            <a:avLst/>
+          </a:prstGeom>
+          <a:noFill/>
+          <a:ln/>
+        </p:spPr>
+        <p:txBody>
+          <a:bodyPr wrap="square" rtlCol="0" anchor="ctr"/>
+          <a:lstStyle/>
+          <a:p>
+            <a:pPr indent="0" marL="0">
+              <a:buNone/>
+            </a:pPr>
+            <a:r>
+              <a:rPr lang="en-US" sz="1050" b="1" spc="150" kern="0" dirty="0">
                 <a:solidFill>
                   <a:srgbClr val="34D399"/>
                 </a:solidFill>
@@ -2895,9 +3674,9 @@
                 <a:ea typeface="Segoe UI" pitchFamily="34" charset="-122"/>
                 <a:cs typeface="Segoe UI" pitchFamily="34" charset="-120"/>
               </a:rPr>
-              <a:t>SEKTÖREL GERÇEKLER &amp; STRATEJİK DEĞER</a:t>
-            </a:r>
-            <a:endParaRPr lang="en-US" sz="1100" dirty="0"/>
+              <a:t>SEKTÖREL GERÇEKLER &amp; STRATEJIK DEĞER</a:t>
+            </a:r>
+            <a:endParaRPr lang="en-US" sz="1050" dirty="0"/>
           </a:p>
         </p:txBody>
       </p:sp>
@@ -2909,24 +3688,24 @@
         </p:nvSpPr>
         <p:spPr>
           <a:xfrm>
-            <a:off x="731520" y="822960"/>
-            <a:ext cx="9144000" cy="548640"/>
-          </a:xfrm>
-          <a:prstGeom prst="rect">
-            <a:avLst/>
-          </a:prstGeom>
-          <a:noFill/>
-          <a:ln/>
-        </p:spPr>
-        <p:txBody>
-          <a:bodyPr wrap="square" rtlCol="0" anchor="ctr"/>
-          <a:lstStyle/>
-          <a:p>
-            <a:pPr indent="0" marL="0">
-              <a:buNone/>
-            </a:pPr>
-            <a:r>
-              <a:rPr lang="en-US" sz="2600" b="1" dirty="0">
+            <a:off x="731520" y="685800"/>
+            <a:ext cx="10728655" cy="548640"/>
+          </a:xfrm>
+          <a:prstGeom prst="rect">
+            <a:avLst/>
+          </a:prstGeom>
+          <a:noFill/>
+          <a:ln/>
+        </p:spPr>
+        <p:txBody>
+          <a:bodyPr wrap="square" rtlCol="0" anchor="ctr"/>
+          <a:lstStyle/>
+          <a:p>
+            <a:pPr indent="0" marL="0">
+              <a:buNone/>
+            </a:pPr>
+            <a:r>
+              <a:rPr lang="en-US" sz="2400" b="1" dirty="0">
                 <a:solidFill>
                   <a:srgbClr val="FFFFFF"/>
                 </a:solidFill>
@@ -2936,7 +3715,7 @@
               </a:rPr>
               <a:t>Geleneksel Çiftlik Yönetimi vs. MilkIQ</a:t>
             </a:r>
-            <a:endParaRPr lang="en-US" sz="2600" dirty="0"/>
+            <a:endParaRPr lang="en-US" sz="2400" dirty="0"/>
           </a:p>
         </p:txBody>
       </p:sp>
@@ -2948,12 +3727,12 @@
         </p:nvSpPr>
         <p:spPr>
           <a:xfrm>
-            <a:off x="731520" y="1645920"/>
-            <a:ext cx="5120640" cy="4389120"/>
+            <a:off x="731520" y="1371600"/>
+            <a:ext cx="5166360" cy="4663440"/>
           </a:xfrm>
           <a:prstGeom prst="roundRect">
             <a:avLst>
-              <a:gd name="adj" fmla="val 5208"/>
+              <a:gd name="adj" fmla="val 3922"/>
             </a:avLst>
           </a:prstGeom>
           <a:solidFill>
@@ -2975,8 +3754,8 @@
         </p:nvSpPr>
         <p:spPr>
           <a:xfrm>
-            <a:off x="1005840" y="1920240"/>
-            <a:ext cx="4572000" cy="365760"/>
+            <a:off x="1005840" y="1600200"/>
+            <a:ext cx="4617720" cy="365760"/>
           </a:xfrm>
           <a:prstGeom prst="rect">
             <a:avLst/>
@@ -3014,24 +3793,24 @@
         </p:nvSpPr>
         <p:spPr>
           <a:xfrm>
-            <a:off x="1005840" y="2468880"/>
-            <a:ext cx="4572000" cy="594360"/>
-          </a:xfrm>
-          <a:prstGeom prst="rect">
-            <a:avLst/>
-          </a:prstGeom>
-          <a:noFill/>
-          <a:ln/>
-        </p:spPr>
-        <p:txBody>
-          <a:bodyPr wrap="square" rtlCol="0" anchor="ctr"/>
-          <a:lstStyle/>
-          <a:p>
-            <a:pPr indent="0" marL="0">
-              <a:buNone/>
-            </a:pPr>
-            <a:r>
-              <a:rPr lang="en-US" sz="1100" dirty="0">
+            <a:off x="1005840" y="2103120"/>
+            <a:ext cx="4617720" cy="658368"/>
+          </a:xfrm>
+          <a:prstGeom prst="rect">
+            <a:avLst/>
+          </a:prstGeom>
+          <a:noFill/>
+          <a:ln/>
+        </p:spPr>
+        <p:txBody>
+          <a:bodyPr wrap="square" rtlCol="0" anchor="ctr"/>
+          <a:lstStyle/>
+          <a:p>
+            <a:pPr indent="0" marL="0">
+              <a:buNone/>
+            </a:pPr>
+            <a:r>
+              <a:rPr lang="en-US" sz="1050" dirty="0">
                 <a:solidFill>
                   <a:srgbClr val="E2E8F0"/>
                 </a:solidFill>
@@ -3039,9 +3818,9 @@
                 <a:ea typeface="Segoe UI" pitchFamily="34" charset="-122"/>
                 <a:cs typeface="Segoe UI" pitchFamily="34" charset="-120"/>
               </a:rPr>
-              <a:t>•  Yem maliyeti çiftlik cirosunun %70'ini oluşturur; plansız alımlar zarara yol açar.</a:t>
-            </a:r>
-            <a:endParaRPr lang="en-US" sz="1100" dirty="0"/>
+              <a:t>•  Yem maliyeti çiftlik cirosunun %70'ini oluşturur; plansız alımlar doğrudan zarara yol açar.</a:t>
+            </a:r>
+            <a:endParaRPr lang="en-US" sz="1050" dirty="0"/>
           </a:p>
         </p:txBody>
       </p:sp>
@@ -3053,24 +3832,24 @@
         </p:nvSpPr>
         <p:spPr>
           <a:xfrm>
-            <a:off x="1005840" y="3127248"/>
-            <a:ext cx="4572000" cy="594360"/>
-          </a:xfrm>
-          <a:prstGeom prst="rect">
-            <a:avLst/>
-          </a:prstGeom>
-          <a:noFill/>
-          <a:ln/>
-        </p:spPr>
-        <p:txBody>
-          <a:bodyPr wrap="square" rtlCol="0" anchor="ctr"/>
-          <a:lstStyle/>
-          <a:p>
-            <a:pPr indent="0" marL="0">
-              <a:buNone/>
-            </a:pPr>
-            <a:r>
-              <a:rPr lang="en-US" sz="1100" dirty="0">
+            <a:off x="1005840" y="2852928"/>
+            <a:ext cx="4617720" cy="658368"/>
+          </a:xfrm>
+          <a:prstGeom prst="rect">
+            <a:avLst/>
+          </a:prstGeom>
+          <a:noFill/>
+          <a:ln/>
+        </p:spPr>
+        <p:txBody>
+          <a:bodyPr wrap="square" rtlCol="0" anchor="ctr"/>
+          <a:lstStyle/>
+          <a:p>
+            <a:pPr indent="0" marL="0">
+              <a:buNone/>
+            </a:pPr>
+            <a:r>
+              <a:rPr lang="en-US" sz="1050" dirty="0">
                 <a:solidFill>
                   <a:srgbClr val="E2E8F0"/>
                 </a:solidFill>
@@ -3080,7 +3859,7 @@
               </a:rPr>
               <a:t>•  Göz kararı veya sabit reçeteler nedeniyle gizli asidoz ve metabolik hastalıklar yaşanır.</a:t>
             </a:r>
-            <a:endParaRPr lang="en-US" sz="1100" dirty="0"/>
+            <a:endParaRPr lang="en-US" sz="1050" dirty="0"/>
           </a:p>
         </p:txBody>
       </p:sp>
@@ -3092,24 +3871,24 @@
         </p:nvSpPr>
         <p:spPr>
           <a:xfrm>
-            <a:off x="1005840" y="3785616"/>
-            <a:ext cx="4572000" cy="594360"/>
-          </a:xfrm>
-          <a:prstGeom prst="rect">
-            <a:avLst/>
-          </a:prstGeom>
-          <a:noFill/>
-          <a:ln/>
-        </p:spPr>
-        <p:txBody>
-          <a:bodyPr wrap="square" rtlCol="0" anchor="ctr"/>
-          <a:lstStyle/>
-          <a:p>
-            <a:pPr indent="0" marL="0">
-              <a:buNone/>
-            </a:pPr>
-            <a:r>
-              <a:rPr lang="en-US" sz="1100" dirty="0">
+            <a:off x="1005840" y="3602736"/>
+            <a:ext cx="4617720" cy="658368"/>
+          </a:xfrm>
+          <a:prstGeom prst="rect">
+            <a:avLst/>
+          </a:prstGeom>
+          <a:noFill/>
+          <a:ln/>
+        </p:spPr>
+        <p:txBody>
+          <a:bodyPr wrap="square" rtlCol="0" anchor="ctr"/>
+          <a:lstStyle/>
+          <a:p>
+            <a:pPr indent="0" marL="0">
+              <a:buNone/>
+            </a:pPr>
+            <a:r>
+              <a:rPr lang="en-US" sz="1050" dirty="0">
                 <a:solidFill>
                   <a:srgbClr val="E2E8F0"/>
                 </a:solidFill>
@@ -3117,9 +3896,9 @@
                 <a:ea typeface="Segoe UI" pitchFamily="34" charset="-122"/>
                 <a:cs typeface="Segoe UI" pitchFamily="34" charset="-120"/>
               </a:rPr>
-              <a:t>•  1 litre sütün anlık yem maliyeti ve hayvan başı net karı hesaplanamaz.</a:t>
-            </a:r>
-            <a:endParaRPr lang="en-US" sz="1100" dirty="0"/>
+              <a:t>•  1 litre sütün anlık yem maliyeti ve hayvan başı net karı net olarak hesaplanamaz.</a:t>
+            </a:r>
+            <a:endParaRPr lang="en-US" sz="1050" dirty="0"/>
           </a:p>
         </p:txBody>
       </p:sp>
@@ -3131,24 +3910,24 @@
         </p:nvSpPr>
         <p:spPr>
           <a:xfrm>
-            <a:off x="1005840" y="4443984"/>
-            <a:ext cx="4572000" cy="594360"/>
-          </a:xfrm>
-          <a:prstGeom prst="rect">
-            <a:avLst/>
-          </a:prstGeom>
-          <a:noFill/>
-          <a:ln/>
-        </p:spPr>
-        <p:txBody>
-          <a:bodyPr wrap="square" rtlCol="0" anchor="ctr"/>
-          <a:lstStyle/>
-          <a:p>
-            <a:pPr indent="0" marL="0">
-              <a:buNone/>
-            </a:pPr>
-            <a:r>
-              <a:rPr lang="en-US" sz="1100" dirty="0">
+            <a:off x="1005840" y="4352544"/>
+            <a:ext cx="4617720" cy="658368"/>
+          </a:xfrm>
+          <a:prstGeom prst="rect">
+            <a:avLst/>
+          </a:prstGeom>
+          <a:noFill/>
+          <a:ln/>
+        </p:spPr>
+        <p:txBody>
+          <a:bodyPr wrap="square" rtlCol="0" anchor="ctr"/>
+          <a:lstStyle/>
+          <a:p>
+            <a:pPr indent="0" marL="0">
+              <a:buNone/>
+            </a:pPr>
+            <a:r>
+              <a:rPr lang="en-US" sz="1050" dirty="0">
                 <a:solidFill>
                   <a:srgbClr val="E2E8F0"/>
                 </a:solidFill>
@@ -3156,9 +3935,9 @@
                 <a:ea typeface="Segoe UI" pitchFamily="34" charset="-122"/>
                 <a:cs typeface="Segoe UI" pitchFamily="34" charset="-120"/>
               </a:rPr>
-              <a:t>•  Tahıl ve kaba yem fiyat dalgalanmalarına karşı anlık rasyon revizyonu yapılamaz.</a:t>
-            </a:r>
-            <a:endParaRPr lang="en-US" sz="1100" dirty="0"/>
+              <a:t>•  Tahıl ve kaba yem piyasasındaki fiyat dalgalanmalarına karşı anlık rasyon revizyonu yapılamaz.</a:t>
+            </a:r>
+            <a:endParaRPr lang="en-US" sz="1050" dirty="0"/>
           </a:p>
         </p:txBody>
       </p:sp>
@@ -3171,23 +3950,23 @@
         <p:spPr>
           <a:xfrm>
             <a:off x="1005840" y="5102352"/>
-            <a:ext cx="4572000" cy="594360"/>
-          </a:xfrm>
-          <a:prstGeom prst="rect">
-            <a:avLst/>
-          </a:prstGeom>
-          <a:noFill/>
-          <a:ln/>
-        </p:spPr>
-        <p:txBody>
-          <a:bodyPr wrap="square" rtlCol="0" anchor="ctr"/>
-          <a:lstStyle/>
-          <a:p>
-            <a:pPr indent="0" marL="0">
-              <a:buNone/>
-            </a:pPr>
-            <a:r>
-              <a:rPr lang="en-US" sz="1100" dirty="0">
+            <a:ext cx="4617720" cy="658368"/>
+          </a:xfrm>
+          <a:prstGeom prst="rect">
+            <a:avLst/>
+          </a:prstGeom>
+          <a:noFill/>
+          <a:ln/>
+        </p:spPr>
+        <p:txBody>
+          <a:bodyPr wrap="square" rtlCol="0" anchor="ctr"/>
+          <a:lstStyle/>
+          <a:p>
+            <a:pPr indent="0" marL="0">
+              <a:buNone/>
+            </a:pPr>
+            <a:r>
+              <a:rPr lang="en-US" sz="1050" dirty="0">
                 <a:solidFill>
                   <a:srgbClr val="E2E8F0"/>
                 </a:solidFill>
@@ -3195,9 +3974,9 @@
                 <a:ea typeface="Segoe UI" pitchFamily="34" charset="-122"/>
                 <a:cs typeface="Segoe UI" pitchFamily="34" charset="-120"/>
               </a:rPr>
-              <a:t>•  Veriler kağıt veya karışık tablolarda kaybolur, geriye dönük analiz yapılamaz.</a:t>
-            </a:r>
-            <a:endParaRPr lang="en-US" sz="1100" dirty="0"/>
+              <a:t>•  Veriler kağıt veya karışık tablolarda kaybolur; geriye dönük veri analizi yapılamaz.</a:t>
+            </a:r>
+            <a:endParaRPr lang="en-US" sz="1050" dirty="0"/>
           </a:p>
         </p:txBody>
       </p:sp>
@@ -3209,16 +3988,16 @@
         </p:nvSpPr>
         <p:spPr>
           <a:xfrm>
-            <a:off x="6217920" y="1645920"/>
-            <a:ext cx="5120640" cy="4389120"/>
+            <a:off x="6293815" y="1371600"/>
+            <a:ext cx="5166360" cy="4663440"/>
           </a:xfrm>
           <a:prstGeom prst="roundRect">
             <a:avLst>
-              <a:gd name="adj" fmla="val 5208"/>
+              <a:gd name="adj" fmla="val 3922"/>
             </a:avLst>
           </a:prstGeom>
           <a:solidFill>
-            <a:srgbClr val="1E293B"/>
+            <a:srgbClr val="152238"/>
           </a:solidFill>
           <a:ln w="25400">
             <a:solidFill>
@@ -3236,8 +4015,8 @@
         </p:nvSpPr>
         <p:spPr>
           <a:xfrm>
-            <a:off x="6492240" y="1920240"/>
-            <a:ext cx="4572000" cy="365760"/>
+            <a:off x="6568135" y="1600200"/>
+            <a:ext cx="4617720" cy="365760"/>
           </a:xfrm>
           <a:prstGeom prst="rect">
             <a:avLst/>
@@ -3275,24 +4054,24 @@
         </p:nvSpPr>
         <p:spPr>
           <a:xfrm>
-            <a:off x="6492240" y="2468880"/>
-            <a:ext cx="4572000" cy="594360"/>
-          </a:xfrm>
-          <a:prstGeom prst="rect">
-            <a:avLst/>
-          </a:prstGeom>
-          <a:noFill/>
-          <a:ln/>
-        </p:spPr>
-        <p:txBody>
-          <a:bodyPr wrap="square" rtlCol="0" anchor="ctr"/>
-          <a:lstStyle/>
-          <a:p>
-            <a:pPr indent="0" marL="0">
-              <a:buNone/>
-            </a:pPr>
-            <a:r>
-              <a:rPr lang="en-US" sz="1100" dirty="0">
+            <a:off x="6568135" y="2103120"/>
+            <a:ext cx="4617720" cy="658368"/>
+          </a:xfrm>
+          <a:prstGeom prst="rect">
+            <a:avLst/>
+          </a:prstGeom>
+          <a:noFill/>
+          <a:ln/>
+        </p:spPr>
+        <p:txBody>
+          <a:bodyPr wrap="square" rtlCol="0" anchor="ctr"/>
+          <a:lstStyle/>
+          <a:p>
+            <a:pPr indent="0" marL="0">
+              <a:buNone/>
+            </a:pPr>
+            <a:r>
+              <a:rPr lang="en-US" sz="1050" dirty="0">
                 <a:solidFill>
                   <a:srgbClr val="FFFFFF"/>
                 </a:solidFill>
@@ -3300,9 +4079,9 @@
                 <a:ea typeface="Segoe UI" pitchFamily="34" charset="-122"/>
                 <a:cs typeface="Segoe UI" pitchFamily="34" charset="-120"/>
               </a:rPr>
-              <a:t>✔  Bilimsel NRC standartlarında hassas Kuru Madde, Protein ve Enerji optimizasyonu.</a:t>
-            </a:r>
-            <a:endParaRPr lang="en-US" sz="1100" dirty="0"/>
+              <a:t>✔  Bilimsel NRC standartlarında hassas Kuru Madde, Protein ve Enerji optimizasyonu sağlanır.</a:t>
+            </a:r>
+            <a:endParaRPr lang="en-US" sz="1050" dirty="0"/>
           </a:p>
         </p:txBody>
       </p:sp>
@@ -3314,24 +4093,24 @@
         </p:nvSpPr>
         <p:spPr>
           <a:xfrm>
-            <a:off x="6492240" y="3127248"/>
-            <a:ext cx="4572000" cy="594360"/>
-          </a:xfrm>
-          <a:prstGeom prst="rect">
-            <a:avLst/>
-          </a:prstGeom>
-          <a:noFill/>
-          <a:ln/>
-        </p:spPr>
-        <p:txBody>
-          <a:bodyPr wrap="square" rtlCol="0" anchor="ctr"/>
-          <a:lstStyle/>
-          <a:p>
-            <a:pPr indent="0" marL="0">
-              <a:buNone/>
-            </a:pPr>
-            <a:r>
-              <a:rPr lang="en-US" sz="1100" dirty="0">
+            <a:off x="6568135" y="2852928"/>
+            <a:ext cx="4617720" cy="658368"/>
+          </a:xfrm>
+          <a:prstGeom prst="rect">
+            <a:avLst/>
+          </a:prstGeom>
+          <a:noFill/>
+          <a:ln/>
+        </p:spPr>
+        <p:txBody>
+          <a:bodyPr wrap="square" rtlCol="0" anchor="ctr"/>
+          <a:lstStyle/>
+          <a:p>
+            <a:pPr indent="0" marL="0">
+              <a:buNone/>
+            </a:pPr>
+            <a:r>
+              <a:rPr lang="en-US" sz="1050" dirty="0">
                 <a:solidFill>
                   <a:srgbClr val="FFFFFF"/>
                 </a:solidFill>
@@ -3339,9 +4118,9 @@
                 <a:ea typeface="Segoe UI" pitchFamily="34" charset="-122"/>
                 <a:cs typeface="Segoe UI" pitchFamily="34" charset="-120"/>
               </a:rPr>
-              <a:t>✔  Dinamik Süt/Yem Paritesi takibiyle minimum maliyetle maksimum pik verimi.</a:t>
-            </a:r>
-            <a:endParaRPr lang="en-US" sz="1100" dirty="0"/>
+              <a:t>✔  Dinamik Süt/Yem Paritesi takibiyle minimum maliyetle maksimum pik süt verimi elde edilir.</a:t>
+            </a:r>
+            <a:endParaRPr lang="en-US" sz="1050" dirty="0"/>
           </a:p>
         </p:txBody>
       </p:sp>
@@ -3353,24 +4132,24 @@
         </p:nvSpPr>
         <p:spPr>
           <a:xfrm>
-            <a:off x="6492240" y="3785616"/>
-            <a:ext cx="4572000" cy="594360"/>
-          </a:xfrm>
-          <a:prstGeom prst="rect">
-            <a:avLst/>
-          </a:prstGeom>
-          <a:noFill/>
-          <a:ln/>
-        </p:spPr>
-        <p:txBody>
-          <a:bodyPr wrap="square" rtlCol="0" anchor="ctr"/>
-          <a:lstStyle/>
-          <a:p>
-            <a:pPr indent="0" marL="0">
-              <a:buNone/>
-            </a:pPr>
-            <a:r>
-              <a:rPr lang="en-US" sz="1100" dirty="0">
+            <a:off x="6568135" y="3602736"/>
+            <a:ext cx="4617720" cy="658368"/>
+          </a:xfrm>
+          <a:prstGeom prst="rect">
+            <a:avLst/>
+          </a:prstGeom>
+          <a:noFill/>
+          <a:ln/>
+        </p:spPr>
+        <p:txBody>
+          <a:bodyPr wrap="square" rtlCol="0" anchor="ctr"/>
+          <a:lstStyle/>
+          <a:p>
+            <a:pPr indent="0" marL="0">
+              <a:buNone/>
+            </a:pPr>
+            <a:r>
+              <a:rPr lang="en-US" sz="1050" dirty="0">
                 <a:solidFill>
                   <a:srgbClr val="FFFFFF"/>
                 </a:solidFill>
@@ -3378,9 +4157,9 @@
                 <a:ea typeface="Segoe UI" pitchFamily="34" charset="-122"/>
                 <a:cs typeface="Segoe UI" pitchFamily="34" charset="-120"/>
               </a:rPr>
-              <a:t>✔  Fabrika yemleri ve yerel yemlerin güncel borsa/piyasa fiyatlarıyla anlık kıyaslanması.</a:t>
-            </a:r>
-            <a:endParaRPr lang="en-US" sz="1100" dirty="0"/>
+              <a:t>✔  Fabrika yemleri ve yerel yemlerin güncel borsa ve piyasa fiyatlarıyla anlık kıyaslanması yapılır.</a:t>
+            </a:r>
+            <a:endParaRPr lang="en-US" sz="1050" dirty="0"/>
           </a:p>
         </p:txBody>
       </p:sp>
@@ -3392,24 +4171,24 @@
         </p:nvSpPr>
         <p:spPr>
           <a:xfrm>
-            <a:off x="6492240" y="4443984"/>
-            <a:ext cx="4572000" cy="594360"/>
-          </a:xfrm>
-          <a:prstGeom prst="rect">
-            <a:avLst/>
-          </a:prstGeom>
-          <a:noFill/>
-          <a:ln/>
-        </p:spPr>
-        <p:txBody>
-          <a:bodyPr wrap="square" rtlCol="0" anchor="ctr"/>
-          <a:lstStyle/>
-          <a:p>
-            <a:pPr indent="0" marL="0">
-              <a:buNone/>
-            </a:pPr>
-            <a:r>
-              <a:rPr lang="en-US" sz="1100" dirty="0">
+            <a:off x="6568135" y="4352544"/>
+            <a:ext cx="4617720" cy="658368"/>
+          </a:xfrm>
+          <a:prstGeom prst="rect">
+            <a:avLst/>
+          </a:prstGeom>
+          <a:noFill/>
+          <a:ln/>
+        </p:spPr>
+        <p:txBody>
+          <a:bodyPr wrap="square" rtlCol="0" anchor="ctr"/>
+          <a:lstStyle/>
+          <a:p>
+            <a:pPr indent="0" marL="0">
+              <a:buNone/>
+            </a:pPr>
+            <a:r>
+              <a:rPr lang="en-US" sz="1050" dirty="0">
                 <a:solidFill>
                   <a:srgbClr val="FFFFFF"/>
                 </a:solidFill>
@@ -3417,9 +4196,9 @@
                 <a:ea typeface="Segoe UI" pitchFamily="34" charset="-122"/>
                 <a:cs typeface="Segoe UI" pitchFamily="34" charset="-120"/>
               </a:rPr>
-              <a:t>✔  Laktasyon dönemi ve canlı ağırlığa göre otomatik besin ihtiyacı simülasyonu.</a:t>
-            </a:r>
-            <a:endParaRPr lang="en-US" sz="1100" dirty="0"/>
+              <a:t>✔  Laktasyon dönemi ve canlı ağırlığa göre otomatik besin ihtiyacı simülasyonu çalıştırılır.</a:t>
+            </a:r>
+            <a:endParaRPr lang="en-US" sz="1050" dirty="0"/>
           </a:p>
         </p:txBody>
       </p:sp>
@@ -3431,24 +4210,24 @@
         </p:nvSpPr>
         <p:spPr>
           <a:xfrm>
-            <a:off x="6492240" y="5102352"/>
-            <a:ext cx="4572000" cy="594360"/>
-          </a:xfrm>
-          <a:prstGeom prst="rect">
-            <a:avLst/>
-          </a:prstGeom>
-          <a:noFill/>
-          <a:ln/>
-        </p:spPr>
-        <p:txBody>
-          <a:bodyPr wrap="square" rtlCol="0" anchor="ctr"/>
-          <a:lstStyle/>
-          <a:p>
-            <a:pPr indent="0" marL="0">
-              <a:buNone/>
-            </a:pPr>
-            <a:r>
-              <a:rPr lang="en-US" sz="1100" dirty="0">
+            <a:off x="6568135" y="5102352"/>
+            <a:ext cx="4617720" cy="658368"/>
+          </a:xfrm>
+          <a:prstGeom prst="rect">
+            <a:avLst/>
+          </a:prstGeom>
+          <a:noFill/>
+          <a:ln/>
+        </p:spPr>
+        <p:txBody>
+          <a:bodyPr wrap="square" rtlCol="0" anchor="ctr"/>
+          <a:lstStyle/>
+          <a:p>
+            <a:pPr indent="0" marL="0">
+              <a:buNone/>
+            </a:pPr>
+            <a:r>
+              <a:rPr lang="en-US" sz="1050" dirty="0">
                 <a:solidFill>
                   <a:srgbClr val="FFFFFF"/>
                 </a:solidFill>
@@ -3456,9 +4235,9 @@
                 <a:ea typeface="Segoe UI" pitchFamily="34" charset="-122"/>
                 <a:cs typeface="Segoe UI" pitchFamily="34" charset="-120"/>
               </a:rPr>
-              <a:t>✔  Tüm cihazlardan (cep telefonu, tablet, PC) bulut senkronizasyonu ile 7/24 erişim.</a:t>
-            </a:r>
-            <a:endParaRPr lang="en-US" sz="1100" dirty="0"/>
+              <a:t>✔  Tüm cihazlardan (cep telefonu, tablet, PC) bulut senkronizasyonu ile 7/24 kesintisiz erişilir.</a:t>
+            </a:r>
+            <a:endParaRPr lang="en-US" sz="1050" dirty="0"/>
           </a:p>
         </p:txBody>
       </p:sp>
@@ -3470,8 +4249,8 @@
         </p:nvSpPr>
         <p:spPr>
           <a:xfrm>
-            <a:off x="731520" y="6400800"/>
-            <a:ext cx="10698480" cy="0"/>
+            <a:off x="731520" y="6263640"/>
+            <a:ext cx="10728655" cy="0"/>
           </a:xfrm>
           <a:prstGeom prst="line">
             <a:avLst/>
@@ -3479,7 +4258,7 @@
           <a:noFill/>
           <a:ln w="12700">
             <a:solidFill>
-              <a:srgbClr val="1E293B"/>
+              <a:srgbClr val="233348"/>
             </a:solidFill>
             <a:prstDash val="solid"/>
           </a:ln>
@@ -3493,7 +4272,7 @@
         </p:nvSpPr>
         <p:spPr>
           <a:xfrm>
-            <a:off x="731520" y="6446520"/>
+            <a:off x="731520" y="6327648"/>
             <a:ext cx="5486400" cy="320040"/>
           </a:xfrm>
           <a:prstGeom prst="rect">
@@ -3532,8 +4311,8 @@
         </p:nvSpPr>
         <p:spPr>
           <a:xfrm>
-            <a:off x="6217920" y="6446520"/>
-            <a:ext cx="5212080" cy="320040"/>
+            <a:off x="6217920" y="6327648"/>
+            <a:ext cx="5242255" cy="320040"/>
           </a:xfrm>
           <a:prstGeom prst="rect">
             <a:avLst/>
@@ -3603,24 +4382,24 @@
         </p:nvSpPr>
         <p:spPr>
           <a:xfrm>
-            <a:off x="731520" y="548640"/>
-            <a:ext cx="9144000" cy="274320"/>
-          </a:xfrm>
-          <a:prstGeom prst="rect">
-            <a:avLst/>
-          </a:prstGeom>
-          <a:noFill/>
-          <a:ln/>
-        </p:spPr>
-        <p:txBody>
-          <a:bodyPr wrap="square" rtlCol="0" anchor="ctr"/>
-          <a:lstStyle/>
-          <a:p>
-            <a:pPr indent="0" marL="0">
-              <a:buNone/>
-            </a:pPr>
-            <a:r>
-              <a:rPr lang="en-US" sz="1100" b="1" dirty="0">
+            <a:off x="731520" y="411480"/>
+            <a:ext cx="10728655" cy="274320"/>
+          </a:xfrm>
+          <a:prstGeom prst="rect">
+            <a:avLst/>
+          </a:prstGeom>
+          <a:noFill/>
+          <a:ln/>
+        </p:spPr>
+        <p:txBody>
+          <a:bodyPr wrap="square" rtlCol="0" anchor="ctr"/>
+          <a:lstStyle/>
+          <a:p>
+            <a:pPr indent="0" marL="0">
+              <a:buNone/>
+            </a:pPr>
+            <a:r>
+              <a:rPr lang="en-US" sz="1050" b="1" spc="150" kern="0" dirty="0">
                 <a:solidFill>
                   <a:srgbClr val="34D399"/>
                 </a:solidFill>
@@ -3630,7 +4409,7 @@
               </a:rPr>
               <a:t>TEMEL MODÜL 1</a:t>
             </a:r>
-            <a:endParaRPr lang="en-US" sz="1100" dirty="0"/>
+            <a:endParaRPr lang="en-US" sz="1050" dirty="0"/>
           </a:p>
         </p:txBody>
       </p:sp>
@@ -3642,24 +4421,24 @@
         </p:nvSpPr>
         <p:spPr>
           <a:xfrm>
-            <a:off x="731520" y="822960"/>
-            <a:ext cx="9144000" cy="548640"/>
-          </a:xfrm>
-          <a:prstGeom prst="rect">
-            <a:avLst/>
-          </a:prstGeom>
-          <a:noFill/>
-          <a:ln/>
-        </p:spPr>
-        <p:txBody>
-          <a:bodyPr wrap="square" rtlCol="0" anchor="ctr"/>
-          <a:lstStyle/>
-          <a:p>
-            <a:pPr indent="0" marL="0">
-              <a:buNone/>
-            </a:pPr>
-            <a:r>
-              <a:rPr lang="en-US" sz="2600" b="1" dirty="0">
+            <a:off x="731520" y="685800"/>
+            <a:ext cx="10728655" cy="548640"/>
+          </a:xfrm>
+          <a:prstGeom prst="rect">
+            <a:avLst/>
+          </a:prstGeom>
+          <a:noFill/>
+          <a:ln/>
+        </p:spPr>
+        <p:txBody>
+          <a:bodyPr wrap="square" rtlCol="0" anchor="ctr"/>
+          <a:lstStyle/>
+          <a:p>
+            <a:pPr indent="0" marL="0">
+              <a:buNone/>
+            </a:pPr>
+            <a:r>
+              <a:rPr lang="en-US" sz="2400" b="1" dirty="0">
                 <a:solidFill>
                   <a:srgbClr val="FFFFFF"/>
                 </a:solidFill>
@@ -3669,7 +4448,7 @@
               </a:rPr>
               <a:t>Bilimsel Rasyon Hesaplama &amp; Optimizasyon</a:t>
             </a:r>
-            <a:endParaRPr lang="en-US" sz="2600" dirty="0"/>
+            <a:endParaRPr lang="en-US" sz="2400" dirty="0"/>
           </a:p>
         </p:txBody>
       </p:sp>
@@ -3681,16 +4460,16 @@
         </p:nvSpPr>
         <p:spPr>
           <a:xfrm>
-            <a:off x="731520" y="1645920"/>
-            <a:ext cx="2560320" cy="1920240"/>
+            <a:off x="731520" y="1371600"/>
+            <a:ext cx="2514600" cy="2103120"/>
           </a:xfrm>
           <a:prstGeom prst="roundRect">
             <a:avLst>
-              <a:gd name="adj" fmla="val 9524"/>
+              <a:gd name="adj" fmla="val 6522"/>
             </a:avLst>
           </a:prstGeom>
           <a:solidFill>
-            <a:srgbClr val="1E293B"/>
+            <a:srgbClr val="152238"/>
           </a:solidFill>
           <a:ln w="19050">
             <a:solidFill>
@@ -3708,8 +4487,8 @@
         </p:nvSpPr>
         <p:spPr>
           <a:xfrm>
-            <a:off x="914400" y="1828800"/>
-            <a:ext cx="2194560" cy="365760"/>
+            <a:off x="914400" y="1554480"/>
+            <a:ext cx="2148840" cy="365760"/>
           </a:xfrm>
           <a:prstGeom prst="rect">
             <a:avLst/>
@@ -3747,8 +4526,8 @@
         </p:nvSpPr>
         <p:spPr>
           <a:xfrm>
-            <a:off x="914400" y="2286000"/>
-            <a:ext cx="2194560" cy="1097280"/>
+            <a:off x="914400" y="1965960"/>
+            <a:ext cx="2148840" cy="1280160"/>
           </a:xfrm>
           <a:prstGeom prst="rect">
             <a:avLst/>
@@ -3772,7 +4551,7 @@
                 <a:ea typeface="Segoe UI" pitchFamily="34" charset="-122"/>
                 <a:cs typeface="Segoe UI" pitchFamily="34" charset="-120"/>
               </a:rPr>
-              <a:t>İşkembe kapasitesine uygun optimum tokluk ve sindirim.</a:t>
+              <a:t>İşkembe kapasitesine uygun optimum tokluk ve fizyolojik sindirim.</a:t>
             </a:r>
             <a:endParaRPr lang="en-US" sz="1000" dirty="0"/>
           </a:p>
@@ -3786,16 +4565,16 @@
         </p:nvSpPr>
         <p:spPr>
           <a:xfrm>
-            <a:off x="3429000" y="1645920"/>
-            <a:ext cx="2560320" cy="1920240"/>
+            <a:off x="3469234" y="1371600"/>
+            <a:ext cx="2514600" cy="2103120"/>
           </a:xfrm>
           <a:prstGeom prst="roundRect">
             <a:avLst>
-              <a:gd name="adj" fmla="val 9524"/>
+              <a:gd name="adj" fmla="val 6522"/>
             </a:avLst>
           </a:prstGeom>
           <a:solidFill>
-            <a:srgbClr val="1E293B"/>
+            <a:srgbClr val="152238"/>
           </a:solidFill>
           <a:ln w="19050">
             <a:solidFill>
@@ -3813,8 +4592,8 @@
         </p:nvSpPr>
         <p:spPr>
           <a:xfrm>
-            <a:off x="3611880" y="1828800"/>
-            <a:ext cx="2194560" cy="365760"/>
+            <a:off x="3652114" y="1554480"/>
+            <a:ext cx="2148840" cy="365760"/>
           </a:xfrm>
           <a:prstGeom prst="rect">
             <a:avLst/>
@@ -3852,8 +4631,8 @@
         </p:nvSpPr>
         <p:spPr>
           <a:xfrm>
-            <a:off x="3611880" y="2286000"/>
-            <a:ext cx="2194560" cy="1097280"/>
+            <a:off x="3652114" y="1965960"/>
+            <a:ext cx="2148840" cy="1280160"/>
           </a:xfrm>
           <a:prstGeom prst="rect">
             <a:avLst/>
@@ -3891,16 +4670,16 @@
         </p:nvSpPr>
         <p:spPr>
           <a:xfrm>
-            <a:off x="6126480" y="1645920"/>
-            <a:ext cx="2560320" cy="1920240"/>
+            <a:off x="6206947" y="1371600"/>
+            <a:ext cx="2514600" cy="2103120"/>
           </a:xfrm>
           <a:prstGeom prst="roundRect">
             <a:avLst>
-              <a:gd name="adj" fmla="val 9524"/>
+              <a:gd name="adj" fmla="val 6522"/>
             </a:avLst>
           </a:prstGeom>
           <a:solidFill>
-            <a:srgbClr val="1E293B"/>
+            <a:srgbClr val="152238"/>
           </a:solidFill>
           <a:ln w="19050">
             <a:solidFill>
@@ -3918,8 +4697,8 @@
         </p:nvSpPr>
         <p:spPr>
           <a:xfrm>
-            <a:off x="6309360" y="1828800"/>
-            <a:ext cx="2194560" cy="365760"/>
+            <a:off x="6389827" y="1554480"/>
+            <a:ext cx="2148840" cy="365760"/>
           </a:xfrm>
           <a:prstGeom prst="rect">
             <a:avLst/>
@@ -3957,8 +4736,8 @@
         </p:nvSpPr>
         <p:spPr>
           <a:xfrm>
-            <a:off x="6309360" y="2286000"/>
-            <a:ext cx="2194560" cy="1097280"/>
+            <a:off x="6389827" y="1965960"/>
+            <a:ext cx="2148840" cy="1280160"/>
           </a:xfrm>
           <a:prstGeom prst="rect">
             <a:avLst/>
@@ -3982,7 +4761,7 @@
                 <a:ea typeface="Segoe UI" pitchFamily="34" charset="-122"/>
                 <a:cs typeface="Segoe UI" pitchFamily="34" charset="-120"/>
               </a:rPr>
-              <a:t>Pik süt verimi ve kondisyon kaybını önleyen enerji dengesi.</a:t>
+              <a:t>Pik süt verimi ve kondisyon kaybını önleyen kritik enerji dengesi.</a:t>
             </a:r>
             <a:endParaRPr lang="en-US" sz="1000" dirty="0"/>
           </a:p>
@@ -3996,16 +4775,16 @@
         </p:nvSpPr>
         <p:spPr>
           <a:xfrm>
-            <a:off x="8823960" y="1645920"/>
-            <a:ext cx="2560320" cy="1920240"/>
+            <a:off x="8944661" y="1371600"/>
+            <a:ext cx="2514600" cy="2103120"/>
           </a:xfrm>
           <a:prstGeom prst="roundRect">
             <a:avLst>
-              <a:gd name="adj" fmla="val 9524"/>
+              <a:gd name="adj" fmla="val 6522"/>
             </a:avLst>
           </a:prstGeom>
           <a:solidFill>
-            <a:srgbClr val="1E293B"/>
+            <a:srgbClr val="152238"/>
           </a:solidFill>
           <a:ln w="19050">
             <a:solidFill>
@@ -4023,8 +4802,8 @@
         </p:nvSpPr>
         <p:spPr>
           <a:xfrm>
-            <a:off x="9006840" y="1828800"/>
-            <a:ext cx="2194560" cy="365760"/>
+            <a:off x="9127541" y="1554480"/>
+            <a:ext cx="2148840" cy="365760"/>
           </a:xfrm>
           <a:prstGeom prst="rect">
             <a:avLst/>
@@ -4062,8 +4841,8 @@
         </p:nvSpPr>
         <p:spPr>
           <a:xfrm>
-            <a:off x="9006840" y="2286000"/>
-            <a:ext cx="2194560" cy="1097280"/>
+            <a:off x="9127541" y="1965960"/>
+            <a:ext cx="2148840" cy="1280160"/>
           </a:xfrm>
           <a:prstGeom prst="rect">
             <a:avLst/>
@@ -4101,20 +4880,20 @@
         </p:nvSpPr>
         <p:spPr>
           <a:xfrm>
-            <a:off x="731520" y="3840480"/>
-            <a:ext cx="10607040" cy="2194560"/>
+            <a:off x="731520" y="3657600"/>
+            <a:ext cx="10728655" cy="2377440"/>
           </a:xfrm>
           <a:prstGeom prst="roundRect">
             <a:avLst>
-              <a:gd name="adj" fmla="val 8333"/>
+              <a:gd name="adj" fmla="val 5769"/>
             </a:avLst>
           </a:prstGeom>
           <a:solidFill>
-            <a:srgbClr val="1E293B"/>
+            <a:srgbClr val="152238"/>
           </a:solidFill>
-          <a:ln w="12700">
+          <a:ln w="19050">
             <a:solidFill>
-              <a:srgbClr val="334155"/>
+              <a:srgbClr val="283852"/>
             </a:solidFill>
             <a:prstDash val="solid"/>
           </a:ln>
@@ -4128,8 +4907,8 @@
         </p:nvSpPr>
         <p:spPr>
           <a:xfrm>
-            <a:off x="1005840" y="4023360"/>
-            <a:ext cx="9144000" cy="365760"/>
+            <a:off x="1005840" y="3840480"/>
+            <a:ext cx="10180015" cy="320040"/>
           </a:xfrm>
           <a:prstGeom prst="rect">
             <a:avLst/>
@@ -4167,8 +4946,8 @@
         </p:nvSpPr>
         <p:spPr>
           <a:xfrm>
-            <a:off x="1005840" y="4480560"/>
-            <a:ext cx="10058400" cy="320040"/>
+            <a:off x="1005840" y="4251960"/>
+            <a:ext cx="10180015" cy="365760"/>
           </a:xfrm>
           <a:prstGeom prst="rect">
             <a:avLst/>
@@ -4192,7 +4971,7 @@
                 <a:ea typeface="Segoe UI" pitchFamily="34" charset="-122"/>
                 <a:cs typeface="Segoe UI" pitchFamily="34" charset="-120"/>
               </a:rPr>
-              <a:t>• Canlı Ağırlık (kg), Günlük Hedef Süt Verimi (L), Süt Yağ Oranı (%) ve Protein (%) girişi.</a:t>
+              <a:t>• Canlı Ağırlık (kg), Günlük Hedef Süt Verimi (L), Süt Yağ Oranı (%) ve Protein (%) parametreleri girilir.</a:t>
             </a:r>
             <a:endParaRPr lang="en-US" sz="1100" dirty="0"/>
           </a:p>
@@ -4206,8 +4985,8 @@
         </p:nvSpPr>
         <p:spPr>
           <a:xfrm>
-            <a:off x="1005840" y="4846320"/>
-            <a:ext cx="10058400" cy="320040"/>
+            <a:off x="1005840" y="4654296"/>
+            <a:ext cx="10180015" cy="365760"/>
           </a:xfrm>
           <a:prstGeom prst="rect">
             <a:avLst/>
@@ -4231,7 +5010,7 @@
                 <a:ea typeface="Segoe UI" pitchFamily="34" charset="-122"/>
                 <a:cs typeface="Segoe UI" pitchFamily="34" charset="-120"/>
               </a:rPr>
-              <a:t>• Laktasyon Günü (DIM) ve Gebelik Ayına göre otomatik gereksinim artışı hesaplama.</a:t>
+              <a:t>• Laktasyon Günü (DIM) ve Gebelik Ayına göre otomatik bilimsel besin gereksinim artışı hesaplanır.</a:t>
             </a:r>
             <a:endParaRPr lang="en-US" sz="1100" dirty="0"/>
           </a:p>
@@ -4245,8 +5024,8 @@
         </p:nvSpPr>
         <p:spPr>
           <a:xfrm>
-            <a:off x="1005840" y="5212080"/>
-            <a:ext cx="10058400" cy="320040"/>
+            <a:off x="1005840" y="5056632"/>
+            <a:ext cx="10180015" cy="365760"/>
           </a:xfrm>
           <a:prstGeom prst="rect">
             <a:avLst/>
@@ -4270,7 +5049,7 @@
                 <a:ea typeface="Segoe UI" pitchFamily="34" charset="-122"/>
                 <a:cs typeface="Segoe UI" pitchFamily="34" charset="-120"/>
               </a:rPr>
-              <a:t>• Gerçek zamanlı Kalsiyum (Ca), Fosfor (P) ve Tuz mineral oranı uyarı sistemi.</a:t>
+              <a:t>• Gerçek zamanlı Kalsiyum (Ca), Fosfor (P) ve Tuz mineral oranı güvenlik uyarı sistemi devrededir.</a:t>
             </a:r>
             <a:endParaRPr lang="en-US" sz="1100" dirty="0"/>
           </a:p>
@@ -4284,8 +5063,8 @@
         </p:nvSpPr>
         <p:spPr>
           <a:xfrm>
-            <a:off x="1005840" y="5577840"/>
-            <a:ext cx="10058400" cy="320040"/>
+            <a:off x="1005840" y="5458968"/>
+            <a:ext cx="10180015" cy="365760"/>
           </a:xfrm>
           <a:prstGeom prst="rect">
             <a:avLst/>
@@ -4309,7 +5088,7 @@
                 <a:ea typeface="Segoe UI" pitchFamily="34" charset="-122"/>
                 <a:cs typeface="Segoe UI" pitchFamily="34" charset="-120"/>
               </a:rPr>
-              <a:t>• "Rasyonu Kaydet", "Rasyonu Kopyala" ve tek tıkla Excel/PDF formatında çıktı alma.</a:t>
+              <a:t>• "Rasyonu Kaydet", "Rasyonu Kopyala" ve tek tıkla A4 Mikser Reçetesi formatında çıktı imkânı sunar.</a:t>
             </a:r>
             <a:endParaRPr lang="en-US" sz="1100" dirty="0"/>
           </a:p>
@@ -4323,8 +5102,8 @@
         </p:nvSpPr>
         <p:spPr>
           <a:xfrm>
-            <a:off x="731520" y="6400800"/>
-            <a:ext cx="10698480" cy="0"/>
+            <a:off x="731520" y="6263640"/>
+            <a:ext cx="10728655" cy="0"/>
           </a:xfrm>
           <a:prstGeom prst="line">
             <a:avLst/>
@@ -4332,7 +5111,7 @@
           <a:noFill/>
           <a:ln w="12700">
             <a:solidFill>
-              <a:srgbClr val="1E293B"/>
+              <a:srgbClr val="233348"/>
             </a:solidFill>
             <a:prstDash val="solid"/>
           </a:ln>
@@ -4346,7 +5125,7 @@
         </p:nvSpPr>
         <p:spPr>
           <a:xfrm>
-            <a:off x="731520" y="6446520"/>
+            <a:off x="731520" y="6327648"/>
             <a:ext cx="5486400" cy="320040"/>
           </a:xfrm>
           <a:prstGeom prst="rect">
@@ -4385,8 +5164,8 @@
         </p:nvSpPr>
         <p:spPr>
           <a:xfrm>
-            <a:off x="6217920" y="6446520"/>
-            <a:ext cx="5212080" cy="320040"/>
+            <a:off x="6217920" y="6327648"/>
+            <a:ext cx="5242255" cy="320040"/>
           </a:xfrm>
           <a:prstGeom prst="rect">
             <a:avLst/>
@@ -4456,24 +5235,24 @@
         </p:nvSpPr>
         <p:spPr>
           <a:xfrm>
-            <a:off x="731520" y="548640"/>
-            <a:ext cx="9144000" cy="274320"/>
-          </a:xfrm>
-          <a:prstGeom prst="rect">
-            <a:avLst/>
-          </a:prstGeom>
-          <a:noFill/>
-          <a:ln/>
-        </p:spPr>
-        <p:txBody>
-          <a:bodyPr wrap="square" rtlCol="0" anchor="ctr"/>
-          <a:lstStyle/>
-          <a:p>
-            <a:pPr indent="0" marL="0">
-              <a:buNone/>
-            </a:pPr>
-            <a:r>
-              <a:rPr lang="en-US" sz="1100" b="1" dirty="0">
+            <a:off x="731520" y="411480"/>
+            <a:ext cx="10728655" cy="274320"/>
+          </a:xfrm>
+          <a:prstGeom prst="rect">
+            <a:avLst/>
+          </a:prstGeom>
+          <a:noFill/>
+          <a:ln/>
+        </p:spPr>
+        <p:txBody>
+          <a:bodyPr wrap="square" rtlCol="0" anchor="ctr"/>
+          <a:lstStyle/>
+          <a:p>
+            <a:pPr indent="0" marL="0">
+              <a:buNone/>
+            </a:pPr>
+            <a:r>
+              <a:rPr lang="en-US" sz="1050" b="1" spc="150" kern="0" dirty="0">
                 <a:solidFill>
                   <a:srgbClr val="34D399"/>
                 </a:solidFill>
@@ -4483,7 +5262,7 @@
               </a:rPr>
               <a:t>TEMEL MODÜL 2</a:t>
             </a:r>
-            <a:endParaRPr lang="en-US" sz="1100" dirty="0"/>
+            <a:endParaRPr lang="en-US" sz="1050" dirty="0"/>
           </a:p>
         </p:txBody>
       </p:sp>
@@ -4495,24 +5274,24 @@
         </p:nvSpPr>
         <p:spPr>
           <a:xfrm>
-            <a:off x="731520" y="822960"/>
-            <a:ext cx="9144000" cy="548640"/>
-          </a:xfrm>
-          <a:prstGeom prst="rect">
-            <a:avLst/>
-          </a:prstGeom>
-          <a:noFill/>
-          <a:ln/>
-        </p:spPr>
-        <p:txBody>
-          <a:bodyPr wrap="square" rtlCol="0" anchor="ctr"/>
-          <a:lstStyle/>
-          <a:p>
-            <a:pPr indent="0" marL="0">
-              <a:buNone/>
-            </a:pPr>
-            <a:r>
-              <a:rPr lang="en-US" sz="2600" b="1" dirty="0">
+            <a:off x="731520" y="685800"/>
+            <a:ext cx="10728655" cy="548640"/>
+          </a:xfrm>
+          <a:prstGeom prst="rect">
+            <a:avLst/>
+          </a:prstGeom>
+          <a:noFill/>
+          <a:ln/>
+        </p:spPr>
+        <p:txBody>
+          <a:bodyPr wrap="square" rtlCol="0" anchor="ctr"/>
+          <a:lstStyle/>
+          <a:p>
+            <a:pPr indent="0" marL="0">
+              <a:buNone/>
+            </a:pPr>
+            <a:r>
+              <a:rPr lang="en-US" sz="2400" b="1" dirty="0">
                 <a:solidFill>
                   <a:srgbClr val="FFFFFF"/>
                 </a:solidFill>
@@ -4522,7 +5301,7 @@
               </a:rPr>
               <a:t>Dinamik Yem &amp; Fabrika Yemleri Kataloğu</a:t>
             </a:r>
-            <a:endParaRPr lang="en-US" sz="2600" dirty="0"/>
+            <a:endParaRPr lang="en-US" sz="2400" dirty="0"/>
           </a:p>
         </p:txBody>
       </p:sp>
@@ -4534,20 +5313,281 @@
         </p:nvSpPr>
         <p:spPr>
           <a:xfrm>
-            <a:off x="731520" y="1645920"/>
-            <a:ext cx="3429000" cy="4389120"/>
+            <a:off x="731520" y="1371600"/>
+            <a:ext cx="3429000" cy="4663440"/>
           </a:xfrm>
           <a:prstGeom prst="roundRect">
             <a:avLst>
-              <a:gd name="adj" fmla="val 6667"/>
+              <a:gd name="adj" fmla="val 5333"/>
             </a:avLst>
           </a:prstGeom>
           <a:solidFill>
-            <a:srgbClr val="1E293B"/>
+            <a:srgbClr val="152238"/>
+          </a:solidFill>
+          <a:ln w="19050">
+            <a:solidFill>
+              <a:srgbClr val="283852"/>
+            </a:solidFill>
+            <a:prstDash val="solid"/>
+          </a:ln>
+        </p:spPr>
+      </p:sp>
+      <p:sp>
+        <p:nvSpPr>
+          <p:cNvPr id="5" name="Text 3"/>
+          <p:cNvSpPr/>
+          <p:nvPr/>
+        </p:nvSpPr>
+        <p:spPr>
+          <a:xfrm>
+            <a:off x="960120" y="1600200"/>
+            <a:ext cx="2971800" cy="274320"/>
+          </a:xfrm>
+          <a:prstGeom prst="rect">
+            <a:avLst/>
+          </a:prstGeom>
+          <a:noFill/>
+          <a:ln/>
+        </p:spPr>
+        <p:txBody>
+          <a:bodyPr wrap="square" rtlCol="0" anchor="ctr"/>
+          <a:lstStyle/>
+          <a:p>
+            <a:pPr indent="0" marL="0">
+              <a:buNone/>
+            </a:pPr>
+            <a:r>
+              <a:rPr lang="en-US" sz="950" b="1" dirty="0">
+                <a:solidFill>
+                  <a:srgbClr val="34D399"/>
+                </a:solidFill>
+                <a:latin typeface="Segoe UI" pitchFamily="34" charset="0"/>
+                <a:ea typeface="Segoe UI" pitchFamily="34" charset="-122"/>
+                <a:cs typeface="Segoe UI" pitchFamily="34" charset="-120"/>
+              </a:rPr>
+              <a:t>TEMEL RUMEN LIF KAYNAĞI</a:t>
+            </a:r>
+            <a:endParaRPr lang="en-US" sz="950" dirty="0"/>
+          </a:p>
+        </p:txBody>
+      </p:sp>
+      <p:sp>
+        <p:nvSpPr>
+          <p:cNvPr id="6" name="Text 4"/>
+          <p:cNvSpPr/>
+          <p:nvPr/>
+        </p:nvSpPr>
+        <p:spPr>
+          <a:xfrm>
+            <a:off x="960120" y="1874520"/>
+            <a:ext cx="2971800" cy="411480"/>
+          </a:xfrm>
+          <a:prstGeom prst="rect">
+            <a:avLst/>
+          </a:prstGeom>
+          <a:noFill/>
+          <a:ln/>
+        </p:spPr>
+        <p:txBody>
+          <a:bodyPr wrap="square" rtlCol="0" anchor="ctr"/>
+          <a:lstStyle/>
+          <a:p>
+            <a:pPr indent="0" marL="0">
+              <a:buNone/>
+            </a:pPr>
+            <a:r>
+              <a:rPr lang="en-US" sz="1500" b="1" dirty="0">
+                <a:solidFill>
+                  <a:srgbClr val="FFFFFF"/>
+                </a:solidFill>
+                <a:latin typeface="Segoe UI" pitchFamily="34" charset="0"/>
+                <a:ea typeface="Segoe UI" pitchFamily="34" charset="-122"/>
+                <a:cs typeface="Segoe UI" pitchFamily="34" charset="-120"/>
+              </a:rPr>
+              <a:t>Kaba Yemler &amp; Silajlar</a:t>
+            </a:r>
+            <a:endParaRPr lang="en-US" sz="1500" dirty="0"/>
+          </a:p>
+        </p:txBody>
+      </p:sp>
+      <p:sp>
+        <p:nvSpPr>
+          <p:cNvPr id="7" name="Text 5"/>
+          <p:cNvSpPr/>
+          <p:nvPr/>
+        </p:nvSpPr>
+        <p:spPr>
+          <a:xfrm>
+            <a:off x="960120" y="2468880"/>
+            <a:ext cx="2971800" cy="502920"/>
+          </a:xfrm>
+          <a:prstGeom prst="rect">
+            <a:avLst/>
+          </a:prstGeom>
+          <a:noFill/>
+          <a:ln/>
+        </p:spPr>
+        <p:txBody>
+          <a:bodyPr wrap="square" rtlCol="0" anchor="ctr"/>
+          <a:lstStyle/>
+          <a:p>
+            <a:pPr indent="0" marL="0">
+              <a:buNone/>
+            </a:pPr>
+            <a:r>
+              <a:rPr lang="en-US" sz="1100" dirty="0">
+                <a:solidFill>
+                  <a:srgbClr val="CBD5E1"/>
+                </a:solidFill>
+                <a:latin typeface="Segoe UI" pitchFamily="34" charset="0"/>
+                <a:ea typeface="Segoe UI" pitchFamily="34" charset="-122"/>
+                <a:cs typeface="Segoe UI" pitchFamily="34" charset="-120"/>
+              </a:rPr>
+              <a:t>• Mısır Silajı (KM: %32)</a:t>
+            </a:r>
+            <a:endParaRPr lang="en-US" sz="1100" dirty="0"/>
+          </a:p>
+        </p:txBody>
+      </p:sp>
+      <p:sp>
+        <p:nvSpPr>
+          <p:cNvPr id="8" name="Text 6"/>
+          <p:cNvSpPr/>
+          <p:nvPr/>
+        </p:nvSpPr>
+        <p:spPr>
+          <a:xfrm>
+            <a:off x="960120" y="3063240"/>
+            <a:ext cx="2971800" cy="502920"/>
+          </a:xfrm>
+          <a:prstGeom prst="rect">
+            <a:avLst/>
+          </a:prstGeom>
+          <a:noFill/>
+          <a:ln/>
+        </p:spPr>
+        <p:txBody>
+          <a:bodyPr wrap="square" rtlCol="0" anchor="ctr"/>
+          <a:lstStyle/>
+          <a:p>
+            <a:pPr indent="0" marL="0">
+              <a:buNone/>
+            </a:pPr>
+            <a:r>
+              <a:rPr lang="en-US" sz="1100" dirty="0">
+                <a:solidFill>
+                  <a:srgbClr val="CBD5E1"/>
+                </a:solidFill>
+                <a:latin typeface="Segoe UI" pitchFamily="34" charset="0"/>
+                <a:ea typeface="Segoe UI" pitchFamily="34" charset="-122"/>
+                <a:cs typeface="Segoe UI" pitchFamily="34" charset="-120"/>
+              </a:rPr>
+              <a:t>• Yonca Kuru Otu (HP: %18)</a:t>
+            </a:r>
+            <a:endParaRPr lang="en-US" sz="1100" dirty="0"/>
+          </a:p>
+        </p:txBody>
+      </p:sp>
+      <p:sp>
+        <p:nvSpPr>
+          <p:cNvPr id="9" name="Text 7"/>
+          <p:cNvSpPr/>
+          <p:nvPr/>
+        </p:nvSpPr>
+        <p:spPr>
+          <a:xfrm>
+            <a:off x="960120" y="3657600"/>
+            <a:ext cx="2971800" cy="502920"/>
+          </a:xfrm>
+          <a:prstGeom prst="rect">
+            <a:avLst/>
+          </a:prstGeom>
+          <a:noFill/>
+          <a:ln/>
+        </p:spPr>
+        <p:txBody>
+          <a:bodyPr wrap="square" rtlCol="0" anchor="ctr"/>
+          <a:lstStyle/>
+          <a:p>
+            <a:pPr indent="0" marL="0">
+              <a:buNone/>
+            </a:pPr>
+            <a:r>
+              <a:rPr lang="en-US" sz="1100" dirty="0">
+                <a:solidFill>
+                  <a:srgbClr val="CBD5E1"/>
+                </a:solidFill>
+                <a:latin typeface="Segoe UI" pitchFamily="34" charset="0"/>
+                <a:ea typeface="Segoe UI" pitchFamily="34" charset="-122"/>
+                <a:cs typeface="Segoe UI" pitchFamily="34" charset="-120"/>
+              </a:rPr>
+              <a:t>• Saman &amp; Çayır Otu</a:t>
+            </a:r>
+            <a:endParaRPr lang="en-US" sz="1100" dirty="0"/>
+          </a:p>
+        </p:txBody>
+      </p:sp>
+      <p:sp>
+        <p:nvSpPr>
+          <p:cNvPr id="10" name="Text 8"/>
+          <p:cNvSpPr/>
+          <p:nvPr/>
+        </p:nvSpPr>
+        <p:spPr>
+          <a:xfrm>
+            <a:off x="960120" y="4251960"/>
+            <a:ext cx="2971800" cy="502920"/>
+          </a:xfrm>
+          <a:prstGeom prst="rect">
+            <a:avLst/>
+          </a:prstGeom>
+          <a:noFill/>
+          <a:ln/>
+        </p:spPr>
+        <p:txBody>
+          <a:bodyPr wrap="square" rtlCol="0" anchor="ctr"/>
+          <a:lstStyle/>
+          <a:p>
+            <a:pPr indent="0" marL="0">
+              <a:buNone/>
+            </a:pPr>
+            <a:r>
+              <a:rPr lang="en-US" sz="1100" dirty="0">
+                <a:solidFill>
+                  <a:srgbClr val="CBD5E1"/>
+                </a:solidFill>
+                <a:latin typeface="Segoe UI" pitchFamily="34" charset="0"/>
+                <a:ea typeface="Segoe UI" pitchFamily="34" charset="-122"/>
+                <a:cs typeface="Segoe UI" pitchFamily="34" charset="-120"/>
+              </a:rPr>
+              <a:t>• Fiğ &amp; Tritikale Silajı</a:t>
+            </a:r>
+            <a:endParaRPr lang="en-US" sz="1100" dirty="0"/>
+          </a:p>
+        </p:txBody>
+      </p:sp>
+      <p:sp>
+        <p:nvSpPr>
+          <p:cNvPr id="11" name="Shape 9"/>
+          <p:cNvSpPr/>
+          <p:nvPr/>
+        </p:nvSpPr>
+        <p:spPr>
+          <a:xfrm>
+            <a:off x="960120" y="5120640"/>
+            <a:ext cx="2971800" cy="640080"/>
+          </a:xfrm>
+          <a:prstGeom prst="roundRect">
+            <a:avLst>
+              <a:gd name="adj" fmla="val 17143"/>
+            </a:avLst>
+          </a:prstGeom>
+          <a:solidFill>
+            <a:srgbClr val="0D1728"/>
           </a:solidFill>
           <a:ln w="12700">
             <a:solidFill>
-              <a:srgbClr val="334155"/>
+              <a:srgbClr val="233348"/>
             </a:solidFill>
             <a:prstDash val="solid"/>
           </a:ln>
@@ -4555,260 +5595,326 @@
       </p:sp>
       <p:sp>
         <p:nvSpPr>
-          <p:cNvPr id="5" name="Text 3"/>
-          <p:cNvSpPr/>
-          <p:nvPr/>
-        </p:nvSpPr>
-        <p:spPr>
-          <a:xfrm>
-            <a:off x="960120" y="1920240"/>
-            <a:ext cx="2926080" cy="274320"/>
-          </a:xfrm>
-          <a:prstGeom prst="rect">
-            <a:avLst/>
-          </a:prstGeom>
-          <a:noFill/>
-          <a:ln/>
-        </p:spPr>
-        <p:txBody>
-          <a:bodyPr wrap="square" rtlCol="0" anchor="ctr"/>
-          <a:lstStyle/>
-          <a:p>
-            <a:pPr indent="0" marL="0">
-              <a:buNone/>
-            </a:pPr>
-            <a:r>
-              <a:rPr lang="en-US" sz="900" b="1" dirty="0">
-                <a:solidFill>
-                  <a:srgbClr val="34D399"/>
-                </a:solidFill>
-                <a:latin typeface="Segoe UI" pitchFamily="34" charset="0"/>
-                <a:ea typeface="Segoe UI" pitchFamily="34" charset="-122"/>
-                <a:cs typeface="Segoe UI" pitchFamily="34" charset="-120"/>
-              </a:rPr>
-              <a:t>TEMEL RUMEN LIF KAYNAĞI</a:t>
-            </a:r>
-            <a:endParaRPr lang="en-US" sz="900" dirty="0"/>
-          </a:p>
-        </p:txBody>
-      </p:sp>
-      <p:sp>
-        <p:nvSpPr>
-          <p:cNvPr id="6" name="Text 4"/>
-          <p:cNvSpPr/>
-          <p:nvPr/>
-        </p:nvSpPr>
-        <p:spPr>
-          <a:xfrm>
-            <a:off x="960120" y="2194560"/>
-            <a:ext cx="2926080" cy="457200"/>
-          </a:xfrm>
-          <a:prstGeom prst="rect">
-            <a:avLst/>
-          </a:prstGeom>
-          <a:noFill/>
-          <a:ln/>
-        </p:spPr>
-        <p:txBody>
-          <a:bodyPr wrap="square" rtlCol="0" anchor="ctr"/>
-          <a:lstStyle/>
-          <a:p>
-            <a:pPr indent="0" marL="0">
-              <a:buNone/>
-            </a:pPr>
-            <a:r>
-              <a:rPr lang="en-US" sz="1500" b="1" dirty="0">
-                <a:solidFill>
-                  <a:srgbClr val="FFFFFF"/>
-                </a:solidFill>
-                <a:latin typeface="Segoe UI" pitchFamily="34" charset="0"/>
-                <a:ea typeface="Segoe UI" pitchFamily="34" charset="-122"/>
-                <a:cs typeface="Segoe UI" pitchFamily="34" charset="-120"/>
-              </a:rPr>
-              <a:t>Kaba Yemler &amp; Silajlar</a:t>
-            </a:r>
-            <a:endParaRPr lang="en-US" sz="1500" dirty="0"/>
-          </a:p>
-        </p:txBody>
-      </p:sp>
-      <p:sp>
-        <p:nvSpPr>
-          <p:cNvPr id="7" name="Text 5"/>
-          <p:cNvSpPr/>
-          <p:nvPr/>
-        </p:nvSpPr>
-        <p:spPr>
-          <a:xfrm>
-            <a:off x="960120" y="2834640"/>
-            <a:ext cx="2926080" cy="457200"/>
-          </a:xfrm>
-          <a:prstGeom prst="rect">
-            <a:avLst/>
-          </a:prstGeom>
-          <a:noFill/>
-          <a:ln/>
-        </p:spPr>
-        <p:txBody>
-          <a:bodyPr wrap="square" rtlCol="0" anchor="ctr"/>
-          <a:lstStyle/>
-          <a:p>
-            <a:pPr indent="0" marL="0">
-              <a:buNone/>
-            </a:pPr>
-            <a:r>
-              <a:rPr lang="en-US" sz="1100" dirty="0">
-                <a:solidFill>
-                  <a:srgbClr val="CBD5E1"/>
-                </a:solidFill>
-                <a:latin typeface="Segoe UI" pitchFamily="34" charset="0"/>
-                <a:ea typeface="Segoe UI" pitchFamily="34" charset="-122"/>
-                <a:cs typeface="Segoe UI" pitchFamily="34" charset="-120"/>
-              </a:rPr>
-              <a:t>• Mısır Silajı (KM: %32)</a:t>
-            </a:r>
-            <a:endParaRPr lang="en-US" sz="1100" dirty="0"/>
-          </a:p>
-        </p:txBody>
-      </p:sp>
-      <p:sp>
-        <p:nvSpPr>
-          <p:cNvPr id="8" name="Text 6"/>
-          <p:cNvSpPr/>
-          <p:nvPr/>
-        </p:nvSpPr>
-        <p:spPr>
-          <a:xfrm>
-            <a:off x="960120" y="3383280"/>
-            <a:ext cx="2926080" cy="457200"/>
-          </a:xfrm>
-          <a:prstGeom prst="rect">
-            <a:avLst/>
-          </a:prstGeom>
-          <a:noFill/>
-          <a:ln/>
-        </p:spPr>
-        <p:txBody>
-          <a:bodyPr wrap="square" rtlCol="0" anchor="ctr"/>
-          <a:lstStyle/>
-          <a:p>
-            <a:pPr indent="0" marL="0">
-              <a:buNone/>
-            </a:pPr>
-            <a:r>
-              <a:rPr lang="en-US" sz="1100" dirty="0">
-                <a:solidFill>
-                  <a:srgbClr val="CBD5E1"/>
-                </a:solidFill>
-                <a:latin typeface="Segoe UI" pitchFamily="34" charset="0"/>
-                <a:ea typeface="Segoe UI" pitchFamily="34" charset="-122"/>
-                <a:cs typeface="Segoe UI" pitchFamily="34" charset="-120"/>
-              </a:rPr>
-              <a:t>• Yonca Kuru Otu (HP: %18)</a:t>
-            </a:r>
-            <a:endParaRPr lang="en-US" sz="1100" dirty="0"/>
-          </a:p>
-        </p:txBody>
-      </p:sp>
-      <p:sp>
-        <p:nvSpPr>
-          <p:cNvPr id="9" name="Text 7"/>
-          <p:cNvSpPr/>
-          <p:nvPr/>
-        </p:nvSpPr>
-        <p:spPr>
-          <a:xfrm>
-            <a:off x="960120" y="3931920"/>
-            <a:ext cx="2926080" cy="457200"/>
-          </a:xfrm>
-          <a:prstGeom prst="rect">
-            <a:avLst/>
-          </a:prstGeom>
-          <a:noFill/>
-          <a:ln/>
-        </p:spPr>
-        <p:txBody>
-          <a:bodyPr wrap="square" rtlCol="0" anchor="ctr"/>
-          <a:lstStyle/>
-          <a:p>
-            <a:pPr indent="0" marL="0">
-              <a:buNone/>
-            </a:pPr>
-            <a:r>
-              <a:rPr lang="en-US" sz="1100" dirty="0">
-                <a:solidFill>
-                  <a:srgbClr val="CBD5E1"/>
-                </a:solidFill>
-                <a:latin typeface="Segoe UI" pitchFamily="34" charset="0"/>
-                <a:ea typeface="Segoe UI" pitchFamily="34" charset="-122"/>
-                <a:cs typeface="Segoe UI" pitchFamily="34" charset="-120"/>
-              </a:rPr>
-              <a:t>• Saman &amp; Çayır Otu</a:t>
-            </a:r>
-            <a:endParaRPr lang="en-US" sz="1100" dirty="0"/>
-          </a:p>
-        </p:txBody>
-      </p:sp>
-      <p:sp>
-        <p:nvSpPr>
-          <p:cNvPr id="10" name="Text 8"/>
-          <p:cNvSpPr/>
-          <p:nvPr/>
-        </p:nvSpPr>
-        <p:spPr>
-          <a:xfrm>
-            <a:off x="960120" y="4480560"/>
-            <a:ext cx="2926080" cy="457200"/>
-          </a:xfrm>
-          <a:prstGeom prst="rect">
-            <a:avLst/>
-          </a:prstGeom>
-          <a:noFill/>
-          <a:ln/>
-        </p:spPr>
-        <p:txBody>
-          <a:bodyPr wrap="square" rtlCol="0" anchor="ctr"/>
-          <a:lstStyle/>
-          <a:p>
-            <a:pPr indent="0" marL="0">
-              <a:buNone/>
-            </a:pPr>
-            <a:r>
-              <a:rPr lang="en-US" sz="1100" dirty="0">
-                <a:solidFill>
-                  <a:srgbClr val="CBD5E1"/>
-                </a:solidFill>
-                <a:latin typeface="Segoe UI" pitchFamily="34" charset="0"/>
-                <a:ea typeface="Segoe UI" pitchFamily="34" charset="-122"/>
-                <a:cs typeface="Segoe UI" pitchFamily="34" charset="-120"/>
-              </a:rPr>
-              <a:t>• Fiğ &amp; Tritikale Silajı</a:t>
-            </a:r>
-            <a:endParaRPr lang="en-US" sz="1100" dirty="0"/>
-          </a:p>
-        </p:txBody>
-      </p:sp>
-      <p:sp>
-        <p:nvSpPr>
-          <p:cNvPr id="11" name="Shape 9"/>
-          <p:cNvSpPr/>
-          <p:nvPr/>
-        </p:nvSpPr>
-        <p:spPr>
-          <a:xfrm>
-            <a:off x="960120" y="5120640"/>
-            <a:ext cx="2971800" cy="640080"/>
+          <p:cNvPr id="12" name="Text 10"/>
+          <p:cNvSpPr/>
+          <p:nvPr/>
+        </p:nvSpPr>
+        <p:spPr>
+          <a:xfrm>
+            <a:off x="1005840" y="5257800"/>
+            <a:ext cx="2880360" cy="365760"/>
+          </a:xfrm>
+          <a:prstGeom prst="rect">
+            <a:avLst/>
+          </a:prstGeom>
+          <a:noFill/>
+          <a:ln/>
+        </p:spPr>
+        <p:txBody>
+          <a:bodyPr wrap="square" rtlCol="0" anchor="ctr"/>
+          <a:lstStyle/>
+          <a:p>
+            <a:pPr algn="ctr" indent="0" marL="0">
+              <a:buNone/>
+            </a:pPr>
+            <a:r>
+              <a:rPr lang="en-US" sz="950" dirty="0">
+                <a:solidFill>
+                  <a:srgbClr val="94A3B8"/>
+                </a:solidFill>
+                <a:latin typeface="Segoe UI" pitchFamily="34" charset="0"/>
+                <a:ea typeface="Segoe UI" pitchFamily="34" charset="-122"/>
+                <a:cs typeface="Segoe UI" pitchFamily="34" charset="-120"/>
+              </a:rPr>
+              <a:t>Fiyat &amp; Besin Değerleri Düzenlenebilir</a:t>
+            </a:r>
+            <a:endParaRPr lang="en-US" sz="950" dirty="0"/>
+          </a:p>
+        </p:txBody>
+      </p:sp>
+      <p:sp>
+        <p:nvSpPr>
+          <p:cNvPr id="13" name="Shape 11"/>
+          <p:cNvSpPr/>
+          <p:nvPr/>
+        </p:nvSpPr>
+        <p:spPr>
+          <a:xfrm>
+            <a:off x="4380890" y="1371600"/>
+            <a:ext cx="3429000" cy="4663440"/>
           </a:xfrm>
           <a:prstGeom prst="roundRect">
             <a:avLst>
-              <a:gd name="adj" fmla="val 21429"/>
+              <a:gd name="adj" fmla="val 5333"/>
             </a:avLst>
           </a:prstGeom>
           <a:solidFill>
-            <a:srgbClr val="0F172A"/>
+            <a:srgbClr val="152238"/>
+          </a:solidFill>
+          <a:ln w="19050">
+            <a:solidFill>
+              <a:srgbClr val="283852"/>
+            </a:solidFill>
+            <a:prstDash val="solid"/>
+          </a:ln>
+        </p:spPr>
+      </p:sp>
+      <p:sp>
+        <p:nvSpPr>
+          <p:cNvPr id="14" name="Text 12"/>
+          <p:cNvSpPr/>
+          <p:nvPr/>
+        </p:nvSpPr>
+        <p:spPr>
+          <a:xfrm>
+            <a:off x="4609490" y="1600200"/>
+            <a:ext cx="2971800" cy="274320"/>
+          </a:xfrm>
+          <a:prstGeom prst="rect">
+            <a:avLst/>
+          </a:prstGeom>
+          <a:noFill/>
+          <a:ln/>
+        </p:spPr>
+        <p:txBody>
+          <a:bodyPr wrap="square" rtlCol="0" anchor="ctr"/>
+          <a:lstStyle/>
+          <a:p>
+            <a:pPr indent="0" marL="0">
+              <a:buNone/>
+            </a:pPr>
+            <a:r>
+              <a:rPr lang="en-US" sz="950" b="1" dirty="0">
+                <a:solidFill>
+                  <a:srgbClr val="34D399"/>
+                </a:solidFill>
+                <a:latin typeface="Segoe UI" pitchFamily="34" charset="0"/>
+                <a:ea typeface="Segoe UI" pitchFamily="34" charset="-122"/>
+                <a:cs typeface="Segoe UI" pitchFamily="34" charset="-120"/>
+              </a:rPr>
+              <a:t>YÜKSEK ENERJI &amp; PROTEIN</a:t>
+            </a:r>
+            <a:endParaRPr lang="en-US" sz="950" dirty="0"/>
+          </a:p>
+        </p:txBody>
+      </p:sp>
+      <p:sp>
+        <p:nvSpPr>
+          <p:cNvPr id="15" name="Text 13"/>
+          <p:cNvSpPr/>
+          <p:nvPr/>
+        </p:nvSpPr>
+        <p:spPr>
+          <a:xfrm>
+            <a:off x="4609490" y="1874520"/>
+            <a:ext cx="2971800" cy="411480"/>
+          </a:xfrm>
+          <a:prstGeom prst="rect">
+            <a:avLst/>
+          </a:prstGeom>
+          <a:noFill/>
+          <a:ln/>
+        </p:spPr>
+        <p:txBody>
+          <a:bodyPr wrap="square" rtlCol="0" anchor="ctr"/>
+          <a:lstStyle/>
+          <a:p>
+            <a:pPr indent="0" marL="0">
+              <a:buNone/>
+            </a:pPr>
+            <a:r>
+              <a:rPr lang="en-US" sz="1500" b="1" dirty="0">
+                <a:solidFill>
+                  <a:srgbClr val="FFFFFF"/>
+                </a:solidFill>
+                <a:latin typeface="Segoe UI" pitchFamily="34" charset="0"/>
+                <a:ea typeface="Segoe UI" pitchFamily="34" charset="-122"/>
+                <a:cs typeface="Segoe UI" pitchFamily="34" charset="-120"/>
+              </a:rPr>
+              <a:t>Tahıllar &amp; Küspeler</a:t>
+            </a:r>
+            <a:endParaRPr lang="en-US" sz="1500" dirty="0"/>
+          </a:p>
+        </p:txBody>
+      </p:sp>
+      <p:sp>
+        <p:nvSpPr>
+          <p:cNvPr id="16" name="Text 14"/>
+          <p:cNvSpPr/>
+          <p:nvPr/>
+        </p:nvSpPr>
+        <p:spPr>
+          <a:xfrm>
+            <a:off x="4609490" y="2468880"/>
+            <a:ext cx="2971800" cy="502920"/>
+          </a:xfrm>
+          <a:prstGeom prst="rect">
+            <a:avLst/>
+          </a:prstGeom>
+          <a:noFill/>
+          <a:ln/>
+        </p:spPr>
+        <p:txBody>
+          <a:bodyPr wrap="square" rtlCol="0" anchor="ctr"/>
+          <a:lstStyle/>
+          <a:p>
+            <a:pPr indent="0" marL="0">
+              <a:buNone/>
+            </a:pPr>
+            <a:r>
+              <a:rPr lang="en-US" sz="1100" dirty="0">
+                <a:solidFill>
+                  <a:srgbClr val="CBD5E1"/>
+                </a:solidFill>
+                <a:latin typeface="Segoe UI" pitchFamily="34" charset="0"/>
+                <a:ea typeface="Segoe UI" pitchFamily="34" charset="-122"/>
+                <a:cs typeface="Segoe UI" pitchFamily="34" charset="-120"/>
+              </a:rPr>
+              <a:t>• Mısır Flake &amp; Arpa Kırması</a:t>
+            </a:r>
+            <a:endParaRPr lang="en-US" sz="1100" dirty="0"/>
+          </a:p>
+        </p:txBody>
+      </p:sp>
+      <p:sp>
+        <p:nvSpPr>
+          <p:cNvPr id="17" name="Text 15"/>
+          <p:cNvSpPr/>
+          <p:nvPr/>
+        </p:nvSpPr>
+        <p:spPr>
+          <a:xfrm>
+            <a:off x="4609490" y="3063240"/>
+            <a:ext cx="2971800" cy="502920"/>
+          </a:xfrm>
+          <a:prstGeom prst="rect">
+            <a:avLst/>
+          </a:prstGeom>
+          <a:noFill/>
+          <a:ln/>
+        </p:spPr>
+        <p:txBody>
+          <a:bodyPr wrap="square" rtlCol="0" anchor="ctr"/>
+          <a:lstStyle/>
+          <a:p>
+            <a:pPr indent="0" marL="0">
+              <a:buNone/>
+            </a:pPr>
+            <a:r>
+              <a:rPr lang="en-US" sz="1100" dirty="0">
+                <a:solidFill>
+                  <a:srgbClr val="CBD5E1"/>
+                </a:solidFill>
+                <a:latin typeface="Segoe UI" pitchFamily="34" charset="0"/>
+                <a:ea typeface="Segoe UI" pitchFamily="34" charset="-122"/>
+                <a:cs typeface="Segoe UI" pitchFamily="34" charset="-120"/>
+              </a:rPr>
+              <a:t>• Soya Küspesi (HP: %44-%48)</a:t>
+            </a:r>
+            <a:endParaRPr lang="en-US" sz="1100" dirty="0"/>
+          </a:p>
+        </p:txBody>
+      </p:sp>
+      <p:sp>
+        <p:nvSpPr>
+          <p:cNvPr id="18" name="Text 16"/>
+          <p:cNvSpPr/>
+          <p:nvPr/>
+        </p:nvSpPr>
+        <p:spPr>
+          <a:xfrm>
+            <a:off x="4609490" y="3657600"/>
+            <a:ext cx="2971800" cy="502920"/>
+          </a:xfrm>
+          <a:prstGeom prst="rect">
+            <a:avLst/>
+          </a:prstGeom>
+          <a:noFill/>
+          <a:ln/>
+        </p:spPr>
+        <p:txBody>
+          <a:bodyPr wrap="square" rtlCol="0" anchor="ctr"/>
+          <a:lstStyle/>
+          <a:p>
+            <a:pPr indent="0" marL="0">
+              <a:buNone/>
+            </a:pPr>
+            <a:r>
+              <a:rPr lang="en-US" sz="1100" dirty="0">
+                <a:solidFill>
+                  <a:srgbClr val="CBD5E1"/>
+                </a:solidFill>
+                <a:latin typeface="Segoe UI" pitchFamily="34" charset="0"/>
+                <a:ea typeface="Segoe UI" pitchFamily="34" charset="-122"/>
+                <a:cs typeface="Segoe UI" pitchFamily="34" charset="-120"/>
+              </a:rPr>
+              <a:t>• Ayçiçeği Küspesi (HP: %32)</a:t>
+            </a:r>
+            <a:endParaRPr lang="en-US" sz="1100" dirty="0"/>
+          </a:p>
+        </p:txBody>
+      </p:sp>
+      <p:sp>
+        <p:nvSpPr>
+          <p:cNvPr id="19" name="Text 17"/>
+          <p:cNvSpPr/>
+          <p:nvPr/>
+        </p:nvSpPr>
+        <p:spPr>
+          <a:xfrm>
+            <a:off x="4609490" y="4251960"/>
+            <a:ext cx="2971800" cy="502920"/>
+          </a:xfrm>
+          <a:prstGeom prst="rect">
+            <a:avLst/>
+          </a:prstGeom>
+          <a:noFill/>
+          <a:ln/>
+        </p:spPr>
+        <p:txBody>
+          <a:bodyPr wrap="square" rtlCol="0" anchor="ctr"/>
+          <a:lstStyle/>
+          <a:p>
+            <a:pPr indent="0" marL="0">
+              <a:buNone/>
+            </a:pPr>
+            <a:r>
+              <a:rPr lang="en-US" sz="1100" dirty="0">
+                <a:solidFill>
+                  <a:srgbClr val="CBD5E1"/>
+                </a:solidFill>
+                <a:latin typeface="Segoe UI" pitchFamily="34" charset="0"/>
+                <a:ea typeface="Segoe UI" pitchFamily="34" charset="-122"/>
+                <a:cs typeface="Segoe UI" pitchFamily="34" charset="-120"/>
+              </a:rPr>
+              <a:t>• Pancar Posası &amp; Melas</a:t>
+            </a:r>
+            <a:endParaRPr lang="en-US" sz="1100" dirty="0"/>
+          </a:p>
+        </p:txBody>
+      </p:sp>
+      <p:sp>
+        <p:nvSpPr>
+          <p:cNvPr id="20" name="Shape 18"/>
+          <p:cNvSpPr/>
+          <p:nvPr/>
+        </p:nvSpPr>
+        <p:spPr>
+          <a:xfrm>
+            <a:off x="4609490" y="5120640"/>
+            <a:ext cx="2971800" cy="640080"/>
+          </a:xfrm>
+          <a:prstGeom prst="roundRect">
+            <a:avLst>
+              <a:gd name="adj" fmla="val 17143"/>
+            </a:avLst>
+          </a:prstGeom>
+          <a:solidFill>
+            <a:srgbClr val="0D1728"/>
           </a:solidFill>
           <a:ln w="12700">
             <a:solidFill>
-              <a:srgbClr val="334155"/>
+              <a:srgbClr val="233348"/>
             </a:solidFill>
             <a:prstDash val="solid"/>
           </a:ln>
@@ -4816,13 +5922,13 @@
       </p:sp>
       <p:sp>
         <p:nvSpPr>
-          <p:cNvPr id="12" name="Text 10"/>
-          <p:cNvSpPr/>
-          <p:nvPr/>
-        </p:nvSpPr>
-        <p:spPr>
-          <a:xfrm>
-            <a:off x="1005840" y="5257800"/>
+          <p:cNvPr id="21" name="Text 19"/>
+          <p:cNvSpPr/>
+          <p:nvPr/>
+        </p:nvSpPr>
+        <p:spPr>
+          <a:xfrm>
+            <a:off x="4655210" y="5257800"/>
             <a:ext cx="2880360" cy="365760"/>
           </a:xfrm>
           <a:prstGeom prst="rect">
@@ -4839,7 +5945,7 @@
               <a:buNone/>
             </a:pPr>
             <a:r>
-              <a:rPr lang="en-US" sz="900" dirty="0">
+              <a:rPr lang="en-US" sz="950" dirty="0">
                 <a:solidFill>
                   <a:srgbClr val="94A3B8"/>
                 </a:solidFill>
@@ -4847,34 +5953,295 @@
                 <a:ea typeface="Segoe UI" pitchFamily="34" charset="-122"/>
                 <a:cs typeface="Segoe UI" pitchFamily="34" charset="-120"/>
               </a:rPr>
-              <a:t>Fiyat &amp; Besin Değeri Düzenlenebilir</a:t>
-            </a:r>
-            <a:endParaRPr lang="en-US" sz="900" dirty="0"/>
-          </a:p>
-        </p:txBody>
-      </p:sp>
-      <p:sp>
-        <p:nvSpPr>
-          <p:cNvPr id="13" name="Shape 11"/>
-          <p:cNvSpPr/>
-          <p:nvPr/>
-        </p:nvSpPr>
-        <p:spPr>
-          <a:xfrm>
-            <a:off x="4343400" y="1645920"/>
-            <a:ext cx="3429000" cy="4389120"/>
+              <a:t>Fiyat &amp; Besin Değerleri Düzenlenebilir</a:t>
+            </a:r>
+            <a:endParaRPr lang="en-US" sz="950" dirty="0"/>
+          </a:p>
+        </p:txBody>
+      </p:sp>
+      <p:sp>
+        <p:nvSpPr>
+          <p:cNvPr id="22" name="Shape 20"/>
+          <p:cNvSpPr/>
+          <p:nvPr/>
+        </p:nvSpPr>
+        <p:spPr>
+          <a:xfrm>
+            <a:off x="8030261" y="1371600"/>
+            <a:ext cx="3429000" cy="4663440"/>
           </a:xfrm>
           <a:prstGeom prst="roundRect">
             <a:avLst>
-              <a:gd name="adj" fmla="val 6667"/>
+              <a:gd name="adj" fmla="val 5333"/>
             </a:avLst>
           </a:prstGeom>
           <a:solidFill>
-            <a:srgbClr val="1E293B"/>
+            <a:srgbClr val="152238"/>
+          </a:solidFill>
+          <a:ln w="19050">
+            <a:solidFill>
+              <a:srgbClr val="283852"/>
+            </a:solidFill>
+            <a:prstDash val="solid"/>
+          </a:ln>
+        </p:spPr>
+      </p:sp>
+      <p:sp>
+        <p:nvSpPr>
+          <p:cNvPr id="23" name="Text 21"/>
+          <p:cNvSpPr/>
+          <p:nvPr/>
+        </p:nvSpPr>
+        <p:spPr>
+          <a:xfrm>
+            <a:off x="8258861" y="1600200"/>
+            <a:ext cx="2971800" cy="274320"/>
+          </a:xfrm>
+          <a:prstGeom prst="rect">
+            <a:avLst/>
+          </a:prstGeom>
+          <a:noFill/>
+          <a:ln/>
+        </p:spPr>
+        <p:txBody>
+          <a:bodyPr wrap="square" rtlCol="0" anchor="ctr"/>
+          <a:lstStyle/>
+          <a:p>
+            <a:pPr indent="0" marL="0">
+              <a:buNone/>
+            </a:pPr>
+            <a:r>
+              <a:rPr lang="en-US" sz="950" b="1" dirty="0">
+                <a:solidFill>
+                  <a:srgbClr val="34D399"/>
+                </a:solidFill>
+                <a:latin typeface="Segoe UI" pitchFamily="34" charset="0"/>
+                <a:ea typeface="Segoe UI" pitchFamily="34" charset="-122"/>
+                <a:cs typeface="Segoe UI" pitchFamily="34" charset="-120"/>
+              </a:rPr>
+              <a:t>HAZIR &amp; DENGELI KARIŞIMLAR</a:t>
+            </a:r>
+            <a:endParaRPr lang="en-US" sz="950" dirty="0"/>
+          </a:p>
+        </p:txBody>
+      </p:sp>
+      <p:sp>
+        <p:nvSpPr>
+          <p:cNvPr id="24" name="Text 22"/>
+          <p:cNvSpPr/>
+          <p:nvPr/>
+        </p:nvSpPr>
+        <p:spPr>
+          <a:xfrm>
+            <a:off x="8258861" y="1874520"/>
+            <a:ext cx="2971800" cy="411480"/>
+          </a:xfrm>
+          <a:prstGeom prst="rect">
+            <a:avLst/>
+          </a:prstGeom>
+          <a:noFill/>
+          <a:ln/>
+        </p:spPr>
+        <p:txBody>
+          <a:bodyPr wrap="square" rtlCol="0" anchor="ctr"/>
+          <a:lstStyle/>
+          <a:p>
+            <a:pPr indent="0" marL="0">
+              <a:buNone/>
+            </a:pPr>
+            <a:r>
+              <a:rPr lang="en-US" sz="1500" b="1" dirty="0">
+                <a:solidFill>
+                  <a:srgbClr val="FFFFFF"/>
+                </a:solidFill>
+                <a:latin typeface="Segoe UI" pitchFamily="34" charset="0"/>
+                <a:ea typeface="Segoe UI" pitchFamily="34" charset="-122"/>
+                <a:cs typeface="Segoe UI" pitchFamily="34" charset="-120"/>
+              </a:rPr>
+              <a:t>Tescilli Fabrika Yemleri</a:t>
+            </a:r>
+            <a:endParaRPr lang="en-US" sz="1500" dirty="0"/>
+          </a:p>
+        </p:txBody>
+      </p:sp>
+      <p:sp>
+        <p:nvSpPr>
+          <p:cNvPr id="25" name="Text 23"/>
+          <p:cNvSpPr/>
+          <p:nvPr/>
+        </p:nvSpPr>
+        <p:spPr>
+          <a:xfrm>
+            <a:off x="8258861" y="2468880"/>
+            <a:ext cx="2971800" cy="502920"/>
+          </a:xfrm>
+          <a:prstGeom prst="rect">
+            <a:avLst/>
+          </a:prstGeom>
+          <a:noFill/>
+          <a:ln/>
+        </p:spPr>
+        <p:txBody>
+          <a:bodyPr wrap="square" rtlCol="0" anchor="ctr"/>
+          <a:lstStyle/>
+          <a:p>
+            <a:pPr indent="0" marL="0">
+              <a:buNone/>
+            </a:pPr>
+            <a:r>
+              <a:rPr lang="en-US" sz="1100" dirty="0">
+                <a:solidFill>
+                  <a:srgbClr val="CBD5E1"/>
+                </a:solidFill>
+                <a:latin typeface="Segoe UI" pitchFamily="34" charset="0"/>
+                <a:ea typeface="Segoe UI" pitchFamily="34" charset="-122"/>
+                <a:cs typeface="Segoe UI" pitchFamily="34" charset="-120"/>
+              </a:rPr>
+              <a:t>• Eriş Sığır Süt A (19 HP / 2800 ME)</a:t>
+            </a:r>
+            <a:endParaRPr lang="en-US" sz="1100" dirty="0"/>
+          </a:p>
+        </p:txBody>
+      </p:sp>
+      <p:sp>
+        <p:nvSpPr>
+          <p:cNvPr id="26" name="Text 24"/>
+          <p:cNvSpPr/>
+          <p:nvPr/>
+        </p:nvSpPr>
+        <p:spPr>
+          <a:xfrm>
+            <a:off x="8258861" y="3063240"/>
+            <a:ext cx="2971800" cy="502920"/>
+          </a:xfrm>
+          <a:prstGeom prst="rect">
+            <a:avLst/>
+          </a:prstGeom>
+          <a:noFill/>
+          <a:ln/>
+        </p:spPr>
+        <p:txBody>
+          <a:bodyPr wrap="square" rtlCol="0" anchor="ctr"/>
+          <a:lstStyle/>
+          <a:p>
+            <a:pPr indent="0" marL="0">
+              <a:buNone/>
+            </a:pPr>
+            <a:r>
+              <a:rPr lang="en-US" sz="1100" dirty="0">
+                <a:solidFill>
+                  <a:srgbClr val="CBD5E1"/>
+                </a:solidFill>
+                <a:latin typeface="Segoe UI" pitchFamily="34" charset="0"/>
+                <a:ea typeface="Segoe UI" pitchFamily="34" charset="-122"/>
+                <a:cs typeface="Segoe UI" pitchFamily="34" charset="-120"/>
+              </a:rPr>
+              <a:t>• Eriş Crown Patlamış Mısır</a:t>
+            </a:r>
+            <a:endParaRPr lang="en-US" sz="1100" dirty="0"/>
+          </a:p>
+        </p:txBody>
+      </p:sp>
+      <p:sp>
+        <p:nvSpPr>
+          <p:cNvPr id="27" name="Text 25"/>
+          <p:cNvSpPr/>
+          <p:nvPr/>
+        </p:nvSpPr>
+        <p:spPr>
+          <a:xfrm>
+            <a:off x="8258861" y="3657600"/>
+            <a:ext cx="2971800" cy="502920"/>
+          </a:xfrm>
+          <a:prstGeom prst="rect">
+            <a:avLst/>
+          </a:prstGeom>
+          <a:noFill/>
+          <a:ln/>
+        </p:spPr>
+        <p:txBody>
+          <a:bodyPr wrap="square" rtlCol="0" anchor="ctr"/>
+          <a:lstStyle/>
+          <a:p>
+            <a:pPr indent="0" marL="0">
+              <a:buNone/>
+            </a:pPr>
+            <a:r>
+              <a:rPr lang="en-US" sz="1100" dirty="0">
+                <a:solidFill>
+                  <a:srgbClr val="CBD5E1"/>
+                </a:solidFill>
+                <a:latin typeface="Segoe UI" pitchFamily="34" charset="0"/>
+                <a:ea typeface="Segoe UI" pitchFamily="34" charset="-122"/>
+                <a:cs typeface="Segoe UI" pitchFamily="34" charset="-120"/>
+              </a:rPr>
+              <a:t>• Özel Düve &amp; Geçiş Yemleri</a:t>
+            </a:r>
+            <a:endParaRPr lang="en-US" sz="1100" dirty="0"/>
+          </a:p>
+        </p:txBody>
+      </p:sp>
+      <p:sp>
+        <p:nvSpPr>
+          <p:cNvPr id="28" name="Text 26"/>
+          <p:cNvSpPr/>
+          <p:nvPr/>
+        </p:nvSpPr>
+        <p:spPr>
+          <a:xfrm>
+            <a:off x="8258861" y="4251960"/>
+            <a:ext cx="2971800" cy="502920"/>
+          </a:xfrm>
+          <a:prstGeom prst="rect">
+            <a:avLst/>
+          </a:prstGeom>
+          <a:noFill/>
+          <a:ln/>
+        </p:spPr>
+        <p:txBody>
+          <a:bodyPr wrap="square" rtlCol="0" anchor="ctr"/>
+          <a:lstStyle/>
+          <a:p>
+            <a:pPr indent="0" marL="0">
+              <a:buNone/>
+            </a:pPr>
+            <a:r>
+              <a:rPr lang="en-US" sz="1100" dirty="0">
+                <a:solidFill>
+                  <a:srgbClr val="CBD5E1"/>
+                </a:solidFill>
+                <a:latin typeface="Segoe UI" pitchFamily="34" charset="0"/>
+                <a:ea typeface="Segoe UI" pitchFamily="34" charset="-122"/>
+                <a:cs typeface="Segoe UI" pitchFamily="34" charset="-120"/>
+              </a:rPr>
+              <a:t>• Premiksler &amp; Mineral Katkıları</a:t>
+            </a:r>
+            <a:endParaRPr lang="en-US" sz="1100" dirty="0"/>
+          </a:p>
+        </p:txBody>
+      </p:sp>
+      <p:sp>
+        <p:nvSpPr>
+          <p:cNvPr id="29" name="Shape 27"/>
+          <p:cNvSpPr/>
+          <p:nvPr/>
+        </p:nvSpPr>
+        <p:spPr>
+          <a:xfrm>
+            <a:off x="8258861" y="5120640"/>
+            <a:ext cx="2971800" cy="640080"/>
+          </a:xfrm>
+          <a:prstGeom prst="roundRect">
+            <a:avLst>
+              <a:gd name="adj" fmla="val 17143"/>
+            </a:avLst>
+          </a:prstGeom>
+          <a:solidFill>
+            <a:srgbClr val="0D1728"/>
           </a:solidFill>
           <a:ln w="12700">
             <a:solidFill>
-              <a:srgbClr val="334155"/>
+              <a:srgbClr val="233348"/>
             </a:solidFill>
             <a:prstDash val="solid"/>
           </a:ln>
@@ -4882,260 +6249,61 @@
       </p:sp>
       <p:sp>
         <p:nvSpPr>
-          <p:cNvPr id="14" name="Text 12"/>
-          <p:cNvSpPr/>
-          <p:nvPr/>
-        </p:nvSpPr>
-        <p:spPr>
-          <a:xfrm>
-            <a:off x="4572000" y="1920240"/>
-            <a:ext cx="2926080" cy="274320"/>
-          </a:xfrm>
-          <a:prstGeom prst="rect">
-            <a:avLst/>
-          </a:prstGeom>
-          <a:noFill/>
-          <a:ln/>
-        </p:spPr>
-        <p:txBody>
-          <a:bodyPr wrap="square" rtlCol="0" anchor="ctr"/>
-          <a:lstStyle/>
-          <a:p>
-            <a:pPr indent="0" marL="0">
-              <a:buNone/>
-            </a:pPr>
-            <a:r>
-              <a:rPr lang="en-US" sz="900" b="1" dirty="0">
-                <a:solidFill>
-                  <a:srgbClr val="34D399"/>
-                </a:solidFill>
-                <a:latin typeface="Segoe UI" pitchFamily="34" charset="0"/>
-                <a:ea typeface="Segoe UI" pitchFamily="34" charset="-122"/>
-                <a:cs typeface="Segoe UI" pitchFamily="34" charset="-120"/>
-              </a:rPr>
-              <a:t>YÜKSEK ENERJI &amp; PROTEIN</a:t>
-            </a:r>
-            <a:endParaRPr lang="en-US" sz="900" dirty="0"/>
-          </a:p>
-        </p:txBody>
-      </p:sp>
-      <p:sp>
-        <p:nvSpPr>
-          <p:cNvPr id="15" name="Text 13"/>
-          <p:cNvSpPr/>
-          <p:nvPr/>
-        </p:nvSpPr>
-        <p:spPr>
-          <a:xfrm>
-            <a:off x="4572000" y="2194560"/>
-            <a:ext cx="2926080" cy="457200"/>
-          </a:xfrm>
-          <a:prstGeom prst="rect">
-            <a:avLst/>
-          </a:prstGeom>
-          <a:noFill/>
-          <a:ln/>
-        </p:spPr>
-        <p:txBody>
-          <a:bodyPr wrap="square" rtlCol="0" anchor="ctr"/>
-          <a:lstStyle/>
-          <a:p>
-            <a:pPr indent="0" marL="0">
-              <a:buNone/>
-            </a:pPr>
-            <a:r>
-              <a:rPr lang="en-US" sz="1500" b="1" dirty="0">
-                <a:solidFill>
-                  <a:srgbClr val="FFFFFF"/>
-                </a:solidFill>
-                <a:latin typeface="Segoe UI" pitchFamily="34" charset="0"/>
-                <a:ea typeface="Segoe UI" pitchFamily="34" charset="-122"/>
-                <a:cs typeface="Segoe UI" pitchFamily="34" charset="-120"/>
-              </a:rPr>
-              <a:t>Tahıllar &amp; Sanayi Yan Ürünleri</a:t>
-            </a:r>
-            <a:endParaRPr lang="en-US" sz="1500" dirty="0"/>
-          </a:p>
-        </p:txBody>
-      </p:sp>
-      <p:sp>
-        <p:nvSpPr>
-          <p:cNvPr id="16" name="Text 14"/>
-          <p:cNvSpPr/>
-          <p:nvPr/>
-        </p:nvSpPr>
-        <p:spPr>
-          <a:xfrm>
-            <a:off x="4572000" y="2834640"/>
-            <a:ext cx="2926080" cy="457200"/>
-          </a:xfrm>
-          <a:prstGeom prst="rect">
-            <a:avLst/>
-          </a:prstGeom>
-          <a:noFill/>
-          <a:ln/>
-        </p:spPr>
-        <p:txBody>
-          <a:bodyPr wrap="square" rtlCol="0" anchor="ctr"/>
-          <a:lstStyle/>
-          <a:p>
-            <a:pPr indent="0" marL="0">
-              <a:buNone/>
-            </a:pPr>
-            <a:r>
-              <a:rPr lang="en-US" sz="1100" dirty="0">
-                <a:solidFill>
-                  <a:srgbClr val="CBD5E1"/>
-                </a:solidFill>
-                <a:latin typeface="Segoe UI" pitchFamily="34" charset="0"/>
-                <a:ea typeface="Segoe UI" pitchFamily="34" charset="-122"/>
-                <a:cs typeface="Segoe UI" pitchFamily="34" charset="-120"/>
-              </a:rPr>
-              <a:t>• Mısır Flake &amp; Arpa Kırması</a:t>
-            </a:r>
-            <a:endParaRPr lang="en-US" sz="1100" dirty="0"/>
-          </a:p>
-        </p:txBody>
-      </p:sp>
-      <p:sp>
-        <p:nvSpPr>
-          <p:cNvPr id="17" name="Text 15"/>
-          <p:cNvSpPr/>
-          <p:nvPr/>
-        </p:nvSpPr>
-        <p:spPr>
-          <a:xfrm>
-            <a:off x="4572000" y="3383280"/>
-            <a:ext cx="2926080" cy="457200"/>
-          </a:xfrm>
-          <a:prstGeom prst="rect">
-            <a:avLst/>
-          </a:prstGeom>
-          <a:noFill/>
-          <a:ln/>
-        </p:spPr>
-        <p:txBody>
-          <a:bodyPr wrap="square" rtlCol="0" anchor="ctr"/>
-          <a:lstStyle/>
-          <a:p>
-            <a:pPr indent="0" marL="0">
-              <a:buNone/>
-            </a:pPr>
-            <a:r>
-              <a:rPr lang="en-US" sz="1100" dirty="0">
-                <a:solidFill>
-                  <a:srgbClr val="CBD5E1"/>
-                </a:solidFill>
-                <a:latin typeface="Segoe UI" pitchFamily="34" charset="0"/>
-                <a:ea typeface="Segoe UI" pitchFamily="34" charset="-122"/>
-                <a:cs typeface="Segoe UI" pitchFamily="34" charset="-120"/>
-              </a:rPr>
-              <a:t>• Soya Küspesi (HP: %44-%48)</a:t>
-            </a:r>
-            <a:endParaRPr lang="en-US" sz="1100" dirty="0"/>
-          </a:p>
-        </p:txBody>
-      </p:sp>
-      <p:sp>
-        <p:nvSpPr>
-          <p:cNvPr id="18" name="Text 16"/>
-          <p:cNvSpPr/>
-          <p:nvPr/>
-        </p:nvSpPr>
-        <p:spPr>
-          <a:xfrm>
-            <a:off x="4572000" y="3931920"/>
-            <a:ext cx="2926080" cy="457200"/>
-          </a:xfrm>
-          <a:prstGeom prst="rect">
-            <a:avLst/>
-          </a:prstGeom>
-          <a:noFill/>
-          <a:ln/>
-        </p:spPr>
-        <p:txBody>
-          <a:bodyPr wrap="square" rtlCol="0" anchor="ctr"/>
-          <a:lstStyle/>
-          <a:p>
-            <a:pPr indent="0" marL="0">
-              <a:buNone/>
-            </a:pPr>
-            <a:r>
-              <a:rPr lang="en-US" sz="1100" dirty="0">
-                <a:solidFill>
-                  <a:srgbClr val="CBD5E1"/>
-                </a:solidFill>
-                <a:latin typeface="Segoe UI" pitchFamily="34" charset="0"/>
-                <a:ea typeface="Segoe UI" pitchFamily="34" charset="-122"/>
-                <a:cs typeface="Segoe UI" pitchFamily="34" charset="-120"/>
-              </a:rPr>
-              <a:t>• Ayçiçeği Küspesi (HP: %32)</a:t>
-            </a:r>
-            <a:endParaRPr lang="en-US" sz="1100" dirty="0"/>
-          </a:p>
-        </p:txBody>
-      </p:sp>
-      <p:sp>
-        <p:nvSpPr>
-          <p:cNvPr id="19" name="Text 17"/>
-          <p:cNvSpPr/>
-          <p:nvPr/>
-        </p:nvSpPr>
-        <p:spPr>
-          <a:xfrm>
-            <a:off x="4572000" y="4480560"/>
-            <a:ext cx="2926080" cy="457200"/>
-          </a:xfrm>
-          <a:prstGeom prst="rect">
-            <a:avLst/>
-          </a:prstGeom>
-          <a:noFill/>
-          <a:ln/>
-        </p:spPr>
-        <p:txBody>
-          <a:bodyPr wrap="square" rtlCol="0" anchor="ctr"/>
-          <a:lstStyle/>
-          <a:p>
-            <a:pPr indent="0" marL="0">
-              <a:buNone/>
-            </a:pPr>
-            <a:r>
-              <a:rPr lang="en-US" sz="1100" dirty="0">
-                <a:solidFill>
-                  <a:srgbClr val="CBD5E1"/>
-                </a:solidFill>
-                <a:latin typeface="Segoe UI" pitchFamily="34" charset="0"/>
-                <a:ea typeface="Segoe UI" pitchFamily="34" charset="-122"/>
-                <a:cs typeface="Segoe UI" pitchFamily="34" charset="-120"/>
-              </a:rPr>
-              <a:t>• Pancar Posası &amp; Melas</a:t>
-            </a:r>
-            <a:endParaRPr lang="en-US" sz="1100" dirty="0"/>
-          </a:p>
-        </p:txBody>
-      </p:sp>
-      <p:sp>
-        <p:nvSpPr>
-          <p:cNvPr id="20" name="Shape 18"/>
-          <p:cNvSpPr/>
-          <p:nvPr/>
-        </p:nvSpPr>
-        <p:spPr>
-          <a:xfrm>
-            <a:off x="4572000" y="5120640"/>
-            <a:ext cx="2971800" cy="640080"/>
-          </a:xfrm>
-          <a:prstGeom prst="roundRect">
-            <a:avLst>
-              <a:gd name="adj" fmla="val 21429"/>
-            </a:avLst>
-          </a:prstGeom>
-          <a:solidFill>
-            <a:srgbClr val="0F172A"/>
-          </a:solidFill>
+          <p:cNvPr id="30" name="Text 28"/>
+          <p:cNvSpPr/>
+          <p:nvPr/>
+        </p:nvSpPr>
+        <p:spPr>
+          <a:xfrm>
+            <a:off x="8304581" y="5257800"/>
+            <a:ext cx="2880360" cy="365760"/>
+          </a:xfrm>
+          <a:prstGeom prst="rect">
+            <a:avLst/>
+          </a:prstGeom>
+          <a:noFill/>
+          <a:ln/>
+        </p:spPr>
+        <p:txBody>
+          <a:bodyPr wrap="square" rtlCol="0" anchor="ctr"/>
+          <a:lstStyle/>
+          <a:p>
+            <a:pPr algn="ctr" indent="0" marL="0">
+              <a:buNone/>
+            </a:pPr>
+            <a:r>
+              <a:rPr lang="en-US" sz="950" dirty="0">
+                <a:solidFill>
+                  <a:srgbClr val="94A3B8"/>
+                </a:solidFill>
+                <a:latin typeface="Segoe UI" pitchFamily="34" charset="0"/>
+                <a:ea typeface="Segoe UI" pitchFamily="34" charset="-122"/>
+                <a:cs typeface="Segoe UI" pitchFamily="34" charset="-120"/>
+              </a:rPr>
+              <a:t>Fiyat &amp; Besin Değerleri Düzenlenebilir</a:t>
+            </a:r>
+            <a:endParaRPr lang="en-US" sz="950" dirty="0"/>
+          </a:p>
+        </p:txBody>
+      </p:sp>
+      <p:sp>
+        <p:nvSpPr>
+          <p:cNvPr id="31" name="Shape 29"/>
+          <p:cNvSpPr/>
+          <p:nvPr/>
+        </p:nvSpPr>
+        <p:spPr>
+          <a:xfrm>
+            <a:off x="731520" y="6263640"/>
+            <a:ext cx="10728655" cy="0"/>
+          </a:xfrm>
+          <a:prstGeom prst="line">
+            <a:avLst/>
+          </a:prstGeom>
+          <a:noFill/>
           <a:ln w="12700">
             <a:solidFill>
-              <a:srgbClr val="334155"/>
+              <a:srgbClr val="233348"/>
             </a:solidFill>
             <a:prstDash val="solid"/>
           </a:ln>
@@ -5143,26 +6311,26 @@
       </p:sp>
       <p:sp>
         <p:nvSpPr>
-          <p:cNvPr id="21" name="Text 19"/>
-          <p:cNvSpPr/>
-          <p:nvPr/>
-        </p:nvSpPr>
-        <p:spPr>
-          <a:xfrm>
-            <a:off x="4617720" y="5257800"/>
-            <a:ext cx="2880360" cy="365760"/>
-          </a:xfrm>
-          <a:prstGeom prst="rect">
-            <a:avLst/>
-          </a:prstGeom>
-          <a:noFill/>
-          <a:ln/>
-        </p:spPr>
-        <p:txBody>
-          <a:bodyPr wrap="square" rtlCol="0" anchor="ctr"/>
-          <a:lstStyle/>
-          <a:p>
-            <a:pPr algn="ctr" indent="0" marL="0">
+          <p:cNvPr id="32" name="Text 30"/>
+          <p:cNvSpPr/>
+          <p:nvPr/>
+        </p:nvSpPr>
+        <p:spPr>
+          <a:xfrm>
+            <a:off x="731520" y="6327648"/>
+            <a:ext cx="5486400" cy="320040"/>
+          </a:xfrm>
+          <a:prstGeom prst="rect">
+            <a:avLst/>
+          </a:prstGeom>
+          <a:noFill/>
+          <a:ln/>
+        </p:spPr>
+        <p:txBody>
+          <a:bodyPr wrap="square" rtlCol="0" anchor="ctr"/>
+          <a:lstStyle/>
+          <a:p>
+            <a:pPr indent="0" marL="0">
               <a:buNone/>
             </a:pPr>
             <a:r>
@@ -5174,7 +6342,7 @@
                 <a:ea typeface="Segoe UI" pitchFamily="34" charset="-122"/>
                 <a:cs typeface="Segoe UI" pitchFamily="34" charset="-120"/>
               </a:rPr>
-              <a:t>Fiyat &amp; Besin Değeri Düzenlenebilir</a:t>
+              <a:t>MilkIQ • Akıllı Süt Sığırcılığı Rasyon &amp; Karlılık Sistemi</a:t>
             </a:r>
             <a:endParaRPr lang="en-US" sz="900" dirty="0"/>
           </a:p>
@@ -5182,403 +6350,14 @@
       </p:sp>
       <p:sp>
         <p:nvSpPr>
-          <p:cNvPr id="22" name="Shape 20"/>
-          <p:cNvSpPr/>
-          <p:nvPr/>
-        </p:nvSpPr>
-        <p:spPr>
-          <a:xfrm>
-            <a:off x="7955280" y="1645920"/>
-            <a:ext cx="3429000" cy="4389120"/>
-          </a:xfrm>
-          <a:prstGeom prst="roundRect">
-            <a:avLst>
-              <a:gd name="adj" fmla="val 6667"/>
-            </a:avLst>
-          </a:prstGeom>
-          <a:solidFill>
-            <a:srgbClr val="1E293B"/>
-          </a:solidFill>
-          <a:ln w="12700">
-            <a:solidFill>
-              <a:srgbClr val="334155"/>
-            </a:solidFill>
-            <a:prstDash val="solid"/>
-          </a:ln>
-        </p:spPr>
-      </p:sp>
-      <p:sp>
-        <p:nvSpPr>
-          <p:cNvPr id="23" name="Text 21"/>
-          <p:cNvSpPr/>
-          <p:nvPr/>
-        </p:nvSpPr>
-        <p:spPr>
-          <a:xfrm>
-            <a:off x="8183880" y="1920240"/>
-            <a:ext cx="2926080" cy="274320"/>
-          </a:xfrm>
-          <a:prstGeom prst="rect">
-            <a:avLst/>
-          </a:prstGeom>
-          <a:noFill/>
-          <a:ln/>
-        </p:spPr>
-        <p:txBody>
-          <a:bodyPr wrap="square" rtlCol="0" anchor="ctr"/>
-          <a:lstStyle/>
-          <a:p>
-            <a:pPr indent="0" marL="0">
-              <a:buNone/>
-            </a:pPr>
-            <a:r>
-              <a:rPr lang="en-US" sz="900" b="1" dirty="0">
-                <a:solidFill>
-                  <a:srgbClr val="34D399"/>
-                </a:solidFill>
-                <a:latin typeface="Segoe UI" pitchFamily="34" charset="0"/>
-                <a:ea typeface="Segoe UI" pitchFamily="34" charset="-122"/>
-                <a:cs typeface="Segoe UI" pitchFamily="34" charset="-120"/>
-              </a:rPr>
-              <a:t>HAZIR &amp; DENGELI KARIŞIMLAR</a:t>
-            </a:r>
-            <a:endParaRPr lang="en-US" sz="900" dirty="0"/>
-          </a:p>
-        </p:txBody>
-      </p:sp>
-      <p:sp>
-        <p:nvSpPr>
-          <p:cNvPr id="24" name="Text 22"/>
-          <p:cNvSpPr/>
-          <p:nvPr/>
-        </p:nvSpPr>
-        <p:spPr>
-          <a:xfrm>
-            <a:off x="8183880" y="2194560"/>
-            <a:ext cx="2926080" cy="457200"/>
-          </a:xfrm>
-          <a:prstGeom prst="rect">
-            <a:avLst/>
-          </a:prstGeom>
-          <a:noFill/>
-          <a:ln/>
-        </p:spPr>
-        <p:txBody>
-          <a:bodyPr wrap="square" rtlCol="0" anchor="ctr"/>
-          <a:lstStyle/>
-          <a:p>
-            <a:pPr indent="0" marL="0">
-              <a:buNone/>
-            </a:pPr>
-            <a:r>
-              <a:rPr lang="en-US" sz="1500" b="1" dirty="0">
-                <a:solidFill>
-                  <a:srgbClr val="FFFFFF"/>
-                </a:solidFill>
-                <a:latin typeface="Segoe UI" pitchFamily="34" charset="0"/>
-                <a:ea typeface="Segoe UI" pitchFamily="34" charset="-122"/>
-                <a:cs typeface="Segoe UI" pitchFamily="34" charset="-120"/>
-              </a:rPr>
-              <a:t>Tescilli Fabrika Yemleri</a:t>
-            </a:r>
-            <a:endParaRPr lang="en-US" sz="1500" dirty="0"/>
-          </a:p>
-        </p:txBody>
-      </p:sp>
-      <p:sp>
-        <p:nvSpPr>
-          <p:cNvPr id="25" name="Text 23"/>
-          <p:cNvSpPr/>
-          <p:nvPr/>
-        </p:nvSpPr>
-        <p:spPr>
-          <a:xfrm>
-            <a:off x="8183880" y="2834640"/>
-            <a:ext cx="2926080" cy="457200"/>
-          </a:xfrm>
-          <a:prstGeom prst="rect">
-            <a:avLst/>
-          </a:prstGeom>
-          <a:noFill/>
-          <a:ln/>
-        </p:spPr>
-        <p:txBody>
-          <a:bodyPr wrap="square" rtlCol="0" anchor="ctr"/>
-          <a:lstStyle/>
-          <a:p>
-            <a:pPr indent="0" marL="0">
-              <a:buNone/>
-            </a:pPr>
-            <a:r>
-              <a:rPr lang="en-US" sz="1100" dirty="0">
-                <a:solidFill>
-                  <a:srgbClr val="CBD5E1"/>
-                </a:solidFill>
-                <a:latin typeface="Segoe UI" pitchFamily="34" charset="0"/>
-                <a:ea typeface="Segoe UI" pitchFamily="34" charset="-122"/>
-                <a:cs typeface="Segoe UI" pitchFamily="34" charset="-120"/>
-              </a:rPr>
-              <a:t>• Eriş Sığır Süt A (19 HP / 2800 ME)</a:t>
-            </a:r>
-            <a:endParaRPr lang="en-US" sz="1100" dirty="0"/>
-          </a:p>
-        </p:txBody>
-      </p:sp>
-      <p:sp>
-        <p:nvSpPr>
-          <p:cNvPr id="26" name="Text 24"/>
-          <p:cNvSpPr/>
-          <p:nvPr/>
-        </p:nvSpPr>
-        <p:spPr>
-          <a:xfrm>
-            <a:off x="8183880" y="3383280"/>
-            <a:ext cx="2926080" cy="457200"/>
-          </a:xfrm>
-          <a:prstGeom prst="rect">
-            <a:avLst/>
-          </a:prstGeom>
-          <a:noFill/>
-          <a:ln/>
-        </p:spPr>
-        <p:txBody>
-          <a:bodyPr wrap="square" rtlCol="0" anchor="ctr"/>
-          <a:lstStyle/>
-          <a:p>
-            <a:pPr indent="0" marL="0">
-              <a:buNone/>
-            </a:pPr>
-            <a:r>
-              <a:rPr lang="en-US" sz="1100" dirty="0">
-                <a:solidFill>
-                  <a:srgbClr val="CBD5E1"/>
-                </a:solidFill>
-                <a:latin typeface="Segoe UI" pitchFamily="34" charset="0"/>
-                <a:ea typeface="Segoe UI" pitchFamily="34" charset="-122"/>
-                <a:cs typeface="Segoe UI" pitchFamily="34" charset="-120"/>
-              </a:rPr>
-              <a:t>• Eriş Crown Patlamış Mısır</a:t>
-            </a:r>
-            <a:endParaRPr lang="en-US" sz="1100" dirty="0"/>
-          </a:p>
-        </p:txBody>
-      </p:sp>
-      <p:sp>
-        <p:nvSpPr>
-          <p:cNvPr id="27" name="Text 25"/>
-          <p:cNvSpPr/>
-          <p:nvPr/>
-        </p:nvSpPr>
-        <p:spPr>
-          <a:xfrm>
-            <a:off x="8183880" y="3931920"/>
-            <a:ext cx="2926080" cy="457200"/>
-          </a:xfrm>
-          <a:prstGeom prst="rect">
-            <a:avLst/>
-          </a:prstGeom>
-          <a:noFill/>
-          <a:ln/>
-        </p:spPr>
-        <p:txBody>
-          <a:bodyPr wrap="square" rtlCol="0" anchor="ctr"/>
-          <a:lstStyle/>
-          <a:p>
-            <a:pPr indent="0" marL="0">
-              <a:buNone/>
-            </a:pPr>
-            <a:r>
-              <a:rPr lang="en-US" sz="1100" dirty="0">
-                <a:solidFill>
-                  <a:srgbClr val="CBD5E1"/>
-                </a:solidFill>
-                <a:latin typeface="Segoe UI" pitchFamily="34" charset="0"/>
-                <a:ea typeface="Segoe UI" pitchFamily="34" charset="-122"/>
-                <a:cs typeface="Segoe UI" pitchFamily="34" charset="-120"/>
-              </a:rPr>
-              <a:t>• Özel Düve &amp; Geçiş Dönemi Yemleri</a:t>
-            </a:r>
-            <a:endParaRPr lang="en-US" sz="1100" dirty="0"/>
-          </a:p>
-        </p:txBody>
-      </p:sp>
-      <p:sp>
-        <p:nvSpPr>
-          <p:cNvPr id="28" name="Text 26"/>
-          <p:cNvSpPr/>
-          <p:nvPr/>
-        </p:nvSpPr>
-        <p:spPr>
-          <a:xfrm>
-            <a:off x="8183880" y="4480560"/>
-            <a:ext cx="2926080" cy="457200"/>
-          </a:xfrm>
-          <a:prstGeom prst="rect">
-            <a:avLst/>
-          </a:prstGeom>
-          <a:noFill/>
-          <a:ln/>
-        </p:spPr>
-        <p:txBody>
-          <a:bodyPr wrap="square" rtlCol="0" anchor="ctr"/>
-          <a:lstStyle/>
-          <a:p>
-            <a:pPr indent="0" marL="0">
-              <a:buNone/>
-            </a:pPr>
-            <a:r>
-              <a:rPr lang="en-US" sz="1100" dirty="0">
-                <a:solidFill>
-                  <a:srgbClr val="CBD5E1"/>
-                </a:solidFill>
-                <a:latin typeface="Segoe UI" pitchFamily="34" charset="0"/>
-                <a:ea typeface="Segoe UI" pitchFamily="34" charset="-122"/>
-                <a:cs typeface="Segoe UI" pitchFamily="34" charset="-120"/>
-              </a:rPr>
-              <a:t>• Premiksler, Mermer Tozu &amp; Tuz</a:t>
-            </a:r>
-            <a:endParaRPr lang="en-US" sz="1100" dirty="0"/>
-          </a:p>
-        </p:txBody>
-      </p:sp>
-      <p:sp>
-        <p:nvSpPr>
-          <p:cNvPr id="29" name="Shape 27"/>
-          <p:cNvSpPr/>
-          <p:nvPr/>
-        </p:nvSpPr>
-        <p:spPr>
-          <a:xfrm>
-            <a:off x="8183880" y="5120640"/>
-            <a:ext cx="2971800" cy="640080"/>
-          </a:xfrm>
-          <a:prstGeom prst="roundRect">
-            <a:avLst>
-              <a:gd name="adj" fmla="val 21429"/>
-            </a:avLst>
-          </a:prstGeom>
-          <a:solidFill>
-            <a:srgbClr val="0F172A"/>
-          </a:solidFill>
-          <a:ln w="12700">
-            <a:solidFill>
-              <a:srgbClr val="334155"/>
-            </a:solidFill>
-            <a:prstDash val="solid"/>
-          </a:ln>
-        </p:spPr>
-      </p:sp>
-      <p:sp>
-        <p:nvSpPr>
-          <p:cNvPr id="30" name="Text 28"/>
-          <p:cNvSpPr/>
-          <p:nvPr/>
-        </p:nvSpPr>
-        <p:spPr>
-          <a:xfrm>
-            <a:off x="8229600" y="5257800"/>
-            <a:ext cx="2880360" cy="365760"/>
-          </a:xfrm>
-          <a:prstGeom prst="rect">
-            <a:avLst/>
-          </a:prstGeom>
-          <a:noFill/>
-          <a:ln/>
-        </p:spPr>
-        <p:txBody>
-          <a:bodyPr wrap="square" rtlCol="0" anchor="ctr"/>
-          <a:lstStyle/>
-          <a:p>
-            <a:pPr algn="ctr" indent="0" marL="0">
-              <a:buNone/>
-            </a:pPr>
-            <a:r>
-              <a:rPr lang="en-US" sz="900" dirty="0">
-                <a:solidFill>
-                  <a:srgbClr val="94A3B8"/>
-                </a:solidFill>
-                <a:latin typeface="Segoe UI" pitchFamily="34" charset="0"/>
-                <a:ea typeface="Segoe UI" pitchFamily="34" charset="-122"/>
-                <a:cs typeface="Segoe UI" pitchFamily="34" charset="-120"/>
-              </a:rPr>
-              <a:t>Fiyat &amp; Besin Değeri Düzenlenebilir</a:t>
-            </a:r>
-            <a:endParaRPr lang="en-US" sz="900" dirty="0"/>
-          </a:p>
-        </p:txBody>
-      </p:sp>
-      <p:sp>
-        <p:nvSpPr>
-          <p:cNvPr id="31" name="Shape 29"/>
-          <p:cNvSpPr/>
-          <p:nvPr/>
-        </p:nvSpPr>
-        <p:spPr>
-          <a:xfrm>
-            <a:off x="731520" y="6400800"/>
-            <a:ext cx="10698480" cy="0"/>
-          </a:xfrm>
-          <a:prstGeom prst="line">
-            <a:avLst/>
-          </a:prstGeom>
-          <a:noFill/>
-          <a:ln w="12700">
-            <a:solidFill>
-              <a:srgbClr val="1E293B"/>
-            </a:solidFill>
-            <a:prstDash val="solid"/>
-          </a:ln>
-        </p:spPr>
-      </p:sp>
-      <p:sp>
-        <p:nvSpPr>
-          <p:cNvPr id="32" name="Text 30"/>
-          <p:cNvSpPr/>
-          <p:nvPr/>
-        </p:nvSpPr>
-        <p:spPr>
-          <a:xfrm>
-            <a:off x="731520" y="6446520"/>
-            <a:ext cx="5486400" cy="320040"/>
-          </a:xfrm>
-          <a:prstGeom prst="rect">
-            <a:avLst/>
-          </a:prstGeom>
-          <a:noFill/>
-          <a:ln/>
-        </p:spPr>
-        <p:txBody>
-          <a:bodyPr wrap="square" rtlCol="0" anchor="ctr"/>
-          <a:lstStyle/>
-          <a:p>
-            <a:pPr indent="0" marL="0">
-              <a:buNone/>
-            </a:pPr>
-            <a:r>
-              <a:rPr lang="en-US" sz="900" dirty="0">
-                <a:solidFill>
-                  <a:srgbClr val="94A3B8"/>
-                </a:solidFill>
-                <a:latin typeface="Segoe UI" pitchFamily="34" charset="0"/>
-                <a:ea typeface="Segoe UI" pitchFamily="34" charset="-122"/>
-                <a:cs typeface="Segoe UI" pitchFamily="34" charset="-120"/>
-              </a:rPr>
-              <a:t>MilkIQ • Akıllı Süt Sığırcılığı Rasyon &amp; Karlılık Sistemi</a:t>
-            </a:r>
-            <a:endParaRPr lang="en-US" sz="900" dirty="0"/>
-          </a:p>
-        </p:txBody>
-      </p:sp>
-      <p:sp>
-        <p:nvSpPr>
           <p:cNvPr id="33" name="Text 31"/>
           <p:cNvSpPr/>
           <p:nvPr/>
         </p:nvSpPr>
         <p:spPr>
           <a:xfrm>
-            <a:off x="6217920" y="6446520"/>
-            <a:ext cx="5212080" cy="320040"/>
+            <a:off x="6217920" y="6327648"/>
+            <a:ext cx="5242255" cy="320040"/>
           </a:xfrm>
           <a:prstGeom prst="rect">
             <a:avLst/>
@@ -5648,24 +6427,24 @@
         </p:nvSpPr>
         <p:spPr>
           <a:xfrm>
-            <a:off x="731520" y="548640"/>
-            <a:ext cx="9144000" cy="274320"/>
-          </a:xfrm>
-          <a:prstGeom prst="rect">
-            <a:avLst/>
-          </a:prstGeom>
-          <a:noFill/>
-          <a:ln/>
-        </p:spPr>
-        <p:txBody>
-          <a:bodyPr wrap="square" rtlCol="0" anchor="ctr"/>
-          <a:lstStyle/>
-          <a:p>
-            <a:pPr indent="0" marL="0">
-              <a:buNone/>
-            </a:pPr>
-            <a:r>
-              <a:rPr lang="en-US" sz="1100" b="1" dirty="0">
+            <a:off x="731520" y="411480"/>
+            <a:ext cx="10728655" cy="274320"/>
+          </a:xfrm>
+          <a:prstGeom prst="rect">
+            <a:avLst/>
+          </a:prstGeom>
+          <a:noFill/>
+          <a:ln/>
+        </p:spPr>
+        <p:txBody>
+          <a:bodyPr wrap="square" rtlCol="0" anchor="ctr"/>
+          <a:lstStyle/>
+          <a:p>
+            <a:pPr indent="0" marL="0">
+              <a:buNone/>
+            </a:pPr>
+            <a:r>
+              <a:rPr lang="en-US" sz="1050" b="1" spc="150" kern="0" dirty="0">
                 <a:solidFill>
                   <a:srgbClr val="34D399"/>
                 </a:solidFill>
@@ -5673,9 +6452,9 @@
                 <a:ea typeface="Segoe UI" pitchFamily="34" charset="-122"/>
                 <a:cs typeface="Segoe UI" pitchFamily="34" charset="-120"/>
               </a:rPr>
-              <a:t>FİNANSAL ZEKA &amp; KARLILIK</a:t>
-            </a:r>
-            <a:endParaRPr lang="en-US" sz="1100" dirty="0"/>
+              <a:t>FINANSAL ANALIZ &amp; KARLILIK</a:t>
+            </a:r>
+            <a:endParaRPr lang="en-US" sz="1050" dirty="0"/>
           </a:p>
         </p:txBody>
       </p:sp>
@@ -5687,24 +6466,24 @@
         </p:nvSpPr>
         <p:spPr>
           <a:xfrm>
-            <a:off x="731520" y="822960"/>
-            <a:ext cx="9144000" cy="548640"/>
-          </a:xfrm>
-          <a:prstGeom prst="rect">
-            <a:avLst/>
-          </a:prstGeom>
-          <a:noFill/>
-          <a:ln/>
-        </p:spPr>
-        <p:txBody>
-          <a:bodyPr wrap="square" rtlCol="0" anchor="ctr"/>
-          <a:lstStyle/>
-          <a:p>
-            <a:pPr indent="0" marL="0">
-              <a:buNone/>
-            </a:pPr>
-            <a:r>
-              <a:rPr lang="en-US" sz="2600" b="1" dirty="0">
+            <a:off x="731520" y="685800"/>
+            <a:ext cx="10728655" cy="548640"/>
+          </a:xfrm>
+          <a:prstGeom prst="rect">
+            <a:avLst/>
+          </a:prstGeom>
+          <a:noFill/>
+          <a:ln/>
+        </p:spPr>
+        <p:txBody>
+          <a:bodyPr wrap="square" rtlCol="0" anchor="ctr"/>
+          <a:lstStyle/>
+          <a:p>
+            <a:pPr indent="0" marL="0">
+              <a:buNone/>
+            </a:pPr>
+            <a:r>
+              <a:rPr lang="en-US" sz="2400" b="1" dirty="0">
                 <a:solidFill>
                   <a:srgbClr val="FFFFFF"/>
                 </a:solidFill>
@@ -5714,7 +6493,7 @@
               </a:rPr>
               <a:t>Süt / Yem Paritesi &amp; Kar Marjı Yönetimi</a:t>
             </a:r>
-            <a:endParaRPr lang="en-US" sz="2600" dirty="0"/>
+            <a:endParaRPr lang="en-US" sz="2400" dirty="0"/>
           </a:p>
         </p:txBody>
       </p:sp>
@@ -5726,16 +6505,16 @@
         </p:nvSpPr>
         <p:spPr>
           <a:xfrm>
-            <a:off x="731520" y="1645920"/>
-            <a:ext cx="3429000" cy="2011680"/>
+            <a:off x="731520" y="1371600"/>
+            <a:ext cx="3429000" cy="2103120"/>
           </a:xfrm>
           <a:prstGeom prst="roundRect">
             <a:avLst>
-              <a:gd name="adj" fmla="val 11364"/>
+              <a:gd name="adj" fmla="val 7826"/>
             </a:avLst>
           </a:prstGeom>
           <a:solidFill>
-            <a:srgbClr val="1E293B"/>
+            <a:srgbClr val="152238"/>
           </a:solidFill>
           <a:ln w="25400">
             <a:solidFill>
@@ -5753,7 +6532,7 @@
         </p:nvSpPr>
         <p:spPr>
           <a:xfrm>
-            <a:off x="914400" y="1828800"/>
+            <a:off x="914400" y="1554480"/>
             <a:ext cx="3063240" cy="320040"/>
           </a:xfrm>
           <a:prstGeom prst="rect">
@@ -5792,7 +6571,7 @@
         </p:nvSpPr>
         <p:spPr>
           <a:xfrm>
-            <a:off x="914400" y="2194560"/>
+            <a:off x="914400" y="1874520"/>
             <a:ext cx="3063240" cy="594360"/>
           </a:xfrm>
           <a:prstGeom prst="rect">
@@ -5831,24 +6610,24 @@
         </p:nvSpPr>
         <p:spPr>
           <a:xfrm>
-            <a:off x="914400" y="2834640"/>
-            <a:ext cx="3063240" cy="685800"/>
-          </a:xfrm>
-          <a:prstGeom prst="rect">
-            <a:avLst/>
-          </a:prstGeom>
-          <a:noFill/>
-          <a:ln/>
-        </p:spPr>
-        <p:txBody>
-          <a:bodyPr wrap="square" rtlCol="0" anchor="ctr"/>
-          <a:lstStyle/>
-          <a:p>
-            <a:pPr indent="0" marL="0">
-              <a:buNone/>
-            </a:pPr>
-            <a:r>
-              <a:rPr lang="en-US" sz="950" dirty="0">
+            <a:off x="914400" y="2514600"/>
+            <a:ext cx="3063240" cy="777240"/>
+          </a:xfrm>
+          <a:prstGeom prst="rect">
+            <a:avLst/>
+          </a:prstGeom>
+          <a:noFill/>
+          <a:ln/>
+        </p:spPr>
+        <p:txBody>
+          <a:bodyPr wrap="square" rtlCol="0" anchor="ctr"/>
+          <a:lstStyle/>
+          <a:p>
+            <a:pPr indent="0" marL="0">
+              <a:buNone/>
+            </a:pPr>
+            <a:r>
+              <a:rPr lang="en-US" sz="1000" dirty="0">
                 <a:solidFill>
                   <a:srgbClr val="E2E8F0"/>
                 </a:solidFill>
@@ -5858,7 +6637,7 @@
               </a:rPr>
               <a:t>Rasyondaki toplam günlük yem tutarının günlük süt verimine oranı.</a:t>
             </a:r>
-            <a:endParaRPr lang="en-US" sz="950" dirty="0"/>
+            <a:endParaRPr lang="en-US" sz="1000" dirty="0"/>
           </a:p>
         </p:txBody>
       </p:sp>
@@ -5870,16 +6649,16 @@
         </p:nvSpPr>
         <p:spPr>
           <a:xfrm>
-            <a:off x="4343400" y="1645920"/>
-            <a:ext cx="3429000" cy="2011680"/>
+            <a:off x="4380890" y="1371600"/>
+            <a:ext cx="3429000" cy="2103120"/>
           </a:xfrm>
           <a:prstGeom prst="roundRect">
             <a:avLst>
-              <a:gd name="adj" fmla="val 11364"/>
+              <a:gd name="adj" fmla="val 7826"/>
             </a:avLst>
           </a:prstGeom>
           <a:solidFill>
-            <a:srgbClr val="1E293B"/>
+            <a:srgbClr val="152238"/>
           </a:solidFill>
           <a:ln w="25400">
             <a:solidFill>
@@ -5897,7 +6676,7 @@
         </p:nvSpPr>
         <p:spPr>
           <a:xfrm>
-            <a:off x="4526280" y="1828800"/>
+            <a:off x="4563770" y="1554480"/>
             <a:ext cx="3063240" cy="320040"/>
           </a:xfrm>
           <a:prstGeom prst="rect">
@@ -5936,7 +6715,7 @@
         </p:nvSpPr>
         <p:spPr>
           <a:xfrm>
-            <a:off x="4526280" y="2194560"/>
+            <a:off x="4563770" y="1874520"/>
             <a:ext cx="3063240" cy="594360"/>
           </a:xfrm>
           <a:prstGeom prst="rect">
@@ -5975,24 +6754,24 @@
         </p:nvSpPr>
         <p:spPr>
           <a:xfrm>
-            <a:off x="4526280" y="2834640"/>
-            <a:ext cx="3063240" cy="685800"/>
-          </a:xfrm>
-          <a:prstGeom prst="rect">
-            <a:avLst/>
-          </a:prstGeom>
-          <a:noFill/>
-          <a:ln/>
-        </p:spPr>
-        <p:txBody>
-          <a:bodyPr wrap="square" rtlCol="0" anchor="ctr"/>
-          <a:lstStyle/>
-          <a:p>
-            <a:pPr indent="0" marL="0">
-              <a:buNone/>
-            </a:pPr>
-            <a:r>
-              <a:rPr lang="en-US" sz="950" dirty="0">
+            <a:off x="4563770" y="2514600"/>
+            <a:ext cx="3063240" cy="777240"/>
+          </a:xfrm>
+          <a:prstGeom prst="rect">
+            <a:avLst/>
+          </a:prstGeom>
+          <a:noFill/>
+          <a:ln/>
+        </p:spPr>
+        <p:txBody>
+          <a:bodyPr wrap="square" rtlCol="0" anchor="ctr"/>
+          <a:lstStyle/>
+          <a:p>
+            <a:pPr indent="0" marL="0">
+              <a:buNone/>
+            </a:pPr>
+            <a:r>
+              <a:rPr lang="en-US" sz="1000" dirty="0">
                 <a:solidFill>
                   <a:srgbClr val="E2E8F0"/>
                 </a:solidFill>
@@ -6002,7 +6781,7 @@
               </a:rPr>
               <a:t>Süt geliri - (Yem gideri + Günlük amortisman ve genel giderler).</a:t>
             </a:r>
-            <a:endParaRPr lang="en-US" sz="950" dirty="0"/>
+            <a:endParaRPr lang="en-US" sz="1000" dirty="0"/>
           </a:p>
         </p:txBody>
       </p:sp>
@@ -6014,16 +6793,16 @@
         </p:nvSpPr>
         <p:spPr>
           <a:xfrm>
-            <a:off x="7955280" y="1645920"/>
-            <a:ext cx="3429000" cy="2011680"/>
+            <a:off x="8030261" y="1371600"/>
+            <a:ext cx="3429000" cy="2103120"/>
           </a:xfrm>
           <a:prstGeom prst="roundRect">
             <a:avLst>
-              <a:gd name="adj" fmla="val 11364"/>
+              <a:gd name="adj" fmla="val 7826"/>
             </a:avLst>
           </a:prstGeom>
           <a:solidFill>
-            <a:srgbClr val="1E293B"/>
+            <a:srgbClr val="152238"/>
           </a:solidFill>
           <a:ln w="25400">
             <a:solidFill>
@@ -6041,7 +6820,7 @@
         </p:nvSpPr>
         <p:spPr>
           <a:xfrm>
-            <a:off x="8138160" y="1828800"/>
+            <a:off x="8213141" y="1554480"/>
             <a:ext cx="3063240" cy="320040"/>
           </a:xfrm>
           <a:prstGeom prst="rect">
@@ -6080,7 +6859,7 @@
         </p:nvSpPr>
         <p:spPr>
           <a:xfrm>
-            <a:off x="8138160" y="2194560"/>
+            <a:off x="8213141" y="1874520"/>
             <a:ext cx="3063240" cy="594360"/>
           </a:xfrm>
           <a:prstGeom prst="rect">
@@ -6119,24 +6898,24 @@
         </p:nvSpPr>
         <p:spPr>
           <a:xfrm>
-            <a:off x="8138160" y="2834640"/>
-            <a:ext cx="3063240" cy="685800"/>
-          </a:xfrm>
-          <a:prstGeom prst="rect">
-            <a:avLst/>
-          </a:prstGeom>
-          <a:noFill/>
-          <a:ln/>
-        </p:spPr>
-        <p:txBody>
-          <a:bodyPr wrap="square" rtlCol="0" anchor="ctr"/>
-          <a:lstStyle/>
-          <a:p>
-            <a:pPr indent="0" marL="0">
-              <a:buNone/>
-            </a:pPr>
-            <a:r>
-              <a:rPr lang="en-US" sz="950" dirty="0">
+            <a:off x="8213141" y="2514600"/>
+            <a:ext cx="3063240" cy="777240"/>
+          </a:xfrm>
+          <a:prstGeom prst="rect">
+            <a:avLst/>
+          </a:prstGeom>
+          <a:noFill/>
+          <a:ln/>
+        </p:spPr>
+        <p:txBody>
+          <a:bodyPr wrap="square" rtlCol="0" anchor="ctr"/>
+          <a:lstStyle/>
+          <a:p>
+            <a:pPr indent="0" marL="0">
+              <a:buNone/>
+            </a:pPr>
+            <a:r>
+              <a:rPr lang="en-US" sz="1000" dirty="0">
                 <a:solidFill>
                   <a:srgbClr val="E2E8F0"/>
                 </a:solidFill>
@@ -6146,7 +6925,7 @@
               </a:rPr>
               <a:t>1 kg süt satışı ile kaç kg yem alınabileceğini gösteren kritik katsayı.</a:t>
             </a:r>
-            <a:endParaRPr lang="en-US" sz="950" dirty="0"/>
+            <a:endParaRPr lang="en-US" sz="1000" dirty="0"/>
           </a:p>
         </p:txBody>
       </p:sp>
@@ -6158,20 +6937,20 @@
         </p:nvSpPr>
         <p:spPr>
           <a:xfrm>
-            <a:off x="731520" y="3931920"/>
-            <a:ext cx="10607040" cy="2103120"/>
+            <a:off x="731520" y="3657600"/>
+            <a:ext cx="10728655" cy="2377440"/>
           </a:xfrm>
           <a:prstGeom prst="roundRect">
             <a:avLst>
-              <a:gd name="adj" fmla="val 8696"/>
+              <a:gd name="adj" fmla="val 6923"/>
             </a:avLst>
           </a:prstGeom>
           <a:solidFill>
-            <a:srgbClr val="1E293B"/>
+            <a:srgbClr val="152238"/>
           </a:solidFill>
-          <a:ln w="12700">
+          <a:ln w="19050">
             <a:solidFill>
-              <a:srgbClr val="334155"/>
+              <a:srgbClr val="283852"/>
             </a:solidFill>
             <a:prstDash val="solid"/>
           </a:ln>
@@ -6185,24 +6964,24 @@
         </p:nvSpPr>
         <p:spPr>
           <a:xfrm>
-            <a:off x="1005840" y="4114800"/>
-            <a:ext cx="7315200" cy="320040"/>
-          </a:xfrm>
-          <a:prstGeom prst="rect">
-            <a:avLst/>
-          </a:prstGeom>
-          <a:noFill/>
-          <a:ln/>
-        </p:spPr>
-        <p:txBody>
-          <a:bodyPr wrap="square" rtlCol="0" anchor="ctr"/>
-          <a:lstStyle/>
-          <a:p>
-            <a:pPr indent="0" marL="0">
-              <a:buNone/>
-            </a:pPr>
-            <a:r>
-              <a:rPr lang="en-US" sz="1400" b="1" dirty="0">
+            <a:off x="1005840" y="3840480"/>
+            <a:ext cx="10180015" cy="320040"/>
+          </a:xfrm>
+          <a:prstGeom prst="rect">
+            <a:avLst/>
+          </a:prstGeom>
+          <a:noFill/>
+          <a:ln/>
+        </p:spPr>
+        <p:txBody>
+          <a:bodyPr wrap="square" rtlCol="0" anchor="ctr"/>
+          <a:lstStyle/>
+          <a:p>
+            <a:pPr indent="0" marL="0">
+              <a:buNone/>
+            </a:pPr>
+            <a:r>
+              <a:rPr lang="en-US" sz="1500" b="1" dirty="0">
                 <a:solidFill>
                   <a:srgbClr val="FFFFFF"/>
                 </a:solidFill>
@@ -6212,7 +6991,7 @@
               </a:rPr>
               <a:t>Finansal Karar Destek Mekanizması</a:t>
             </a:r>
-            <a:endParaRPr lang="en-US" sz="1400" dirty="0"/>
+            <a:endParaRPr lang="en-US" sz="1500" dirty="0"/>
           </a:p>
         </p:txBody>
       </p:sp>
@@ -6224,24 +7003,24 @@
         </p:nvSpPr>
         <p:spPr>
           <a:xfrm>
-            <a:off x="1005840" y="4526280"/>
-            <a:ext cx="10058400" cy="320040"/>
-          </a:xfrm>
-          <a:prstGeom prst="rect">
-            <a:avLst/>
-          </a:prstGeom>
-          <a:noFill/>
-          <a:ln/>
-        </p:spPr>
-        <p:txBody>
-          <a:bodyPr wrap="square" rtlCol="0" anchor="ctr"/>
-          <a:lstStyle/>
-          <a:p>
-            <a:pPr indent="0" marL="0">
-              <a:buNone/>
-            </a:pPr>
-            <a:r>
-              <a:rPr lang="en-US" sz="1050" dirty="0">
+            <a:off x="1005840" y="4251960"/>
+            <a:ext cx="10180015" cy="365760"/>
+          </a:xfrm>
+          <a:prstGeom prst="rect">
+            <a:avLst/>
+          </a:prstGeom>
+          <a:noFill/>
+          <a:ln/>
+        </p:spPr>
+        <p:txBody>
+          <a:bodyPr wrap="square" rtlCol="0" anchor="ctr"/>
+          <a:lstStyle/>
+          <a:p>
+            <a:pPr indent="0" marL="0">
+              <a:buNone/>
+            </a:pPr>
+            <a:r>
+              <a:rPr lang="en-US" sz="1100" dirty="0">
                 <a:solidFill>
                   <a:srgbClr val="CBD5E1"/>
                 </a:solidFill>
@@ -6251,7 +7030,7 @@
               </a:rPr>
               <a:t>• Yem fiyatları arttığında aynı besin değerini koruyarak en ekonomik alternatif hammaddeleri önerir.</a:t>
             </a:r>
-            <a:endParaRPr lang="en-US" sz="1050" dirty="0"/>
+            <a:endParaRPr lang="en-US" sz="1100" dirty="0"/>
           </a:p>
         </p:txBody>
       </p:sp>
@@ -6263,24 +7042,24 @@
         </p:nvSpPr>
         <p:spPr>
           <a:xfrm>
-            <a:off x="1005840" y="4873752"/>
-            <a:ext cx="10058400" cy="320040"/>
-          </a:xfrm>
-          <a:prstGeom prst="rect">
-            <a:avLst/>
-          </a:prstGeom>
-          <a:noFill/>
-          <a:ln/>
-        </p:spPr>
-        <p:txBody>
-          <a:bodyPr wrap="square" rtlCol="0" anchor="ctr"/>
-          <a:lstStyle/>
-          <a:p>
-            <a:pPr indent="0" marL="0">
-              <a:buNone/>
-            </a:pPr>
-            <a:r>
-              <a:rPr lang="en-US" sz="1050" dirty="0">
+            <a:off x="1005840" y="4654296"/>
+            <a:ext cx="10180015" cy="365760"/>
+          </a:xfrm>
+          <a:prstGeom prst="rect">
+            <a:avLst/>
+          </a:prstGeom>
+          <a:noFill/>
+          <a:ln/>
+        </p:spPr>
+        <p:txBody>
+          <a:bodyPr wrap="square" rtlCol="0" anchor="ctr"/>
+          <a:lstStyle/>
+          <a:p>
+            <a:pPr indent="0" marL="0">
+              <a:buNone/>
+            </a:pPr>
+            <a:r>
+              <a:rPr lang="en-US" sz="1100" dirty="0">
                 <a:solidFill>
                   <a:srgbClr val="CBD5E1"/>
                 </a:solidFill>
@@ -6288,9 +7067,9 @@
                 <a:ea typeface="Segoe UI" pitchFamily="34" charset="-122"/>
                 <a:cs typeface="Segoe UI" pitchFamily="34" charset="-120"/>
               </a:rPr>
-              <a:t>• Süt fiyatı düştüğünde işletmenin başa baş (break-even) noktasını otomatik simüle eder.</a:t>
-            </a:r>
-            <a:endParaRPr lang="en-US" sz="1050" dirty="0"/>
+              <a:t>• Süt fiyatı dalgalandığında işletmenin başa baş (break-even) üretim noktasını otomatik simüle eder.</a:t>
+            </a:r>
+            <a:endParaRPr lang="en-US" sz="1100" dirty="0"/>
           </a:p>
         </p:txBody>
       </p:sp>
@@ -6302,24 +7081,24 @@
         </p:nvSpPr>
         <p:spPr>
           <a:xfrm>
-            <a:off x="1005840" y="5221224"/>
-            <a:ext cx="10058400" cy="320040"/>
-          </a:xfrm>
-          <a:prstGeom prst="rect">
-            <a:avLst/>
-          </a:prstGeom>
-          <a:noFill/>
-          <a:ln/>
-        </p:spPr>
-        <p:txBody>
-          <a:bodyPr wrap="square" rtlCol="0" anchor="ctr"/>
-          <a:lstStyle/>
-          <a:p>
-            <a:pPr indent="0" marL="0">
-              <a:buNone/>
-            </a:pPr>
-            <a:r>
-              <a:rPr lang="en-US" sz="1050" dirty="0">
+            <a:off x="1005840" y="5056632"/>
+            <a:ext cx="10180015" cy="365760"/>
+          </a:xfrm>
+          <a:prstGeom prst="rect">
+            <a:avLst/>
+          </a:prstGeom>
+          <a:noFill/>
+          <a:ln/>
+        </p:spPr>
+        <p:txBody>
+          <a:bodyPr wrap="square" rtlCol="0" anchor="ctr"/>
+          <a:lstStyle/>
+          <a:p>
+            <a:pPr indent="0" marL="0">
+              <a:buNone/>
+            </a:pPr>
+            <a:r>
+              <a:rPr lang="en-US" sz="1100" dirty="0">
                 <a:solidFill>
                   <a:srgbClr val="CBD5E1"/>
                 </a:solidFill>
@@ -6329,7 +7108,7 @@
               </a:rPr>
               <a:t>• Sürü genelinde aylık ve yıllık tahmini ciro &amp; net kar projeksiyonları sunar.</a:t>
             </a:r>
-            <a:endParaRPr lang="en-US" sz="1050" dirty="0"/>
+            <a:endParaRPr lang="en-US" sz="1100" dirty="0"/>
           </a:p>
         </p:txBody>
       </p:sp>
@@ -6341,24 +7120,24 @@
         </p:nvSpPr>
         <p:spPr>
           <a:xfrm>
-            <a:off x="1005840" y="5568696"/>
-            <a:ext cx="10058400" cy="320040"/>
-          </a:xfrm>
-          <a:prstGeom prst="rect">
-            <a:avLst/>
-          </a:prstGeom>
-          <a:noFill/>
-          <a:ln/>
-        </p:spPr>
-        <p:txBody>
-          <a:bodyPr wrap="square" rtlCol="0" anchor="ctr"/>
-          <a:lstStyle/>
-          <a:p>
-            <a:pPr indent="0" marL="0">
-              <a:buNone/>
-            </a:pPr>
-            <a:r>
-              <a:rPr lang="en-US" sz="1050" dirty="0">
+            <a:off x="1005840" y="5458968"/>
+            <a:ext cx="10180015" cy="365760"/>
+          </a:xfrm>
+          <a:prstGeom prst="rect">
+            <a:avLst/>
+          </a:prstGeom>
+          <a:noFill/>
+          <a:ln/>
+        </p:spPr>
+        <p:txBody>
+          <a:bodyPr wrap="square" rtlCol="0" anchor="ctr"/>
+          <a:lstStyle/>
+          <a:p>
+            <a:pPr indent="0" marL="0">
+              <a:buNone/>
+            </a:pPr>
+            <a:r>
+              <a:rPr lang="en-US" sz="1100" dirty="0">
                 <a:solidFill>
                   <a:srgbClr val="CBD5E1"/>
                 </a:solidFill>
@@ -6366,9 +7145,9 @@
                 <a:ea typeface="Segoe UI" pitchFamily="34" charset="-122"/>
                 <a:cs typeface="Segoe UI" pitchFamily="34" charset="-120"/>
               </a:rPr>
-              <a:t>• Çiftliğin finansal sağlığını renk kodlu grafik ve KPI kartlarıyla anlık özetler.</a:t>
-            </a:r>
-            <a:endParaRPr lang="en-US" sz="1050" dirty="0"/>
+              <a:t>• Çiftliğin finansal sağlığını renk kodlu göstergeler ve net KPI kartlarıyla anlık özetler.</a:t>
+            </a:r>
+            <a:endParaRPr lang="en-US" sz="1100" dirty="0"/>
           </a:p>
         </p:txBody>
       </p:sp>
@@ -6380,8 +7159,8 @@
         </p:nvSpPr>
         <p:spPr>
           <a:xfrm>
-            <a:off x="731520" y="6400800"/>
-            <a:ext cx="10698480" cy="0"/>
+            <a:off x="731520" y="6263640"/>
+            <a:ext cx="10728655" cy="0"/>
           </a:xfrm>
           <a:prstGeom prst="line">
             <a:avLst/>
@@ -6389,7 +7168,7 @@
           <a:noFill/>
           <a:ln w="12700">
             <a:solidFill>
-              <a:srgbClr val="1E293B"/>
+              <a:srgbClr val="233348"/>
             </a:solidFill>
             <a:prstDash val="solid"/>
           </a:ln>
@@ -6403,7 +7182,7 @@
         </p:nvSpPr>
         <p:spPr>
           <a:xfrm>
-            <a:off x="731520" y="6446520"/>
+            <a:off x="731520" y="6327648"/>
             <a:ext cx="5486400" cy="320040"/>
           </a:xfrm>
           <a:prstGeom prst="rect">
@@ -6442,8 +7221,8 @@
         </p:nvSpPr>
         <p:spPr>
           <a:xfrm>
-            <a:off x="6217920" y="6446520"/>
-            <a:ext cx="5212080" cy="320040"/>
+            <a:off x="6217920" y="6327648"/>
+            <a:ext cx="5242255" cy="320040"/>
           </a:xfrm>
           <a:prstGeom prst="rect">
             <a:avLst/>
@@ -6513,24 +7292,24 @@
         </p:nvSpPr>
         <p:spPr>
           <a:xfrm>
-            <a:off x="731520" y="548640"/>
-            <a:ext cx="9144000" cy="274320"/>
-          </a:xfrm>
-          <a:prstGeom prst="rect">
-            <a:avLst/>
-          </a:prstGeom>
-          <a:noFill/>
-          <a:ln/>
-        </p:spPr>
-        <p:txBody>
-          <a:bodyPr wrap="square" rtlCol="0" anchor="ctr"/>
-          <a:lstStyle/>
-          <a:p>
-            <a:pPr indent="0" marL="0">
-              <a:buNone/>
-            </a:pPr>
-            <a:r>
-              <a:rPr lang="en-US" sz="1100" b="1" dirty="0">
+            <a:off x="731520" y="411480"/>
+            <a:ext cx="10728655" cy="274320"/>
+          </a:xfrm>
+          <a:prstGeom prst="rect">
+            <a:avLst/>
+          </a:prstGeom>
+          <a:noFill/>
+          <a:ln/>
+        </p:spPr>
+        <p:txBody>
+          <a:bodyPr wrap="square" rtlCol="0" anchor="ctr"/>
+          <a:lstStyle/>
+          <a:p>
+            <a:pPr indent="0" marL="0">
+              <a:buNone/>
+            </a:pPr>
+            <a:r>
+              <a:rPr lang="en-US" sz="1050" b="1" spc="150" kern="0" dirty="0">
                 <a:solidFill>
                   <a:srgbClr val="34D399"/>
                 </a:solidFill>
@@ -6538,9 +7317,9 @@
                 <a:ea typeface="Segoe UI" pitchFamily="34" charset="-122"/>
                 <a:cs typeface="Segoe UI" pitchFamily="34" charset="-120"/>
               </a:rPr>
-              <a:t>SÜRÜ &amp; ÜRETİM YÖNETİMİ</a:t>
-            </a:r>
-            <a:endParaRPr lang="en-US" sz="1100" dirty="0"/>
+              <a:t>SÜRÜ &amp; ÜRETIM YÖNETIMI</a:t>
+            </a:r>
+            <a:endParaRPr lang="en-US" sz="1050" dirty="0"/>
           </a:p>
         </p:txBody>
       </p:sp>
@@ -6552,24 +7331,24 @@
         </p:nvSpPr>
         <p:spPr>
           <a:xfrm>
-            <a:off x="731520" y="822960"/>
-            <a:ext cx="9144000" cy="548640"/>
-          </a:xfrm>
-          <a:prstGeom prst="rect">
-            <a:avLst/>
-          </a:prstGeom>
-          <a:noFill/>
-          <a:ln/>
-        </p:spPr>
-        <p:txBody>
-          <a:bodyPr wrap="square" rtlCol="0" anchor="ctr"/>
-          <a:lstStyle/>
-          <a:p>
-            <a:pPr indent="0" marL="0">
-              <a:buNone/>
-            </a:pPr>
-            <a:r>
-              <a:rPr lang="en-US" sz="2600" b="1" dirty="0">
+            <a:off x="731520" y="685800"/>
+            <a:ext cx="10728655" cy="548640"/>
+          </a:xfrm>
+          <a:prstGeom prst="rect">
+            <a:avLst/>
+          </a:prstGeom>
+          <a:noFill/>
+          <a:ln/>
+        </p:spPr>
+        <p:txBody>
+          <a:bodyPr wrap="square" rtlCol="0" anchor="ctr"/>
+          <a:lstStyle/>
+          <a:p>
+            <a:pPr indent="0" marL="0">
+              <a:buNone/>
+            </a:pPr>
+            <a:r>
+              <a:rPr lang="en-US" sz="2400" b="1" dirty="0">
                 <a:solidFill>
                   <a:srgbClr val="FFFFFF"/>
                 </a:solidFill>
@@ -6577,9 +7356,9 @@
                 <a:ea typeface="Segoe UI" pitchFamily="34" charset="-122"/>
                 <a:cs typeface="Segoe UI" pitchFamily="34" charset="-120"/>
               </a:rPr>
-              <a:t>Laktasyon Gruplandırma &amp; Verim Projeksiyonu</a:t>
-            </a:r>
-            <a:endParaRPr lang="en-US" sz="2600" dirty="0"/>
+              <a:t>Laktasyon Gruplandırma &amp; Besleme Tavsiyeleri</a:t>
+            </a:r>
+            <a:endParaRPr lang="en-US" sz="2400" dirty="0"/>
           </a:p>
         </p:txBody>
       </p:sp>
@@ -6591,20 +7370,20 @@
         </p:nvSpPr>
         <p:spPr>
           <a:xfrm>
-            <a:off x="731520" y="1645920"/>
-            <a:ext cx="3429000" cy="4389120"/>
+            <a:off x="731520" y="1371600"/>
+            <a:ext cx="3429000" cy="4663440"/>
           </a:xfrm>
           <a:prstGeom prst="roundRect">
             <a:avLst>
-              <a:gd name="adj" fmla="val 6667"/>
+              <a:gd name="adj" fmla="val 5333"/>
             </a:avLst>
           </a:prstGeom>
           <a:solidFill>
-            <a:srgbClr val="1E293B"/>
+            <a:srgbClr val="152238"/>
           </a:solidFill>
-          <a:ln w="12700">
+          <a:ln w="19050">
             <a:solidFill>
-              <a:srgbClr val="334155"/>
+              <a:srgbClr val="283852"/>
             </a:solidFill>
             <a:prstDash val="solid"/>
           </a:ln>
@@ -6618,7 +7397,7 @@
         </p:nvSpPr>
         <p:spPr>
           <a:xfrm>
-            <a:off x="960120" y="1920240"/>
+            <a:off x="960120" y="1600200"/>
             <a:ext cx="2971800" cy="411480"/>
           </a:xfrm>
           <a:prstGeom prst="roundRect">
@@ -6627,9 +7406,7 @@
             </a:avLst>
           </a:prstGeom>
           <a:solidFill>
-            <a:srgbClr val="EF4444">
-              <a:alpha val="15000"/>
-            </a:srgbClr>
+            <a:srgbClr val="0D1728"/>
           </a:solidFill>
           <a:ln w="12700">
             <a:solidFill>
@@ -6647,7 +7424,7 @@
         </p:nvSpPr>
         <p:spPr>
           <a:xfrm>
-            <a:off x="1005840" y="1993392"/>
+            <a:off x="1005840" y="1664208"/>
             <a:ext cx="2880360" cy="274320"/>
           </a:xfrm>
           <a:prstGeom prst="rect">
@@ -6664,7 +7441,7 @@
               <a:buNone/>
             </a:pPr>
             <a:r>
-              <a:rPr lang="en-US" sz="1000" b="1" dirty="0">
+              <a:rPr lang="en-US" sz="1050" b="1" dirty="0">
                 <a:solidFill>
                   <a:srgbClr val="EF4444"/>
                 </a:solidFill>
@@ -6674,7 +7451,7 @@
               </a:rPr>
               <a:t>DIM: 1 - 100 Gün</a:t>
             </a:r>
-            <a:endParaRPr lang="en-US" sz="1000" dirty="0"/>
+            <a:endParaRPr lang="en-US" sz="1050" dirty="0"/>
           </a:p>
         </p:txBody>
       </p:sp>
@@ -6686,7 +7463,7 @@
         </p:nvSpPr>
         <p:spPr>
           <a:xfrm>
-            <a:off x="960120" y="2468880"/>
+            <a:off x="960120" y="2148840"/>
             <a:ext cx="2971800" cy="548640"/>
           </a:xfrm>
           <a:prstGeom prst="rect">
@@ -6703,7 +7480,7 @@
               <a:buNone/>
             </a:pPr>
             <a:r>
-              <a:rPr lang="en-US" sz="1400" b="1" dirty="0">
+              <a:rPr lang="en-US" sz="1450" b="1" dirty="0">
                 <a:solidFill>
                   <a:srgbClr val="FFFFFF"/>
                 </a:solidFill>
@@ -6713,7 +7490,7 @@
               </a:rPr>
               <a:t>1. Erken Laktasyon (Pik Dönemi)</a:t>
             </a:r>
-            <a:endParaRPr lang="en-US" sz="1400" dirty="0"/>
+            <a:endParaRPr lang="en-US" sz="1450" dirty="0"/>
           </a:p>
         </p:txBody>
       </p:sp>
@@ -6725,8 +7502,8 @@
         </p:nvSpPr>
         <p:spPr>
           <a:xfrm>
-            <a:off x="960120" y="3108960"/>
-            <a:ext cx="2971800" cy="1371600"/>
+            <a:off x="960120" y="2788920"/>
+            <a:ext cx="2971800" cy="1645920"/>
           </a:xfrm>
           <a:prstGeom prst="rect">
             <a:avLst/>
@@ -6750,7 +7527,7 @@
                 <a:ea typeface="Segoe UI" pitchFamily="34" charset="-122"/>
                 <a:cs typeface="Segoe UI" pitchFamily="34" charset="-120"/>
               </a:rPr>
-              <a:t>Negatif enerji dengesini önlemek için yüksek enerjili yoğun rasyon. Karaciğer ve rumen koruyucu premiksler.</a:t>
+              <a:t>Negatif enerji dengesini önlemek için yüksek enerjili yoğun rasyon. Karaciğer ve rumen koruyucu premiksler ile asidoz kontrolü.</a:t>
             </a:r>
             <a:endParaRPr lang="en-US" sz="1100" dirty="0"/>
           </a:p>
@@ -6764,7 +7541,7 @@
         </p:nvSpPr>
         <p:spPr>
           <a:xfrm>
-            <a:off x="960120" y="4663440"/>
+            <a:off x="960120" y="5212080"/>
             <a:ext cx="2971800" cy="0"/>
           </a:xfrm>
           <a:prstGeom prst="line">
@@ -6773,7 +7550,7 @@
           <a:noFill/>
           <a:ln w="12700">
             <a:solidFill>
-              <a:srgbClr val="334155"/>
+              <a:srgbClr val="233348"/>
             </a:solidFill>
             <a:prstDash val="solid"/>
           </a:ln>
@@ -6787,7 +7564,7 @@
         </p:nvSpPr>
         <p:spPr>
           <a:xfrm>
-            <a:off x="960120" y="4846320"/>
+            <a:off x="960120" y="5394960"/>
             <a:ext cx="2971800" cy="365760"/>
           </a:xfrm>
           <a:prstGeom prst="rect">
@@ -6804,7 +7581,7 @@
               <a:buNone/>
             </a:pPr>
             <a:r>
-              <a:rPr lang="en-US" sz="1000" b="1" dirty="0">
+              <a:rPr lang="en-US" sz="1050" b="1" dirty="0">
                 <a:solidFill>
                   <a:srgbClr val="34D399"/>
                 </a:solidFill>
@@ -6814,7 +7591,7 @@
               </a:rPr>
               <a:t>Grup Bazlı Rasyon Ataması Aktif</a:t>
             </a:r>
-            <a:endParaRPr lang="en-US" sz="1000" dirty="0"/>
+            <a:endParaRPr lang="en-US" sz="1050" dirty="0"/>
           </a:p>
         </p:txBody>
       </p:sp>
@@ -6826,20 +7603,20 @@
         </p:nvSpPr>
         <p:spPr>
           <a:xfrm>
-            <a:off x="4343400" y="1645920"/>
-            <a:ext cx="3429000" cy="4389120"/>
+            <a:off x="4380890" y="1371600"/>
+            <a:ext cx="3429000" cy="4663440"/>
           </a:xfrm>
           <a:prstGeom prst="roundRect">
             <a:avLst>
-              <a:gd name="adj" fmla="val 6667"/>
+              <a:gd name="adj" fmla="val 5333"/>
             </a:avLst>
           </a:prstGeom>
           <a:solidFill>
-            <a:srgbClr val="1E293B"/>
+            <a:srgbClr val="152238"/>
           </a:solidFill>
-          <a:ln w="12700">
+          <a:ln w="19050">
             <a:solidFill>
-              <a:srgbClr val="334155"/>
+              <a:srgbClr val="283852"/>
             </a:solidFill>
             <a:prstDash val="solid"/>
           </a:ln>
@@ -6853,7 +7630,7 @@
         </p:nvSpPr>
         <p:spPr>
           <a:xfrm>
-            <a:off x="4572000" y="1920240"/>
+            <a:off x="4609490" y="1600200"/>
             <a:ext cx="2971800" cy="411480"/>
           </a:xfrm>
           <a:prstGeom prst="roundRect">
@@ -6862,9 +7639,7 @@
             </a:avLst>
           </a:prstGeom>
           <a:solidFill>
-            <a:srgbClr val="38BDF8">
-              <a:alpha val="15000"/>
-            </a:srgbClr>
+            <a:srgbClr val="0D1728"/>
           </a:solidFill>
           <a:ln w="12700">
             <a:solidFill>
@@ -6882,7 +7657,7 @@
         </p:nvSpPr>
         <p:spPr>
           <a:xfrm>
-            <a:off x="4617720" y="1993392"/>
+            <a:off x="4655210" y="1664208"/>
             <a:ext cx="2880360" cy="274320"/>
           </a:xfrm>
           <a:prstGeom prst="rect">
@@ -6899,7 +7674,7 @@
               <a:buNone/>
             </a:pPr>
             <a:r>
-              <a:rPr lang="en-US" sz="1000" b="1" dirty="0">
+              <a:rPr lang="en-US" sz="1050" b="1" dirty="0">
                 <a:solidFill>
                   <a:srgbClr val="38BDF8"/>
                 </a:solidFill>
@@ -6909,7 +7684,7 @@
               </a:rPr>
               <a:t>DIM: 101 - 200 Gün</a:t>
             </a:r>
-            <a:endParaRPr lang="en-US" sz="1000" dirty="0"/>
+            <a:endParaRPr lang="en-US" sz="1050" dirty="0"/>
           </a:p>
         </p:txBody>
       </p:sp>
@@ -6921,7 +7696,7 @@
         </p:nvSpPr>
         <p:spPr>
           <a:xfrm>
-            <a:off x="4572000" y="2468880"/>
+            <a:off x="4609490" y="2148840"/>
             <a:ext cx="2971800" cy="548640"/>
           </a:xfrm>
           <a:prstGeom prst="rect">
@@ -6938,7 +7713,7 @@
               <a:buNone/>
             </a:pPr>
             <a:r>
-              <a:rPr lang="en-US" sz="1400" b="1" dirty="0">
+              <a:rPr lang="en-US" sz="1450" b="1" dirty="0">
                 <a:solidFill>
                   <a:srgbClr val="FFFFFF"/>
                 </a:solidFill>
@@ -6948,7 +7723,7 @@
               </a:rPr>
               <a:t>2. Orta Laktasyon (Plato Dönemi)</a:t>
             </a:r>
-            <a:endParaRPr lang="en-US" sz="1400" dirty="0"/>
+            <a:endParaRPr lang="en-US" sz="1450" dirty="0"/>
           </a:p>
         </p:txBody>
       </p:sp>
@@ -6960,8 +7735,8 @@
         </p:nvSpPr>
         <p:spPr>
           <a:xfrm>
-            <a:off x="4572000" y="3108960"/>
-            <a:ext cx="2971800" cy="1371600"/>
+            <a:off x="4609490" y="2788920"/>
+            <a:ext cx="2971800" cy="1645920"/>
           </a:xfrm>
           <a:prstGeom prst="rect">
             <a:avLst/>
@@ -6985,7 +7760,7 @@
                 <a:ea typeface="Segoe UI" pitchFamily="34" charset="-122"/>
                 <a:cs typeface="Segoe UI" pitchFamily="34" charset="-120"/>
               </a:rPr>
-              <a:t>Dengeli kondisyon skoru muhafazası, süt proteini ve yağını maksimize eden optimum kaba/kesif yem oranı.</a:t>
+              <a:t>Dengeli kondisyon skoru muhafazası, süt proteini ve yağını maksimize eden optimum kaba/kesif yem dengesi.</a:t>
             </a:r>
             <a:endParaRPr lang="en-US" sz="1100" dirty="0"/>
           </a:p>
@@ -6999,7 +7774,7 @@
         </p:nvSpPr>
         <p:spPr>
           <a:xfrm>
-            <a:off x="4572000" y="4663440"/>
+            <a:off x="4609490" y="5212080"/>
             <a:ext cx="2971800" cy="0"/>
           </a:xfrm>
           <a:prstGeom prst="line">
@@ -7008,7 +7783,7 @@
           <a:noFill/>
           <a:ln w="12700">
             <a:solidFill>
-              <a:srgbClr val="334155"/>
+              <a:srgbClr val="233348"/>
             </a:solidFill>
             <a:prstDash val="solid"/>
           </a:ln>
@@ -7022,7 +7797,7 @@
         </p:nvSpPr>
         <p:spPr>
           <a:xfrm>
-            <a:off x="4572000" y="4846320"/>
+            <a:off x="4609490" y="5394960"/>
             <a:ext cx="2971800" cy="365760"/>
           </a:xfrm>
           <a:prstGeom prst="rect">
@@ -7039,7 +7814,7 @@
               <a:buNone/>
             </a:pPr>
             <a:r>
-              <a:rPr lang="en-US" sz="1000" b="1" dirty="0">
+              <a:rPr lang="en-US" sz="1050" b="1" dirty="0">
                 <a:solidFill>
                   <a:srgbClr val="34D399"/>
                 </a:solidFill>
@@ -7049,7 +7824,7 @@
               </a:rPr>
               <a:t>Grup Bazlı Rasyon Ataması Aktif</a:t>
             </a:r>
-            <a:endParaRPr lang="en-US" sz="1000" dirty="0"/>
+            <a:endParaRPr lang="en-US" sz="1050" dirty="0"/>
           </a:p>
         </p:txBody>
       </p:sp>
@@ -7061,20 +7836,20 @@
         </p:nvSpPr>
         <p:spPr>
           <a:xfrm>
-            <a:off x="7955280" y="1645920"/>
-            <a:ext cx="3429000" cy="4389120"/>
+            <a:off x="8030261" y="1371600"/>
+            <a:ext cx="3429000" cy="4663440"/>
           </a:xfrm>
           <a:prstGeom prst="roundRect">
             <a:avLst>
-              <a:gd name="adj" fmla="val 6667"/>
+              <a:gd name="adj" fmla="val 5333"/>
             </a:avLst>
           </a:prstGeom>
           <a:solidFill>
-            <a:srgbClr val="1E293B"/>
+            <a:srgbClr val="152238"/>
           </a:solidFill>
-          <a:ln w="12700">
+          <a:ln w="19050">
             <a:solidFill>
-              <a:srgbClr val="334155"/>
+              <a:srgbClr val="283852"/>
             </a:solidFill>
             <a:prstDash val="solid"/>
           </a:ln>
@@ -7088,7 +7863,7 @@
         </p:nvSpPr>
         <p:spPr>
           <a:xfrm>
-            <a:off x="8183880" y="1920240"/>
+            <a:off x="8258861" y="1600200"/>
             <a:ext cx="2971800" cy="411480"/>
           </a:xfrm>
           <a:prstGeom prst="roundRect">
@@ -7097,9 +7872,7 @@
             </a:avLst>
           </a:prstGeom>
           <a:solidFill>
-            <a:srgbClr val="10B981">
-              <a:alpha val="15000"/>
-            </a:srgbClr>
+            <a:srgbClr val="0D1728"/>
           </a:solidFill>
           <a:ln w="12700">
             <a:solidFill>
@@ -7117,7 +7890,7 @@
         </p:nvSpPr>
         <p:spPr>
           <a:xfrm>
-            <a:off x="8229600" y="1993392"/>
+            <a:off x="8304581" y="1664208"/>
             <a:ext cx="2880360" cy="274320"/>
           </a:xfrm>
           <a:prstGeom prst="rect">
@@ -7134,7 +7907,7 @@
               <a:buNone/>
             </a:pPr>
             <a:r>
-              <a:rPr lang="en-US" sz="1000" b="1" dirty="0">
+              <a:rPr lang="en-US" sz="1050" b="1" dirty="0">
                 <a:solidFill>
                   <a:srgbClr val="10B981"/>
                 </a:solidFill>
@@ -7144,7 +7917,7 @@
               </a:rPr>
               <a:t>DIM: 201+ Gün &amp; Doğuma 60 Gün</a:t>
             </a:r>
-            <a:endParaRPr lang="en-US" sz="1000" dirty="0"/>
+            <a:endParaRPr lang="en-US" sz="1050" dirty="0"/>
           </a:p>
         </p:txBody>
       </p:sp>
@@ -7156,7 +7929,7 @@
         </p:nvSpPr>
         <p:spPr>
           <a:xfrm>
-            <a:off x="8183880" y="2468880"/>
+            <a:off x="8258861" y="2148840"/>
             <a:ext cx="2971800" cy="548640"/>
           </a:xfrm>
           <a:prstGeom prst="rect">
@@ -7173,7 +7946,7 @@
               <a:buNone/>
             </a:pPr>
             <a:r>
-              <a:rPr lang="en-US" sz="1400" b="1" dirty="0">
+              <a:rPr lang="en-US" sz="1450" b="1" dirty="0">
                 <a:solidFill>
                   <a:srgbClr val="FFFFFF"/>
                 </a:solidFill>
@@ -7183,7 +7956,7 @@
               </a:rPr>
               <a:t>3. Geç Laktasyon &amp; Kuru Dönem</a:t>
             </a:r>
-            <a:endParaRPr lang="en-US" sz="1400" dirty="0"/>
+            <a:endParaRPr lang="en-US" sz="1450" dirty="0"/>
           </a:p>
         </p:txBody>
       </p:sp>
@@ -7195,8 +7968,8 @@
         </p:nvSpPr>
         <p:spPr>
           <a:xfrm>
-            <a:off x="8183880" y="3108960"/>
-            <a:ext cx="2971800" cy="1371600"/>
+            <a:off x="8258861" y="2788920"/>
+            <a:ext cx="2971800" cy="1645920"/>
           </a:xfrm>
           <a:prstGeom prst="rect">
             <a:avLst/>
@@ -7220,7 +7993,7 @@
                 <a:ea typeface="Segoe UI" pitchFamily="34" charset="-122"/>
                 <a:cs typeface="Segoe UI" pitchFamily="34" charset="-120"/>
               </a:rPr>
-              <a:t>Yağlanmayı önleyici yüksek lifli rasyon. Doğum felcini (hipokalsemi) engelleyen anyonik tuz stratejileri.</a:t>
+              <a:t>Aşırı yağlanmayı önleyici yüksek lifli rasyon. Doğum felcini (hipokalsemi) engelleyen anyonik besleme stratejileri.</a:t>
             </a:r>
             <a:endParaRPr lang="en-US" sz="1100" dirty="0"/>
           </a:p>
@@ -7234,7 +8007,7 @@
         </p:nvSpPr>
         <p:spPr>
           <a:xfrm>
-            <a:off x="8183880" y="4663440"/>
+            <a:off x="8258861" y="5212080"/>
             <a:ext cx="2971800" cy="0"/>
           </a:xfrm>
           <a:prstGeom prst="line">
@@ -7243,7 +8016,7 @@
           <a:noFill/>
           <a:ln w="12700">
             <a:solidFill>
-              <a:srgbClr val="334155"/>
+              <a:srgbClr val="233348"/>
             </a:solidFill>
             <a:prstDash val="solid"/>
           </a:ln>
@@ -7257,7 +8030,7 @@
         </p:nvSpPr>
         <p:spPr>
           <a:xfrm>
-            <a:off x="8183880" y="4846320"/>
+            <a:off x="8258861" y="5394960"/>
             <a:ext cx="2971800" cy="365760"/>
           </a:xfrm>
           <a:prstGeom prst="rect">
@@ -7274,7 +8047,7 @@
               <a:buNone/>
             </a:pPr>
             <a:r>
-              <a:rPr lang="en-US" sz="1000" b="1" dirty="0">
+              <a:rPr lang="en-US" sz="1050" b="1" dirty="0">
                 <a:solidFill>
                   <a:srgbClr val="34D399"/>
                 </a:solidFill>
@@ -7284,7 +8057,7 @@
               </a:rPr>
               <a:t>Grup Bazlı Rasyon Ataması Aktif</a:t>
             </a:r>
-            <a:endParaRPr lang="en-US" sz="1000" dirty="0"/>
+            <a:endParaRPr lang="en-US" sz="1050" dirty="0"/>
           </a:p>
         </p:txBody>
       </p:sp>
@@ -7296,8 +8069,8 @@
         </p:nvSpPr>
         <p:spPr>
           <a:xfrm>
-            <a:off x="731520" y="6400800"/>
-            <a:ext cx="10698480" cy="0"/>
+            <a:off x="731520" y="6263640"/>
+            <a:ext cx="10728655" cy="0"/>
           </a:xfrm>
           <a:prstGeom prst="line">
             <a:avLst/>
@@ -7305,7 +8078,7 @@
           <a:noFill/>
           <a:ln w="12700">
             <a:solidFill>
-              <a:srgbClr val="1E293B"/>
+              <a:srgbClr val="233348"/>
             </a:solidFill>
             <a:prstDash val="solid"/>
           </a:ln>
@@ -7319,7 +8092,7 @@
         </p:nvSpPr>
         <p:spPr>
           <a:xfrm>
-            <a:off x="731520" y="6446520"/>
+            <a:off x="731520" y="6327648"/>
             <a:ext cx="5486400" cy="320040"/>
           </a:xfrm>
           <a:prstGeom prst="rect">
@@ -7358,8 +8131,8 @@
         </p:nvSpPr>
         <p:spPr>
           <a:xfrm>
-            <a:off x="6217920" y="6446520"/>
-            <a:ext cx="5212080" cy="320040"/>
+            <a:off x="6217920" y="6327648"/>
+            <a:ext cx="5242255" cy="320040"/>
           </a:xfrm>
           <a:prstGeom prst="rect">
             <a:avLst/>
@@ -7429,24 +8202,24 @@
         </p:nvSpPr>
         <p:spPr>
           <a:xfrm>
-            <a:off x="731520" y="548640"/>
-            <a:ext cx="9144000" cy="274320"/>
-          </a:xfrm>
-          <a:prstGeom prst="rect">
-            <a:avLst/>
-          </a:prstGeom>
-          <a:noFill/>
-          <a:ln/>
-        </p:spPr>
-        <p:txBody>
-          <a:bodyPr wrap="square" rtlCol="0" anchor="ctr"/>
-          <a:lstStyle/>
-          <a:p>
-            <a:pPr indent="0" marL="0">
-              <a:buNone/>
-            </a:pPr>
-            <a:r>
-              <a:rPr lang="en-US" sz="1100" b="1" dirty="0">
+            <a:off x="731520" y="411480"/>
+            <a:ext cx="10728655" cy="274320"/>
+          </a:xfrm>
+          <a:prstGeom prst="rect">
+            <a:avLst/>
+          </a:prstGeom>
+          <a:noFill/>
+          <a:ln/>
+        </p:spPr>
+        <p:txBody>
+          <a:bodyPr wrap="square" rtlCol="0" anchor="ctr"/>
+          <a:lstStyle/>
+          <a:p>
+            <a:pPr indent="0" marL="0">
+              <a:buNone/>
+            </a:pPr>
+            <a:r>
+              <a:rPr lang="en-US" sz="1050" b="1" spc="150" kern="0" dirty="0">
                 <a:solidFill>
                   <a:srgbClr val="34D399"/>
                 </a:solidFill>
@@ -7454,9 +8227,9 @@
                 <a:ea typeface="Segoe UI" pitchFamily="34" charset="-122"/>
                 <a:cs typeface="Segoe UI" pitchFamily="34" charset="-120"/>
               </a:rPr>
-              <a:t>BÜTÇE &amp; GİDER MODÜLÜ</a:t>
-            </a:r>
-            <a:endParaRPr lang="en-US" sz="1100" dirty="0"/>
+              <a:t>BÜTÇE &amp; GIDER MODÜLÜ</a:t>
+            </a:r>
+            <a:endParaRPr lang="en-US" sz="1050" dirty="0"/>
           </a:p>
         </p:txBody>
       </p:sp>
@@ -7468,24 +8241,24 @@
         </p:nvSpPr>
         <p:spPr>
           <a:xfrm>
-            <a:off x="731520" y="822960"/>
-            <a:ext cx="9144000" cy="548640"/>
-          </a:xfrm>
-          <a:prstGeom prst="rect">
-            <a:avLst/>
-          </a:prstGeom>
-          <a:noFill/>
-          <a:ln/>
-        </p:spPr>
-        <p:txBody>
-          <a:bodyPr wrap="square" rtlCol="0" anchor="ctr"/>
-          <a:lstStyle/>
-          <a:p>
-            <a:pPr indent="0" marL="0">
-              <a:buNone/>
-            </a:pPr>
-            <a:r>
-              <a:rPr lang="en-US" sz="2600" b="1" dirty="0">
+            <a:off x="731520" y="685800"/>
+            <a:ext cx="10728655" cy="548640"/>
+          </a:xfrm>
+          <a:prstGeom prst="rect">
+            <a:avLst/>
+          </a:prstGeom>
+          <a:noFill/>
+          <a:ln/>
+        </p:spPr>
+        <p:txBody>
+          <a:bodyPr wrap="square" rtlCol="0" anchor="ctr"/>
+          <a:lstStyle/>
+          <a:p>
+            <a:pPr indent="0" marL="0">
+              <a:buNone/>
+            </a:pPr>
+            <a:r>
+              <a:rPr lang="en-US" sz="2400" b="1" dirty="0">
                 <a:solidFill>
                   <a:srgbClr val="FFFFFF"/>
                 </a:solidFill>
@@ -7495,7 +8268,7 @@
               </a:rPr>
               <a:t>Görünmeyen Maliyetleri Görünür Kılın</a:t>
             </a:r>
-            <a:endParaRPr lang="en-US" sz="2600" dirty="0"/>
+            <a:endParaRPr lang="en-US" sz="2400" dirty="0"/>
           </a:p>
         </p:txBody>
       </p:sp>
@@ -7507,20 +8280,20 @@
         </p:nvSpPr>
         <p:spPr>
           <a:xfrm>
-            <a:off x="731520" y="1645920"/>
-            <a:ext cx="5120640" cy="4389120"/>
+            <a:off x="731520" y="1371600"/>
+            <a:ext cx="5166360" cy="4663440"/>
           </a:xfrm>
           <a:prstGeom prst="roundRect">
             <a:avLst>
-              <a:gd name="adj" fmla="val 5208"/>
+              <a:gd name="adj" fmla="val 3922"/>
             </a:avLst>
           </a:prstGeom>
           <a:solidFill>
-            <a:srgbClr val="1E293B"/>
+            <a:srgbClr val="152238"/>
           </a:solidFill>
-          <a:ln w="12700">
+          <a:ln w="19050">
             <a:solidFill>
-              <a:srgbClr val="334155"/>
+              <a:srgbClr val="283852"/>
             </a:solidFill>
             <a:prstDash val="solid"/>
           </a:ln>
@@ -7534,24 +8307,24 @@
         </p:nvSpPr>
         <p:spPr>
           <a:xfrm>
-            <a:off x="1005840" y="1920240"/>
-            <a:ext cx="4572000" cy="365760"/>
-          </a:xfrm>
-          <a:prstGeom prst="rect">
-            <a:avLst/>
-          </a:prstGeom>
-          <a:noFill/>
-          <a:ln/>
-        </p:spPr>
-        <p:txBody>
-          <a:bodyPr wrap="square" rtlCol="0" anchor="ctr"/>
-          <a:lstStyle/>
-          <a:p>
-            <a:pPr indent="0" marL="0">
-              <a:buNone/>
-            </a:pPr>
-            <a:r>
-              <a:rPr lang="en-US" sz="1500" b="1" dirty="0">
+            <a:off x="1005840" y="1600200"/>
+            <a:ext cx="4617720" cy="365760"/>
+          </a:xfrm>
+          <a:prstGeom prst="rect">
+            <a:avLst/>
+          </a:prstGeom>
+          <a:noFill/>
+          <a:ln/>
+        </p:spPr>
+        <p:txBody>
+          <a:bodyPr wrap="square" rtlCol="0" anchor="ctr"/>
+          <a:lstStyle/>
+          <a:p>
+            <a:pPr indent="0" marL="0">
+              <a:buNone/>
+            </a:pPr>
+            <a:r>
+              <a:rPr lang="en-US" sz="1600" b="1" dirty="0">
                 <a:solidFill>
                   <a:srgbClr val="34D399"/>
                 </a:solidFill>
@@ -7561,7 +8334,7 @@
               </a:rPr>
               <a:t>Kapsamlı Gider Kategorileri</a:t>
             </a:r>
-            <a:endParaRPr lang="en-US" sz="1500" dirty="0"/>
+            <a:endParaRPr lang="en-US" sz="1600" dirty="0"/>
           </a:p>
         </p:txBody>
       </p:sp>
@@ -7573,24 +8346,24 @@
         </p:nvSpPr>
         <p:spPr>
           <a:xfrm>
-            <a:off x="1005840" y="2423160"/>
-            <a:ext cx="4572000" cy="274320"/>
-          </a:xfrm>
-          <a:prstGeom prst="rect">
-            <a:avLst/>
-          </a:prstGeom>
-          <a:noFill/>
-          <a:ln/>
-        </p:spPr>
-        <p:txBody>
-          <a:bodyPr wrap="square" rtlCol="0" anchor="ctr"/>
-          <a:lstStyle/>
-          <a:p>
-            <a:pPr indent="0" marL="0">
-              <a:buNone/>
-            </a:pPr>
-            <a:r>
-              <a:rPr lang="en-US" sz="1200" b="1" dirty="0">
+            <a:off x="1005840" y="2103120"/>
+            <a:ext cx="4617720" cy="274320"/>
+          </a:xfrm>
+          <a:prstGeom prst="rect">
+            <a:avLst/>
+          </a:prstGeom>
+          <a:noFill/>
+          <a:ln/>
+        </p:spPr>
+        <p:txBody>
+          <a:bodyPr wrap="square" rtlCol="0" anchor="ctr"/>
+          <a:lstStyle/>
+          <a:p>
+            <a:pPr indent="0" marL="0">
+              <a:buNone/>
+            </a:pPr>
+            <a:r>
+              <a:rPr lang="en-US" sz="1250" b="1" dirty="0">
                 <a:solidFill>
                   <a:srgbClr val="FFFFFF"/>
                 </a:solidFill>
@@ -7600,7 +8373,7 @@
               </a:rPr>
               <a:t>📌 Veteriner &amp; Sağlık</a:t>
             </a:r>
-            <a:endParaRPr lang="en-US" sz="1200" dirty="0"/>
+            <a:endParaRPr lang="en-US" sz="1250" dirty="0"/>
           </a:p>
         </p:txBody>
       </p:sp>
@@ -7612,24 +8385,24 @@
         </p:nvSpPr>
         <p:spPr>
           <a:xfrm>
-            <a:off x="1280160" y="2724912"/>
-            <a:ext cx="4297680" cy="457200"/>
-          </a:xfrm>
-          <a:prstGeom prst="rect">
-            <a:avLst/>
-          </a:prstGeom>
-          <a:noFill/>
-          <a:ln/>
-        </p:spPr>
-        <p:txBody>
-          <a:bodyPr wrap="square" rtlCol="0" anchor="ctr"/>
-          <a:lstStyle/>
-          <a:p>
-            <a:pPr indent="0" marL="0">
-              <a:buNone/>
-            </a:pPr>
-            <a:r>
-              <a:rPr lang="en-US" sz="1000" dirty="0">
+            <a:off x="1280160" y="2423160"/>
+            <a:ext cx="4343400" cy="457200"/>
+          </a:xfrm>
+          <a:prstGeom prst="rect">
+            <a:avLst/>
+          </a:prstGeom>
+          <a:noFill/>
+          <a:ln/>
+        </p:spPr>
+        <p:txBody>
+          <a:bodyPr wrap="square" rtlCol="0" anchor="ctr"/>
+          <a:lstStyle/>
+          <a:p>
+            <a:pPr indent="0" marL="0">
+              <a:buNone/>
+            </a:pPr>
+            <a:r>
+              <a:rPr lang="en-US" sz="1050" dirty="0">
                 <a:solidFill>
                   <a:srgbClr val="94A3B8"/>
                 </a:solidFill>
@@ -7639,7 +8412,7 @@
               </a:rPr>
               <a:t>Aşılar, tohumlama, tırnak bakımı ve ilaç masrafları</a:t>
             </a:r>
-            <a:endParaRPr lang="en-US" sz="1000" dirty="0"/>
+            <a:endParaRPr lang="en-US" sz="1050" dirty="0"/>
           </a:p>
         </p:txBody>
       </p:sp>
@@ -7651,24 +8424,24 @@
         </p:nvSpPr>
         <p:spPr>
           <a:xfrm>
-            <a:off x="1005840" y="3291840"/>
-            <a:ext cx="4572000" cy="274320"/>
-          </a:xfrm>
-          <a:prstGeom prst="rect">
-            <a:avLst/>
-          </a:prstGeom>
-          <a:noFill/>
-          <a:ln/>
-        </p:spPr>
-        <p:txBody>
-          <a:bodyPr wrap="square" rtlCol="0" anchor="ctr"/>
-          <a:lstStyle/>
-          <a:p>
-            <a:pPr indent="0" marL="0">
-              <a:buNone/>
-            </a:pPr>
-            <a:r>
-              <a:rPr lang="en-US" sz="1200" b="1" dirty="0">
+            <a:off x="1005840" y="3017520"/>
+            <a:ext cx="4617720" cy="274320"/>
+          </a:xfrm>
+          <a:prstGeom prst="rect">
+            <a:avLst/>
+          </a:prstGeom>
+          <a:noFill/>
+          <a:ln/>
+        </p:spPr>
+        <p:txBody>
+          <a:bodyPr wrap="square" rtlCol="0" anchor="ctr"/>
+          <a:lstStyle/>
+          <a:p>
+            <a:pPr indent="0" marL="0">
+              <a:buNone/>
+            </a:pPr>
+            <a:r>
+              <a:rPr lang="en-US" sz="1250" b="1" dirty="0">
                 <a:solidFill>
                   <a:srgbClr val="FFFFFF"/>
                 </a:solidFill>
@@ -7678,7 +8451,7 @@
               </a:rPr>
               <a:t>📌 İşçilik &amp; Personel</a:t>
             </a:r>
-            <a:endParaRPr lang="en-US" sz="1200" dirty="0"/>
+            <a:endParaRPr lang="en-US" sz="1250" dirty="0"/>
           </a:p>
         </p:txBody>
       </p:sp>
@@ -7690,24 +8463,24 @@
         </p:nvSpPr>
         <p:spPr>
           <a:xfrm>
-            <a:off x="1280160" y="3593592"/>
-            <a:ext cx="4297680" cy="457200"/>
-          </a:xfrm>
-          <a:prstGeom prst="rect">
-            <a:avLst/>
-          </a:prstGeom>
-          <a:noFill/>
-          <a:ln/>
-        </p:spPr>
-        <p:txBody>
-          <a:bodyPr wrap="square" rtlCol="0" anchor="ctr"/>
-          <a:lstStyle/>
-          <a:p>
-            <a:pPr indent="0" marL="0">
-              <a:buNone/>
-            </a:pPr>
-            <a:r>
-              <a:rPr lang="en-US" sz="1000" dirty="0">
+            <a:off x="1280160" y="3337560"/>
+            <a:ext cx="4343400" cy="457200"/>
+          </a:xfrm>
+          <a:prstGeom prst="rect">
+            <a:avLst/>
+          </a:prstGeom>
+          <a:noFill/>
+          <a:ln/>
+        </p:spPr>
+        <p:txBody>
+          <a:bodyPr wrap="square" rtlCol="0" anchor="ctr"/>
+          <a:lstStyle/>
+          <a:p>
+            <a:pPr indent="0" marL="0">
+              <a:buNone/>
+            </a:pPr>
+            <a:r>
+              <a:rPr lang="en-US" sz="1050" dirty="0">
                 <a:solidFill>
                   <a:srgbClr val="94A3B8"/>
                 </a:solidFill>
@@ -7717,7 +8490,7 @@
               </a:rPr>
               <a:t>Sağımcı, bakıcı maaşları ve SGK primleri</a:t>
             </a:r>
-            <a:endParaRPr lang="en-US" sz="1000" dirty="0"/>
+            <a:endParaRPr lang="en-US" sz="1050" dirty="0"/>
           </a:p>
         </p:txBody>
       </p:sp>
@@ -7729,24 +8502,24 @@
         </p:nvSpPr>
         <p:spPr>
           <a:xfrm>
-            <a:off x="1005840" y="4160520"/>
-            <a:ext cx="4572000" cy="274320"/>
-          </a:xfrm>
-          <a:prstGeom prst="rect">
-            <a:avLst/>
-          </a:prstGeom>
-          <a:noFill/>
-          <a:ln/>
-        </p:spPr>
-        <p:txBody>
-          <a:bodyPr wrap="square" rtlCol="0" anchor="ctr"/>
-          <a:lstStyle/>
-          <a:p>
-            <a:pPr indent="0" marL="0">
-              <a:buNone/>
-            </a:pPr>
-            <a:r>
-              <a:rPr lang="en-US" sz="1200" b="1" dirty="0">
+            <a:off x="1005840" y="3931920"/>
+            <a:ext cx="4617720" cy="274320"/>
+          </a:xfrm>
+          <a:prstGeom prst="rect">
+            <a:avLst/>
+          </a:prstGeom>
+          <a:noFill/>
+          <a:ln/>
+        </p:spPr>
+        <p:txBody>
+          <a:bodyPr wrap="square" rtlCol="0" anchor="ctr"/>
+          <a:lstStyle/>
+          <a:p>
+            <a:pPr indent="0" marL="0">
+              <a:buNone/>
+            </a:pPr>
+            <a:r>
+              <a:rPr lang="en-US" sz="1250" b="1" dirty="0">
                 <a:solidFill>
                   <a:srgbClr val="FFFFFF"/>
                 </a:solidFill>
@@ -7756,7 +8529,7 @@
               </a:rPr>
               <a:t>📌 Enerji &amp; Yakıt</a:t>
             </a:r>
-            <a:endParaRPr lang="en-US" sz="1200" dirty="0"/>
+            <a:endParaRPr lang="en-US" sz="1250" dirty="0"/>
           </a:p>
         </p:txBody>
       </p:sp>
@@ -7768,24 +8541,24 @@
         </p:nvSpPr>
         <p:spPr>
           <a:xfrm>
-            <a:off x="1280160" y="4462272"/>
-            <a:ext cx="4297680" cy="457200"/>
-          </a:xfrm>
-          <a:prstGeom prst="rect">
-            <a:avLst/>
-          </a:prstGeom>
-          <a:noFill/>
-          <a:ln/>
-        </p:spPr>
-        <p:txBody>
-          <a:bodyPr wrap="square" rtlCol="0" anchor="ctr"/>
-          <a:lstStyle/>
-          <a:p>
-            <a:pPr indent="0" marL="0">
-              <a:buNone/>
-            </a:pPr>
-            <a:r>
-              <a:rPr lang="en-US" sz="1000" dirty="0">
+            <a:off x="1280160" y="4251960"/>
+            <a:ext cx="4343400" cy="457200"/>
+          </a:xfrm>
+          <a:prstGeom prst="rect">
+            <a:avLst/>
+          </a:prstGeom>
+          <a:noFill/>
+          <a:ln/>
+        </p:spPr>
+        <p:txBody>
+          <a:bodyPr wrap="square" rtlCol="0" anchor="ctr"/>
+          <a:lstStyle/>
+          <a:p>
+            <a:pPr indent="0" marL="0">
+              <a:buNone/>
+            </a:pPr>
+            <a:r>
+              <a:rPr lang="en-US" sz="1050" dirty="0">
                 <a:solidFill>
                   <a:srgbClr val="94A3B8"/>
                 </a:solidFill>
@@ -7795,7 +8568,7 @@
               </a:rPr>
               <a:t>Elektrik, jeneratör yakıtı ve traktör mazotu</a:t>
             </a:r>
-            <a:endParaRPr lang="en-US" sz="1000" dirty="0"/>
+            <a:endParaRPr lang="en-US" sz="1050" dirty="0"/>
           </a:p>
         </p:txBody>
       </p:sp>
@@ -7807,24 +8580,24 @@
         </p:nvSpPr>
         <p:spPr>
           <a:xfrm>
-            <a:off x="1005840" y="5029200"/>
-            <a:ext cx="4572000" cy="274320"/>
-          </a:xfrm>
-          <a:prstGeom prst="rect">
-            <a:avLst/>
-          </a:prstGeom>
-          <a:noFill/>
-          <a:ln/>
-        </p:spPr>
-        <p:txBody>
-          <a:bodyPr wrap="square" rtlCol="0" anchor="ctr"/>
-          <a:lstStyle/>
-          <a:p>
-            <a:pPr indent="0" marL="0">
-              <a:buNone/>
-            </a:pPr>
-            <a:r>
-              <a:rPr lang="en-US" sz="1200" b="1" dirty="0">
+            <a:off x="1005840" y="4846320"/>
+            <a:ext cx="4617720" cy="274320"/>
+          </a:xfrm>
+          <a:prstGeom prst="rect">
+            <a:avLst/>
+          </a:prstGeom>
+          <a:noFill/>
+          <a:ln/>
+        </p:spPr>
+        <p:txBody>
+          <a:bodyPr wrap="square" rtlCol="0" anchor="ctr"/>
+          <a:lstStyle/>
+          <a:p>
+            <a:pPr indent="0" marL="0">
+              <a:buNone/>
+            </a:pPr>
+            <a:r>
+              <a:rPr lang="en-US" sz="1250" b="1" dirty="0">
                 <a:solidFill>
                   <a:srgbClr val="FFFFFF"/>
                 </a:solidFill>
@@ -7834,7 +8607,7 @@
               </a:rPr>
               <a:t>📌 Bakım &amp; Amortisman</a:t>
             </a:r>
-            <a:endParaRPr lang="en-US" sz="1200" dirty="0"/>
+            <a:endParaRPr lang="en-US" sz="1250" dirty="0"/>
           </a:p>
         </p:txBody>
       </p:sp>
@@ -7846,24 +8619,24 @@
         </p:nvSpPr>
         <p:spPr>
           <a:xfrm>
-            <a:off x="1280160" y="5330952"/>
-            <a:ext cx="4297680" cy="457200"/>
-          </a:xfrm>
-          <a:prstGeom prst="rect">
-            <a:avLst/>
-          </a:prstGeom>
-          <a:noFill/>
-          <a:ln/>
-        </p:spPr>
-        <p:txBody>
-          <a:bodyPr wrap="square" rtlCol="0" anchor="ctr"/>
-          <a:lstStyle/>
-          <a:p>
-            <a:pPr indent="0" marL="0">
-              <a:buNone/>
-            </a:pPr>
-            <a:r>
-              <a:rPr lang="en-US" sz="1000" dirty="0">
+            <a:off x="1280160" y="5166360"/>
+            <a:ext cx="4343400" cy="457200"/>
+          </a:xfrm>
+          <a:prstGeom prst="rect">
+            <a:avLst/>
+          </a:prstGeom>
+          <a:noFill/>
+          <a:ln/>
+        </p:spPr>
+        <p:txBody>
+          <a:bodyPr wrap="square" rtlCol="0" anchor="ctr"/>
+          <a:lstStyle/>
+          <a:p>
+            <a:pPr indent="0" marL="0">
+              <a:buNone/>
+            </a:pPr>
+            <a:r>
+              <a:rPr lang="en-US" sz="1050" dirty="0">
                 <a:solidFill>
                   <a:srgbClr val="94A3B8"/>
                 </a:solidFill>
@@ -7873,7 +8646,7 @@
               </a:rPr>
               <a:t>Sağımhane revizyonu, yem karma makinesi amortismanı</a:t>
             </a:r>
-            <a:endParaRPr lang="en-US" sz="1000" dirty="0"/>
+            <a:endParaRPr lang="en-US" sz="1050" dirty="0"/>
           </a:p>
         </p:txBody>
       </p:sp>
@@ -7885,16 +8658,16 @@
         </p:nvSpPr>
         <p:spPr>
           <a:xfrm>
-            <a:off x="6217920" y="1645920"/>
-            <a:ext cx="5120640" cy="4389120"/>
+            <a:off x="6293815" y="1371600"/>
+            <a:ext cx="5166360" cy="4663440"/>
           </a:xfrm>
           <a:prstGeom prst="roundRect">
             <a:avLst>
-              <a:gd name="adj" fmla="val 5208"/>
+              <a:gd name="adj" fmla="val 3922"/>
             </a:avLst>
           </a:prstGeom>
           <a:solidFill>
-            <a:srgbClr val="1E293B"/>
+            <a:srgbClr val="152238"/>
           </a:solidFill>
           <a:ln w="19050">
             <a:solidFill>
@@ -7912,26 +8685,26 @@
         </p:nvSpPr>
         <p:spPr>
           <a:xfrm>
-            <a:off x="6492240" y="1920240"/>
-            <a:ext cx="4572000" cy="365760"/>
-          </a:xfrm>
-          <a:prstGeom prst="rect">
-            <a:avLst/>
-          </a:prstGeom>
-          <a:noFill/>
-          <a:ln/>
-        </p:spPr>
-        <p:txBody>
-          <a:bodyPr wrap="square" rtlCol="0" anchor="ctr"/>
-          <a:lstStyle/>
-          <a:p>
-            <a:pPr indent="0" marL="0">
-              <a:buNone/>
-            </a:pPr>
-            <a:r>
-              <a:rPr lang="en-US" sz="1500" b="1" dirty="0">
-                <a:solidFill>
-                  <a:srgbClr val="38BDF8"/>
+            <a:off x="6568135" y="1600200"/>
+            <a:ext cx="4617720" cy="365760"/>
+          </a:xfrm>
+          <a:prstGeom prst="rect">
+            <a:avLst/>
+          </a:prstGeom>
+          <a:noFill/>
+          <a:ln/>
+        </p:spPr>
+        <p:txBody>
+          <a:bodyPr wrap="square" rtlCol="0" anchor="ctr"/>
+          <a:lstStyle/>
+          <a:p>
+            <a:pPr indent="0" marL="0">
+              <a:buNone/>
+            </a:pPr>
+            <a:r>
+              <a:rPr lang="en-US" sz="1600" b="1" dirty="0">
+                <a:solidFill>
+                  <a:srgbClr val="7DD3FC"/>
                 </a:solidFill>
                 <a:latin typeface="Segoe UI" pitchFamily="34" charset="0"/>
                 <a:ea typeface="Segoe UI" pitchFamily="34" charset="-122"/>
@@ -7939,7 +8712,7 @@
               </a:rPr>
               <a:t>1 Litre Sütün Gerçek Maliyeti Formülü</a:t>
             </a:r>
-            <a:endParaRPr lang="en-US" sz="1500" dirty="0"/>
+            <a:endParaRPr lang="en-US" sz="1600" dirty="0"/>
           </a:p>
         </p:txBody>
       </p:sp>
@@ -7951,20 +8724,20 @@
         </p:nvSpPr>
         <p:spPr>
           <a:xfrm>
-            <a:off x="6492240" y="2423160"/>
-            <a:ext cx="4572000" cy="914400"/>
+            <a:off x="6568135" y="2103120"/>
+            <a:ext cx="4617720" cy="914400"/>
           </a:xfrm>
           <a:prstGeom prst="roundRect">
             <a:avLst>
-              <a:gd name="adj" fmla="val 15000"/>
+              <a:gd name="adj" fmla="val 12000"/>
             </a:avLst>
           </a:prstGeom>
           <a:solidFill>
-            <a:srgbClr val="0F172A"/>
+            <a:srgbClr val="0D1728"/>
           </a:solidFill>
           <a:ln w="12700">
             <a:solidFill>
-              <a:srgbClr val="334155"/>
+              <a:srgbClr val="233348"/>
             </a:solidFill>
             <a:prstDash val="solid"/>
           </a:ln>
@@ -7978,8 +8751,8 @@
         </p:nvSpPr>
         <p:spPr>
           <a:xfrm>
-            <a:off x="6583680" y="2651760"/>
-            <a:ext cx="4389120" cy="457200"/>
+            <a:off x="6659575" y="2331720"/>
+            <a:ext cx="4434840" cy="457200"/>
           </a:xfrm>
           <a:prstGeom prst="rect">
             <a:avLst/>
@@ -8017,8 +8790,8 @@
         </p:nvSpPr>
         <p:spPr>
           <a:xfrm>
-            <a:off x="6492240" y="3566160"/>
-            <a:ext cx="4572000" cy="594360"/>
+            <a:off x="6568135" y="3337560"/>
+            <a:ext cx="4617720" cy="685800"/>
           </a:xfrm>
           <a:prstGeom prst="rect">
             <a:avLst/>
@@ -8042,7 +8815,7 @@
                 <a:ea typeface="Segoe UI" pitchFamily="34" charset="-122"/>
                 <a:cs typeface="Segoe UI" pitchFamily="34" charset="-120"/>
               </a:rPr>
-              <a:t>✔ Yalnızca yem değil, işletmenin tüm operasyonel yükü tek bir ekranda toplanır.</a:t>
+              <a:t>✔ Yalnızca yem değil, işletmenin tüm operasyonel gider yükü tek bir ekranda toplanır.</a:t>
             </a:r>
             <a:endParaRPr lang="en-US" sz="1100" dirty="0"/>
           </a:p>
@@ -8056,8 +8829,8 @@
         </p:nvSpPr>
         <p:spPr>
           <a:xfrm>
-            <a:off x="6492240" y="4251960"/>
-            <a:ext cx="4572000" cy="594360"/>
+            <a:off x="6568135" y="4160520"/>
+            <a:ext cx="4617720" cy="685800"/>
           </a:xfrm>
           <a:prstGeom prst="rect">
             <a:avLst/>
@@ -8081,7 +8854,7 @@
                 <a:ea typeface="Segoe UI" pitchFamily="34" charset="-122"/>
                 <a:cs typeface="Segoe UI" pitchFamily="34" charset="-120"/>
               </a:rPr>
-              <a:t>✔ Aylık gider raporları ve kategorik pasta grafiklerle bütçe kaçakları engellenir.</a:t>
+              <a:t>✔ Aylık gider raporları ve kategorik grafiklerle bütçe kaçakları anında engellenir.</a:t>
             </a:r>
             <a:endParaRPr lang="en-US" sz="1100" dirty="0"/>
           </a:p>
@@ -8095,8 +8868,8 @@
         </p:nvSpPr>
         <p:spPr>
           <a:xfrm>
-            <a:off x="6492240" y="4937760"/>
-            <a:ext cx="4572000" cy="594360"/>
+            <a:off x="6568135" y="4983480"/>
+            <a:ext cx="4617720" cy="685800"/>
           </a:xfrm>
           <a:prstGeom prst="rect">
             <a:avLst/>
@@ -8134,8 +8907,8 @@
         </p:nvSpPr>
         <p:spPr>
           <a:xfrm>
-            <a:off x="731520" y="6400800"/>
-            <a:ext cx="10698480" cy="0"/>
+            <a:off x="731520" y="6263640"/>
+            <a:ext cx="10728655" cy="0"/>
           </a:xfrm>
           <a:prstGeom prst="line">
             <a:avLst/>
@@ -8143,7 +8916,7 @@
           <a:noFill/>
           <a:ln w="12700">
             <a:solidFill>
-              <a:srgbClr val="1E293B"/>
+              <a:srgbClr val="233348"/>
             </a:solidFill>
             <a:prstDash val="solid"/>
           </a:ln>
@@ -8157,7 +8930,7 @@
         </p:nvSpPr>
         <p:spPr>
           <a:xfrm>
-            <a:off x="731520" y="6446520"/>
+            <a:off x="731520" y="6327648"/>
             <a:ext cx="5486400" cy="320040"/>
           </a:xfrm>
           <a:prstGeom prst="rect">
@@ -8196,8 +8969,8 @@
         </p:nvSpPr>
         <p:spPr>
           <a:xfrm>
-            <a:off x="6217920" y="6446520"/>
-            <a:ext cx="5212080" cy="320040"/>
+            <a:off x="6217920" y="6327648"/>
+            <a:ext cx="5242255" cy="320040"/>
           </a:xfrm>
           <a:prstGeom prst="rect">
             <a:avLst/>
@@ -8267,24 +9040,24 @@
         </p:nvSpPr>
         <p:spPr>
           <a:xfrm>
-            <a:off x="731520" y="548640"/>
-            <a:ext cx="9144000" cy="274320"/>
-          </a:xfrm>
-          <a:prstGeom prst="rect">
-            <a:avLst/>
-          </a:prstGeom>
-          <a:noFill/>
-          <a:ln/>
-        </p:spPr>
-        <p:txBody>
-          <a:bodyPr wrap="square" rtlCol="0" anchor="ctr"/>
-          <a:lstStyle/>
-          <a:p>
-            <a:pPr indent="0" marL="0">
-              <a:buNone/>
-            </a:pPr>
-            <a:r>
-              <a:rPr lang="en-US" sz="1100" b="1" dirty="0">
+            <a:off x="731520" y="411480"/>
+            <a:ext cx="10728655" cy="274320"/>
+          </a:xfrm>
+          <a:prstGeom prst="rect">
+            <a:avLst/>
+          </a:prstGeom>
+          <a:noFill/>
+          <a:ln/>
+        </p:spPr>
+        <p:txBody>
+          <a:bodyPr wrap="square" rtlCol="0" anchor="ctr"/>
+          <a:lstStyle/>
+          <a:p>
+            <a:pPr indent="0" marL="0">
+              <a:buNone/>
+            </a:pPr>
+            <a:r>
+              <a:rPr lang="en-US" sz="1050" b="1" spc="150" kern="0" dirty="0">
                 <a:solidFill>
                   <a:srgbClr val="34D399"/>
                 </a:solidFill>
@@ -8292,9 +9065,9 @@
                 <a:ea typeface="Segoe UI" pitchFamily="34" charset="-122"/>
                 <a:cs typeface="Segoe UI" pitchFamily="34" charset="-120"/>
               </a:rPr>
-              <a:t>GÜVENLİK &amp; DENETİM ALTYAPISI</a:t>
-            </a:r>
-            <a:endParaRPr lang="en-US" sz="1100" dirty="0"/>
+              <a:t>GÜVENLIK &amp; DENETIM ALTYAPISI</a:t>
+            </a:r>
+            <a:endParaRPr lang="en-US" sz="1050" dirty="0"/>
           </a:p>
         </p:txBody>
       </p:sp>
@@ -8306,24 +9079,24 @@
         </p:nvSpPr>
         <p:spPr>
           <a:xfrm>
-            <a:off x="731520" y="822960"/>
-            <a:ext cx="9144000" cy="548640"/>
-          </a:xfrm>
-          <a:prstGeom prst="rect">
-            <a:avLst/>
-          </a:prstGeom>
-          <a:noFill/>
-          <a:ln/>
-        </p:spPr>
-        <p:txBody>
-          <a:bodyPr wrap="square" rtlCol="0" anchor="ctr"/>
-          <a:lstStyle/>
-          <a:p>
-            <a:pPr indent="0" marL="0">
-              <a:buNone/>
-            </a:pPr>
-            <a:r>
-              <a:rPr lang="en-US" sz="2600" b="1" dirty="0">
+            <a:off x="731520" y="685800"/>
+            <a:ext cx="10728655" cy="548640"/>
+          </a:xfrm>
+          <a:prstGeom prst="rect">
+            <a:avLst/>
+          </a:prstGeom>
+          <a:noFill/>
+          <a:ln/>
+        </p:spPr>
+        <p:txBody>
+          <a:bodyPr wrap="square" rtlCol="0" anchor="ctr"/>
+          <a:lstStyle/>
+          <a:p>
+            <a:pPr indent="0" marL="0">
+              <a:buNone/>
+            </a:pPr>
+            <a:r>
+              <a:rPr lang="en-US" sz="2400" b="1" dirty="0">
                 <a:solidFill>
                   <a:srgbClr val="FFFFFF"/>
                 </a:solidFill>
@@ -8333,7 +9106,7 @@
               </a:rPr>
               <a:t>Kurumsal Audit Log &amp; Anlık Hata Bildirimi</a:t>
             </a:r>
-            <a:endParaRPr lang="en-US" sz="2600" dirty="0"/>
+            <a:endParaRPr lang="en-US" sz="2400" dirty="0"/>
           </a:p>
         </p:txBody>
       </p:sp>
@@ -8345,20 +9118,20 @@
         </p:nvSpPr>
         <p:spPr>
           <a:xfrm>
-            <a:off x="731520" y="1645920"/>
-            <a:ext cx="3429000" cy="4389120"/>
+            <a:off x="731520" y="1371600"/>
+            <a:ext cx="3429000" cy="4663440"/>
           </a:xfrm>
           <a:prstGeom prst="roundRect">
             <a:avLst>
-              <a:gd name="adj" fmla="val 6667"/>
+              <a:gd name="adj" fmla="val 5333"/>
             </a:avLst>
           </a:prstGeom>
           <a:solidFill>
-            <a:srgbClr val="1E293B"/>
+            <a:srgbClr val="152238"/>
           </a:solidFill>
-          <a:ln w="12700">
+          <a:ln w="19050">
             <a:solidFill>
-              <a:srgbClr val="334155"/>
+              <a:srgbClr val="283852"/>
             </a:solidFill>
             <a:prstDash val="solid"/>
           </a:ln>
@@ -8372,7 +9145,7 @@
         </p:nvSpPr>
         <p:spPr>
           <a:xfrm>
-            <a:off x="1005840" y="1920240"/>
+            <a:off x="1005840" y="1600200"/>
             <a:ext cx="914400" cy="457200"/>
           </a:xfrm>
           <a:prstGeom prst="rect">
@@ -8408,7 +9181,7 @@
         </p:nvSpPr>
         <p:spPr>
           <a:xfrm>
-            <a:off x="1005840" y="2468880"/>
+            <a:off x="1005840" y="2148840"/>
             <a:ext cx="2880360" cy="365760"/>
           </a:xfrm>
           <a:prstGeom prst="rect">
@@ -8425,7 +9198,7 @@
               <a:buNone/>
             </a:pPr>
             <a:r>
-              <a:rPr lang="en-US" sz="1400" b="1" dirty="0">
+              <a:rPr lang="en-US" sz="1450" b="1" dirty="0">
                 <a:solidFill>
                   <a:srgbClr val="FFFFFF"/>
                 </a:solidFill>
@@ -8435,7 +9208,7 @@
               </a:rPr>
               <a:t>Tam Kapsamlı Audit Log</a:t>
             </a:r>
-            <a:endParaRPr lang="en-US" sz="1400" dirty="0"/>
+            <a:endParaRPr lang="en-US" sz="1450" dirty="0"/>
           </a:p>
         </p:txBody>
       </p:sp>
@@ -8447,7 +9220,7 @@
         </p:nvSpPr>
         <p:spPr>
           <a:xfrm>
-            <a:off x="1005840" y="2880360"/>
+            <a:off x="1005840" y="2560320"/>
             <a:ext cx="2880360" cy="365760"/>
           </a:xfrm>
           <a:prstGeom prst="rect">
@@ -8486,8 +9259,8 @@
         </p:nvSpPr>
         <p:spPr>
           <a:xfrm>
-            <a:off x="1005840" y="3383280"/>
-            <a:ext cx="2880360" cy="594360"/>
+            <a:off x="1005840" y="3063240"/>
+            <a:ext cx="2880360" cy="777240"/>
           </a:xfrm>
           <a:prstGeom prst="rect">
             <a:avLst/>
@@ -8511,7 +9284,7 @@
                 <a:ea typeface="Segoe UI" pitchFamily="34" charset="-122"/>
                 <a:cs typeface="Segoe UI" pitchFamily="34" charset="-120"/>
               </a:rPr>
-              <a:t>• Rasyon kayıt, güncelleme ve silme logları.</a:t>
+              <a:t>• Rasyon kayıt, güncelleme ve silme işlemleri anlık kaydedilir.</a:t>
             </a:r>
             <a:endParaRPr lang="en-US" sz="1050" dirty="0"/>
           </a:p>
@@ -8525,8 +9298,8 @@
         </p:nvSpPr>
         <p:spPr>
           <a:xfrm>
-            <a:off x="1005840" y="4023360"/>
-            <a:ext cx="2880360" cy="594360"/>
+            <a:off x="1005840" y="3931920"/>
+            <a:ext cx="2880360" cy="777240"/>
           </a:xfrm>
           <a:prstGeom prst="rect">
             <a:avLst/>
@@ -8550,7 +9323,7 @@
                 <a:ea typeface="Segoe UI" pitchFamily="34" charset="-122"/>
                 <a:cs typeface="Segoe UI" pitchFamily="34" charset="-120"/>
               </a:rPr>
-              <a:t>• Yem fiyat ve besin parametresi güncellemeleri.</a:t>
+              <a:t>• Yem fiyat ve besin parametresi revizyonları kayıt altındadır.</a:t>
             </a:r>
             <a:endParaRPr lang="en-US" sz="1050" dirty="0"/>
           </a:p>
@@ -8564,8 +9337,8 @@
         </p:nvSpPr>
         <p:spPr>
           <a:xfrm>
-            <a:off x="1005840" y="4663440"/>
-            <a:ext cx="2880360" cy="594360"/>
+            <a:off x="1005840" y="4800600"/>
+            <a:ext cx="2880360" cy="777240"/>
           </a:xfrm>
           <a:prstGeom prst="rect">
             <a:avLst/>
@@ -8589,7 +9362,7 @@
                 <a:ea typeface="Segoe UI" pitchFamily="34" charset="-122"/>
                 <a:cs typeface="Segoe UI" pitchFamily="34" charset="-120"/>
               </a:rPr>
-              <a:t>• Gider kayıtları ve kullanıcı oturum hareketleri.</a:t>
+              <a:t>• Gider kayıtları ve kullanıcı oturum hareketleri detaylı izlenir.</a:t>
             </a:r>
             <a:endParaRPr lang="en-US" sz="1050" dirty="0"/>
           </a:p>
@@ -8603,20 +9376,20 @@
         </p:nvSpPr>
         <p:spPr>
           <a:xfrm>
-            <a:off x="4343400" y="1645920"/>
-            <a:ext cx="3429000" cy="4389120"/>
+            <a:off x="4380890" y="1371600"/>
+            <a:ext cx="3429000" cy="4663440"/>
           </a:xfrm>
           <a:prstGeom prst="roundRect">
             <a:avLst>
-              <a:gd name="adj" fmla="val 6667"/>
+              <a:gd name="adj" fmla="val 5333"/>
             </a:avLst>
           </a:prstGeom>
           <a:solidFill>
-            <a:srgbClr val="1E293B"/>
+            <a:srgbClr val="152238"/>
           </a:solidFill>
-          <a:ln w="12700">
+          <a:ln w="19050">
             <a:solidFill>
-              <a:srgbClr val="334155"/>
+              <a:srgbClr val="283852"/>
             </a:solidFill>
             <a:prstDash val="solid"/>
           </a:ln>
@@ -8630,7 +9403,7 @@
         </p:nvSpPr>
         <p:spPr>
           <a:xfrm>
-            <a:off x="4617720" y="1920240"/>
+            <a:off x="4655210" y="1600200"/>
             <a:ext cx="914400" cy="457200"/>
           </a:xfrm>
           <a:prstGeom prst="rect">
@@ -8666,7 +9439,7 @@
         </p:nvSpPr>
         <p:spPr>
           <a:xfrm>
-            <a:off x="4617720" y="2468880"/>
+            <a:off x="4655210" y="2148840"/>
             <a:ext cx="2880360" cy="365760"/>
           </a:xfrm>
           <a:prstGeom prst="rect">
@@ -8683,7 +9456,7 @@
               <a:buNone/>
             </a:pPr>
             <a:r>
-              <a:rPr lang="en-US" sz="1400" b="1" dirty="0">
+              <a:rPr lang="en-US" sz="1450" b="1" dirty="0">
                 <a:solidFill>
                   <a:srgbClr val="FFFFFF"/>
                 </a:solidFill>
@@ -8693,7 +9466,7 @@
               </a:rPr>
               <a:t>IP, Konum &amp; Cihaz Tespiti</a:t>
             </a:r>
-            <a:endParaRPr lang="en-US" sz="1400" dirty="0"/>
+            <a:endParaRPr lang="en-US" sz="1450" dirty="0"/>
           </a:p>
         </p:txBody>
       </p:sp>
@@ -8705,7 +9478,7 @@
         </p:nvSpPr>
         <p:spPr>
           <a:xfrm>
-            <a:off x="4617720" y="2880360"/>
+            <a:off x="4655210" y="2560320"/>
             <a:ext cx="2880360" cy="365760"/>
           </a:xfrm>
           <a:prstGeom prst="rect">
@@ -8744,8 +9517,8 @@
         </p:nvSpPr>
         <p:spPr>
           <a:xfrm>
-            <a:off x="4617720" y="3383280"/>
-            <a:ext cx="2880360" cy="594360"/>
+            <a:off x="4655210" y="3063240"/>
+            <a:ext cx="2880360" cy="777240"/>
           </a:xfrm>
           <a:prstGeom prst="rect">
             <a:avLst/>
@@ -8769,7 +9542,7 @@
                 <a:ea typeface="Segoe UI" pitchFamily="34" charset="-122"/>
                 <a:cs typeface="Segoe UI" pitchFamily="34" charset="-120"/>
               </a:rPr>
-              <a:t>• Kullanıcının bağlandığı IP adresi ve ISP bilgisi.</a:t>
+              <a:t>• Kullanıcının bağlandığı IP adresi ve ISP bilgisi yakalanır.</a:t>
             </a:r>
             <a:endParaRPr lang="en-US" sz="1050" dirty="0"/>
           </a:p>
@@ -8783,8 +9556,8 @@
         </p:nvSpPr>
         <p:spPr>
           <a:xfrm>
-            <a:off x="4617720" y="4023360"/>
-            <a:ext cx="2880360" cy="594360"/>
+            <a:off x="4655210" y="3931920"/>
+            <a:ext cx="2880360" cy="777240"/>
           </a:xfrm>
           <a:prstGeom prst="rect">
             <a:avLst/>
@@ -8808,7 +9581,7 @@
                 <a:ea typeface="Segoe UI" pitchFamily="34" charset="-122"/>
                 <a:cs typeface="Segoe UI" pitchFamily="34" charset="-120"/>
               </a:rPr>
-              <a:t>• Şehir/Ülke düzeyinde geo-location sorgulama.</a:t>
+              <a:t>• Şehir/Ülke düzeyinde geo-location harita sorgulaması yapılır.</a:t>
             </a:r>
             <a:endParaRPr lang="en-US" sz="1050" dirty="0"/>
           </a:p>
@@ -8822,8 +9595,8 @@
         </p:nvSpPr>
         <p:spPr>
           <a:xfrm>
-            <a:off x="4617720" y="4663440"/>
-            <a:ext cx="2880360" cy="594360"/>
+            <a:off x="4655210" y="4800600"/>
+            <a:ext cx="2880360" cy="777240"/>
           </a:xfrm>
           <a:prstGeom prst="rect">
             <a:avLst/>
@@ -8847,7 +9620,7 @@
                 <a:ea typeface="Segoe UI" pitchFamily="34" charset="-122"/>
                 <a:cs typeface="Segoe UI" pitchFamily="34" charset="-120"/>
               </a:rPr>
-              <a:t>• Cihaz tipi (Mobil / Tablet / Desktop) ve tarayıcı tespiti.</a:t>
+              <a:t>• Cihaz tipi (Mobil / Tablet / PC) ve tarayıcı tespiti kaydedilir.</a:t>
             </a:r>
             <a:endParaRPr lang="en-US" sz="1050" dirty="0"/>
           </a:p>
@@ -8861,20 +9634,20 @@
         </p:nvSpPr>
         <p:spPr>
           <a:xfrm>
-            <a:off x="7955280" y="1645920"/>
-            <a:ext cx="3429000" cy="4389120"/>
+            <a:off x="8030261" y="1371600"/>
+            <a:ext cx="3429000" cy="4663440"/>
           </a:xfrm>
           <a:prstGeom prst="roundRect">
             <a:avLst>
-              <a:gd name="adj" fmla="val 6667"/>
+              <a:gd name="adj" fmla="val 5333"/>
             </a:avLst>
           </a:prstGeom>
           <a:solidFill>
-            <a:srgbClr val="1E293B"/>
+            <a:srgbClr val="152238"/>
           </a:solidFill>
-          <a:ln w="12700">
+          <a:ln w="19050">
             <a:solidFill>
-              <a:srgbClr val="334155"/>
+              <a:srgbClr val="283852"/>
             </a:solidFill>
             <a:prstDash val="solid"/>
           </a:ln>
@@ -8888,7 +9661,7 @@
         </p:nvSpPr>
         <p:spPr>
           <a:xfrm>
-            <a:off x="8229600" y="1920240"/>
+            <a:off x="8304581" y="1600200"/>
             <a:ext cx="914400" cy="457200"/>
           </a:xfrm>
           <a:prstGeom prst="rect">
@@ -8924,7 +9697,7 @@
         </p:nvSpPr>
         <p:spPr>
           <a:xfrm>
-            <a:off x="8229600" y="2468880"/>
+            <a:off x="8304581" y="2148840"/>
             <a:ext cx="2880360" cy="365760"/>
           </a:xfrm>
           <a:prstGeom prst="rect">
@@ -8941,7 +9714,7 @@
               <a:buNone/>
             </a:pPr>
             <a:r>
-              <a:rPr lang="en-US" sz="1400" b="1" dirty="0">
+              <a:rPr lang="en-US" sz="1450" b="1" dirty="0">
                 <a:solidFill>
                   <a:srgbClr val="FFFFFF"/>
                 </a:solidFill>
@@ -8951,7 +9724,7 @@
               </a:rPr>
               <a:t>Gmail Hata Bildirim Servisi</a:t>
             </a:r>
-            <a:endParaRPr lang="en-US" sz="1400" dirty="0"/>
+            <a:endParaRPr lang="en-US" sz="1450" dirty="0"/>
           </a:p>
         </p:txBody>
       </p:sp>
@@ -8963,7 +9736,7 @@
         </p:nvSpPr>
         <p:spPr>
           <a:xfrm>
-            <a:off x="8229600" y="2880360"/>
+            <a:off x="8304581" y="2560320"/>
             <a:ext cx="2880360" cy="365760"/>
           </a:xfrm>
           <a:prstGeom prst="rect">
@@ -8988,7 +9761,7 @@
                 <a:ea typeface="Segoe UI" pitchFamily="34" charset="-122"/>
                 <a:cs typeface="Segoe UI" pitchFamily="34" charset="-120"/>
               </a:rPr>
-              <a:t>Kritik Sistem Alarmları Anında Cebinizde</a:t>
+              <a:t>Kritik Sistem Alarmları 7/24 Takipte</a:t>
             </a:r>
             <a:endParaRPr lang="en-US" sz="1000" dirty="0"/>
           </a:p>
@@ -9002,8 +9775,8 @@
         </p:nvSpPr>
         <p:spPr>
           <a:xfrm>
-            <a:off x="8229600" y="3383280"/>
-            <a:ext cx="2880360" cy="594360"/>
+            <a:off x="8304581" y="3063240"/>
+            <a:ext cx="2880360" cy="777240"/>
           </a:xfrm>
           <a:prstGeom prst="rect">
             <a:avLst/>
@@ -9027,7 +9800,7 @@
                 <a:ea typeface="Segoe UI" pitchFamily="34" charset="-122"/>
                 <a:cs typeface="Segoe UI" pitchFamily="34" charset="-120"/>
               </a:rPr>
-              <a:t>• Olası API veya veritabanı hatalarında otomatik tetikleme.</a:t>
+              <a:t>• Olası API veya veritabanı hatalarında otomatik tetikleme çalışır.</a:t>
             </a:r>
             <a:endParaRPr lang="en-US" sz="1050" dirty="0"/>
           </a:p>
@@ -9041,8 +9814,8 @@
         </p:nvSpPr>
         <p:spPr>
           <a:xfrm>
-            <a:off x="8229600" y="4023360"/>
-            <a:ext cx="2880360" cy="594360"/>
+            <a:off x="8304581" y="3931920"/>
+            <a:ext cx="2880360" cy="777240"/>
           </a:xfrm>
           <a:prstGeom prst="rect">
             <a:avLst/>
@@ -9066,7 +9839,7 @@
                 <a:ea typeface="Segoe UI" pitchFamily="34" charset="-122"/>
                 <a:cs typeface="Segoe UI" pitchFamily="34" charset="-120"/>
               </a:rPr>
-              <a:t>• Geliştirici Erkan Erdem'e hata detayları anında iletilir (7/24 Takip).</a:t>
+              <a:t>• Geliştirici Erkan Erdem'e hata detayları anında mail olarak iletilir.</a:t>
             </a:r>
             <a:endParaRPr lang="en-US" sz="1050" dirty="0"/>
           </a:p>
@@ -9080,8 +9853,8 @@
         </p:nvSpPr>
         <p:spPr>
           <a:xfrm>
-            <a:off x="8229600" y="4663440"/>
-            <a:ext cx="2880360" cy="594360"/>
+            <a:off x="8304581" y="4800600"/>
+            <a:ext cx="2880360" cy="777240"/>
           </a:xfrm>
           <a:prstGeom prst="rect">
             <a:avLst/>
@@ -9105,7 +9878,7 @@
                 <a:ea typeface="Segoe UI" pitchFamily="34" charset="-122"/>
                 <a:cs typeface="Segoe UI" pitchFamily="34" charset="-120"/>
               </a:rPr>
-              <a:t>• PIN korumalı güvenli SMTP yönetim paneli (/mailayar).</a:t>
+              <a:t>• Uygulama 7/24 geliştirici takibindedir; PIN korumalı SMTP paneli mevcuttur.</a:t>
             </a:r>
             <a:endParaRPr lang="en-US" sz="1050" dirty="0"/>
           </a:p>
@@ -9119,8 +9892,8 @@
         </p:nvSpPr>
         <p:spPr>
           <a:xfrm>
-            <a:off x="731520" y="6400800"/>
-            <a:ext cx="10698480" cy="0"/>
+            <a:off x="731520" y="6263640"/>
+            <a:ext cx="10728655" cy="0"/>
           </a:xfrm>
           <a:prstGeom prst="line">
             <a:avLst/>
@@ -9128,7 +9901,7 @@
           <a:noFill/>
           <a:ln w="12700">
             <a:solidFill>
-              <a:srgbClr val="1E293B"/>
+              <a:srgbClr val="233348"/>
             </a:solidFill>
             <a:prstDash val="solid"/>
           </a:ln>
@@ -9142,7 +9915,7 @@
         </p:nvSpPr>
         <p:spPr>
           <a:xfrm>
-            <a:off x="731520" y="6446520"/>
+            <a:off x="731520" y="6327648"/>
             <a:ext cx="5486400" cy="320040"/>
           </a:xfrm>
           <a:prstGeom prst="rect">
@@ -9181,8 +9954,8 @@
         </p:nvSpPr>
         <p:spPr>
           <a:xfrm>
-            <a:off x="6217920" y="6446520"/>
-            <a:ext cx="5212080" cy="320040"/>
+            <a:off x="6217920" y="6327648"/>
+            <a:ext cx="5242255" cy="320040"/>
           </a:xfrm>
           <a:prstGeom prst="rect">
             <a:avLst/>
@@ -9252,24 +10025,24 @@
         </p:nvSpPr>
         <p:spPr>
           <a:xfrm>
-            <a:off x="731520" y="548640"/>
-            <a:ext cx="9144000" cy="274320"/>
-          </a:xfrm>
-          <a:prstGeom prst="rect">
-            <a:avLst/>
-          </a:prstGeom>
-          <a:noFill/>
-          <a:ln/>
-        </p:spPr>
-        <p:txBody>
-          <a:bodyPr wrap="square" rtlCol="0" anchor="ctr"/>
-          <a:lstStyle/>
-          <a:p>
-            <a:pPr indent="0" marL="0">
-              <a:buNone/>
-            </a:pPr>
-            <a:r>
-              <a:rPr lang="en-US" sz="1100" b="1" dirty="0">
+            <a:off x="731520" y="411480"/>
+            <a:ext cx="10728655" cy="274320"/>
+          </a:xfrm>
+          <a:prstGeom prst="rect">
+            <a:avLst/>
+          </a:prstGeom>
+          <a:noFill/>
+          <a:ln/>
+        </p:spPr>
+        <p:txBody>
+          <a:bodyPr wrap="square" rtlCol="0" anchor="ctr"/>
+          <a:lstStyle/>
+          <a:p>
+            <a:pPr indent="0" marL="0">
+              <a:buNone/>
+            </a:pPr>
+            <a:r>
+              <a:rPr lang="en-US" sz="1050" b="1" spc="150" kern="0" dirty="0">
                 <a:solidFill>
                   <a:srgbClr val="34D399"/>
                 </a:solidFill>
@@ -9277,9 +10050,9 @@
                 <a:ea typeface="Segoe UI" pitchFamily="34" charset="-122"/>
                 <a:cs typeface="Segoe UI" pitchFamily="34" charset="-120"/>
               </a:rPr>
-              <a:t>TEKNOLOJİ &amp; DAĞITIM ALTYAPISI</a:t>
-            </a:r>
-            <a:endParaRPr lang="en-US" sz="1100" dirty="0"/>
+              <a:t>TEKNOLOJI &amp; DAĞITIM ALTYAPISI</a:t>
+            </a:r>
+            <a:endParaRPr lang="en-US" sz="1050" dirty="0"/>
           </a:p>
         </p:txBody>
       </p:sp>
@@ -9291,24 +10064,24 @@
         </p:nvSpPr>
         <p:spPr>
           <a:xfrm>
-            <a:off x="731520" y="822960"/>
-            <a:ext cx="9144000" cy="548640"/>
-          </a:xfrm>
-          <a:prstGeom prst="rect">
-            <a:avLst/>
-          </a:prstGeom>
-          <a:noFill/>
-          <a:ln/>
-        </p:spPr>
-        <p:txBody>
-          <a:bodyPr wrap="square" rtlCol="0" anchor="ctr"/>
-          <a:lstStyle/>
-          <a:p>
-            <a:pPr indent="0" marL="0">
-              <a:buNone/>
-            </a:pPr>
-            <a:r>
-              <a:rPr lang="en-US" sz="2600" b="1" dirty="0">
+            <a:off x="731520" y="685800"/>
+            <a:ext cx="10728655" cy="548640"/>
+          </a:xfrm>
+          <a:prstGeom prst="rect">
+            <a:avLst/>
+          </a:prstGeom>
+          <a:noFill/>
+          <a:ln/>
+        </p:spPr>
+        <p:txBody>
+          <a:bodyPr wrap="square" rtlCol="0" anchor="ctr"/>
+          <a:lstStyle/>
+          <a:p>
+            <a:pPr indent="0" marL="0">
+              <a:buNone/>
+            </a:pPr>
+            <a:r>
+              <a:rPr lang="en-US" sz="2400" b="1" dirty="0">
                 <a:solidFill>
                   <a:srgbClr val="FFFFFF"/>
                 </a:solidFill>
@@ -9318,7 +10091,7 @@
               </a:rPr>
               <a:t>Docker, Coolify &amp; Mobil PWA Mimarisi</a:t>
             </a:r>
-            <a:endParaRPr lang="en-US" sz="2600" dirty="0"/>
+            <a:endParaRPr lang="en-US" sz="2400" dirty="0"/>
           </a:p>
         </p:txBody>
       </p:sp>
@@ -9330,20 +10103,20 @@
         </p:nvSpPr>
         <p:spPr>
           <a:xfrm>
-            <a:off x="731520" y="1645920"/>
-            <a:ext cx="10607040" cy="960120"/>
+            <a:off x="731520" y="1371600"/>
+            <a:ext cx="10728655" cy="1051560"/>
           </a:xfrm>
           <a:prstGeom prst="roundRect">
             <a:avLst>
-              <a:gd name="adj" fmla="val 19048"/>
+              <a:gd name="adj" fmla="val 13043"/>
             </a:avLst>
           </a:prstGeom>
           <a:solidFill>
-            <a:srgbClr val="1E293B"/>
+            <a:srgbClr val="152238"/>
           </a:solidFill>
-          <a:ln w="12700">
+          <a:ln w="19050">
             <a:solidFill>
-              <a:srgbClr val="334155"/>
+              <a:srgbClr val="283852"/>
             </a:solidFill>
             <a:prstDash val="solid"/>
           </a:ln>
@@ -9357,24 +10130,24 @@
         </p:nvSpPr>
         <p:spPr>
           <a:xfrm>
-            <a:off x="1005840" y="1783080"/>
-            <a:ext cx="4114800" cy="320040"/>
-          </a:xfrm>
-          <a:prstGeom prst="rect">
-            <a:avLst/>
-          </a:prstGeom>
-          <a:noFill/>
-          <a:ln/>
-        </p:spPr>
-        <p:txBody>
-          <a:bodyPr wrap="square" rtlCol="0" anchor="ctr"/>
-          <a:lstStyle/>
-          <a:p>
-            <a:pPr indent="0" marL="0">
-              <a:buNone/>
-            </a:pPr>
-            <a:r>
-              <a:rPr lang="en-US" sz="1300" b="1" dirty="0">
+            <a:off x="1005840" y="1536192"/>
+            <a:ext cx="4572000" cy="320040"/>
+          </a:xfrm>
+          <a:prstGeom prst="rect">
+            <a:avLst/>
+          </a:prstGeom>
+          <a:noFill/>
+          <a:ln/>
+        </p:spPr>
+        <p:txBody>
+          <a:bodyPr wrap="square" rtlCol="0" anchor="ctr"/>
+          <a:lstStyle/>
+          <a:p>
+            <a:pPr indent="0" marL="0">
+              <a:buNone/>
+            </a:pPr>
+            <a:r>
+              <a:rPr lang="en-US" sz="1350" b="1" dirty="0">
                 <a:solidFill>
                   <a:srgbClr val="FFFFFF"/>
                 </a:solidFill>
@@ -9384,7 +10157,7 @@
               </a:rPr>
               <a:t>Next.js 15 &amp; React 19</a:t>
             </a:r>
-            <a:endParaRPr lang="en-US" sz="1300" dirty="0"/>
+            <a:endParaRPr lang="en-US" sz="1350" dirty="0"/>
           </a:p>
         </p:txBody>
       </p:sp>
@@ -9396,8 +10169,8 @@
         </p:nvSpPr>
         <p:spPr>
           <a:xfrm>
-            <a:off x="1005840" y="2103120"/>
-            <a:ext cx="9601200" cy="411480"/>
+            <a:off x="1005840" y="1874520"/>
+            <a:ext cx="10180015" cy="457200"/>
           </a:xfrm>
           <a:prstGeom prst="rect">
             <a:avLst/>
@@ -9421,7 +10194,7 @@
                 <a:ea typeface="Segoe UI" pitchFamily="34" charset="-122"/>
                 <a:cs typeface="Segoe UI" pitchFamily="34" charset="-120"/>
               </a:rPr>
-              <a:t>Ultra hızlı SSR &amp; App Router mimarisi ile kusursuz kullanıcı deneyimi.</a:t>
+              <a:t>Ultra hızlı SSR &amp; App Router mimarisi ile mobil cihazlarda ve masaüstünde akıcı kullanıcı deneyimi.</a:t>
             </a:r>
             <a:endParaRPr lang="en-US" sz="1050" dirty="0"/>
           </a:p>
@@ -9435,20 +10208,20 @@
         </p:nvSpPr>
         <p:spPr>
           <a:xfrm>
-            <a:off x="731520" y="2788920"/>
-            <a:ext cx="10607040" cy="960120"/>
+            <a:off x="731520" y="2532888"/>
+            <a:ext cx="10728655" cy="1051560"/>
           </a:xfrm>
           <a:prstGeom prst="roundRect">
             <a:avLst>
-              <a:gd name="adj" fmla="val 19048"/>
+              <a:gd name="adj" fmla="val 13043"/>
             </a:avLst>
           </a:prstGeom>
           <a:solidFill>
-            <a:srgbClr val="1E293B"/>
+            <a:srgbClr val="152238"/>
           </a:solidFill>
-          <a:ln w="12700">
+          <a:ln w="19050">
             <a:solidFill>
-              <a:srgbClr val="334155"/>
+              <a:srgbClr val="283852"/>
             </a:solidFill>
             <a:prstDash val="solid"/>
           </a:ln>
@@ -9462,24 +10235,24 @@
         </p:nvSpPr>
         <p:spPr>
           <a:xfrm>
-            <a:off x="1005840" y="2926080"/>
-            <a:ext cx="4114800" cy="320040"/>
-          </a:xfrm>
-          <a:prstGeom prst="rect">
-            <a:avLst/>
-          </a:prstGeom>
-          <a:noFill/>
-          <a:ln/>
-        </p:spPr>
-        <p:txBody>
-          <a:bodyPr wrap="square" rtlCol="0" anchor="ctr"/>
-          <a:lstStyle/>
-          <a:p>
-            <a:pPr indent="0" marL="0">
-              <a:buNone/>
-            </a:pPr>
-            <a:r>
-              <a:rPr lang="en-US" sz="1300" b="1" dirty="0">
+            <a:off x="1005840" y="2697480"/>
+            <a:ext cx="4572000" cy="320040"/>
+          </a:xfrm>
+          <a:prstGeom prst="rect">
+            <a:avLst/>
+          </a:prstGeom>
+          <a:noFill/>
+          <a:ln/>
+        </p:spPr>
+        <p:txBody>
+          <a:bodyPr wrap="square" rtlCol="0" anchor="ctr"/>
+          <a:lstStyle/>
+          <a:p>
+            <a:pPr indent="0" marL="0">
+              <a:buNone/>
+            </a:pPr>
+            <a:r>
+              <a:rPr lang="en-US" sz="1350" b="1" dirty="0">
                 <a:solidFill>
                   <a:srgbClr val="38BDF8"/>
                 </a:solidFill>
@@ -9489,7 +10262,7 @@
               </a:rPr>
               <a:t>PostgreSQL &amp; Prisma ORM</a:t>
             </a:r>
-            <a:endParaRPr lang="en-US" sz="1300" dirty="0"/>
+            <a:endParaRPr lang="en-US" sz="1350" dirty="0"/>
           </a:p>
         </p:txBody>
       </p:sp>
@@ -9501,8 +10274,8 @@
         </p:nvSpPr>
         <p:spPr>
           <a:xfrm>
-            <a:off x="1005840" y="3246120"/>
-            <a:ext cx="9601200" cy="411480"/>
+            <a:off x="1005840" y="3035808"/>
+            <a:ext cx="10180015" cy="457200"/>
           </a:xfrm>
           <a:prstGeom prst="rect">
             <a:avLst/>
@@ -9526,7 +10299,7 @@
                 <a:ea typeface="Segoe UI" pitchFamily="34" charset="-122"/>
                 <a:cs typeface="Segoe UI" pitchFamily="34" charset="-120"/>
               </a:rPr>
-              <a:t>İlişkisel, güvenilir ve yüksek performanslı veri tabanı altyapısı.</a:t>
+              <a:t>İlişkisel, güvenilir ve yüksek performanslı veri tabanı altyapısı; tip güvenli veri sorgulama.</a:t>
             </a:r>
             <a:endParaRPr lang="en-US" sz="1050" dirty="0"/>
           </a:p>
@@ -9540,20 +10313,20 @@
         </p:nvSpPr>
         <p:spPr>
           <a:xfrm>
-            <a:off x="731520" y="3931920"/>
-            <a:ext cx="10607040" cy="960120"/>
+            <a:off x="731520" y="3694176"/>
+            <a:ext cx="10728655" cy="1051560"/>
           </a:xfrm>
           <a:prstGeom prst="roundRect">
             <a:avLst>
-              <a:gd name="adj" fmla="val 19048"/>
+              <a:gd name="adj" fmla="val 13043"/>
             </a:avLst>
           </a:prstGeom>
           <a:solidFill>
-            <a:srgbClr val="1E293B"/>
+            <a:srgbClr val="152238"/>
           </a:solidFill>
-          <a:ln w="12700">
+          <a:ln w="19050">
             <a:solidFill>
-              <a:srgbClr val="334155"/>
+              <a:srgbClr val="283852"/>
             </a:solidFill>
             <a:prstDash val="solid"/>
           </a:ln>
@@ -9567,24 +10340,24 @@
         </p:nvSpPr>
         <p:spPr>
           <a:xfrm>
-            <a:off x="1005840" y="4069080"/>
-            <a:ext cx="4114800" cy="320040"/>
-          </a:xfrm>
-          <a:prstGeom prst="rect">
-            <a:avLst/>
-          </a:prstGeom>
-          <a:noFill/>
-          <a:ln/>
-        </p:spPr>
-        <p:txBody>
-          <a:bodyPr wrap="square" rtlCol="0" anchor="ctr"/>
-          <a:lstStyle/>
-          <a:p>
-            <a:pPr indent="0" marL="0">
-              <a:buNone/>
-            </a:pPr>
-            <a:r>
-              <a:rPr lang="en-US" sz="1300" b="1" dirty="0">
+            <a:off x="1005840" y="3858768"/>
+            <a:ext cx="4572000" cy="320040"/>
+          </a:xfrm>
+          <a:prstGeom prst="rect">
+            <a:avLst/>
+          </a:prstGeom>
+          <a:noFill/>
+          <a:ln/>
+        </p:spPr>
+        <p:txBody>
+          <a:bodyPr wrap="square" rtlCol="0" anchor="ctr"/>
+          <a:lstStyle/>
+          <a:p>
+            <a:pPr indent="0" marL="0">
+              <a:buNone/>
+            </a:pPr>
+            <a:r>
+              <a:rPr lang="en-US" sz="1350" b="1" dirty="0">
                 <a:solidFill>
                   <a:srgbClr val="10B981"/>
                 </a:solidFill>
@@ -9594,7 +10367,7 @@
               </a:rPr>
               <a:t>Docker &amp; Docker Compose</a:t>
             </a:r>
-            <a:endParaRPr lang="en-US" sz="1300" dirty="0"/>
+            <a:endParaRPr lang="en-US" sz="1350" dirty="0"/>
           </a:p>
         </p:txBody>
       </p:sp>
@@ -9606,8 +10379,8 @@
         </p:nvSpPr>
         <p:spPr>
           <a:xfrm>
-            <a:off x="1005840" y="4389120"/>
-            <a:ext cx="9601200" cy="411480"/>
+            <a:off x="1005840" y="4197096"/>
+            <a:ext cx="10180015" cy="457200"/>
           </a:xfrm>
           <a:prstGeom prst="rect">
             <a:avLst/>
@@ -9631,7 +10404,7 @@
                 <a:ea typeface="Segoe UI" pitchFamily="34" charset="-122"/>
                 <a:cs typeface="Segoe UI" pitchFamily="34" charset="-120"/>
               </a:rPr>
-              <a:t>Uygulama ve veritabanı bağımsız izole containerlarda sıfır konfigürasyonla çalışır.</a:t>
+              <a:t>Uygulama ve veritabanı bağımsız izole containerlarda sıfır konfigürasyon bağımlılığı ile çalışır.</a:t>
             </a:r>
             <a:endParaRPr lang="en-US" sz="1050" dirty="0"/>
           </a:p>
@@ -9645,20 +10418,20 @@
         </p:nvSpPr>
         <p:spPr>
           <a:xfrm>
-            <a:off x="731520" y="5074920"/>
-            <a:ext cx="10607040" cy="960120"/>
+            <a:off x="731520" y="4855464"/>
+            <a:ext cx="10728655" cy="1051560"/>
           </a:xfrm>
           <a:prstGeom prst="roundRect">
             <a:avLst>
-              <a:gd name="adj" fmla="val 19048"/>
+              <a:gd name="adj" fmla="val 13043"/>
             </a:avLst>
           </a:prstGeom>
           <a:solidFill>
-            <a:srgbClr val="1E293B"/>
+            <a:srgbClr val="152238"/>
           </a:solidFill>
-          <a:ln w="12700">
+          <a:ln w="19050">
             <a:solidFill>
-              <a:srgbClr val="334155"/>
+              <a:srgbClr val="283852"/>
             </a:solidFill>
             <a:prstDash val="solid"/>
           </a:ln>
@@ -9672,24 +10445,24 @@
         </p:nvSpPr>
         <p:spPr>
           <a:xfrm>
-            <a:off x="1005840" y="5212080"/>
-            <a:ext cx="4114800" cy="320040"/>
-          </a:xfrm>
-          <a:prstGeom prst="rect">
-            <a:avLst/>
-          </a:prstGeom>
-          <a:noFill/>
-          <a:ln/>
-        </p:spPr>
-        <p:txBody>
-          <a:bodyPr wrap="square" rtlCol="0" anchor="ctr"/>
-          <a:lstStyle/>
-          <a:p>
-            <a:pPr indent="0" marL="0">
-              <a:buNone/>
-            </a:pPr>
-            <a:r>
-              <a:rPr lang="en-US" sz="1300" b="1" dirty="0">
+            <a:off x="1005840" y="5020056"/>
+            <a:ext cx="4572000" cy="320040"/>
+          </a:xfrm>
+          <a:prstGeom prst="rect">
+            <a:avLst/>
+          </a:prstGeom>
+          <a:noFill/>
+          <a:ln/>
+        </p:spPr>
+        <p:txBody>
+          <a:bodyPr wrap="square" rtlCol="0" anchor="ctr"/>
+          <a:lstStyle/>
+          <a:p>
+            <a:pPr indent="0" marL="0">
+              <a:buNone/>
+            </a:pPr>
+            <a:r>
+              <a:rPr lang="en-US" sz="1350" b="1" dirty="0">
                 <a:solidFill>
                   <a:srgbClr val="F59E0B"/>
                 </a:solidFill>
@@ -9699,7 +10472,7 @@
               </a:rPr>
               <a:t>Coolify Entegrasyonu</a:t>
             </a:r>
-            <a:endParaRPr lang="en-US" sz="1300" dirty="0"/>
+            <a:endParaRPr lang="en-US" sz="1350" dirty="0"/>
           </a:p>
         </p:txBody>
       </p:sp>
@@ -9711,8 +10484,8 @@
         </p:nvSpPr>
         <p:spPr>
           <a:xfrm>
-            <a:off x="1005840" y="5532120"/>
-            <a:ext cx="9601200" cy="411480"/>
+            <a:off x="1005840" y="5358384"/>
+            <a:ext cx="10180015" cy="457200"/>
           </a:xfrm>
           <a:prstGeom prst="rect">
             <a:avLst/>
@@ -9750,8 +10523,8 @@
         </p:nvSpPr>
         <p:spPr>
           <a:xfrm>
-            <a:off x="731520" y="6400800"/>
-            <a:ext cx="10698480" cy="0"/>
+            <a:off x="731520" y="6263640"/>
+            <a:ext cx="10728655" cy="0"/>
           </a:xfrm>
           <a:prstGeom prst="line">
             <a:avLst/>
@@ -9759,7 +10532,7 @@
           <a:noFill/>
           <a:ln w="12700">
             <a:solidFill>
-              <a:srgbClr val="1E293B"/>
+              <a:srgbClr val="233348"/>
             </a:solidFill>
             <a:prstDash val="solid"/>
           </a:ln>
@@ -9773,7 +10546,7 @@
         </p:nvSpPr>
         <p:spPr>
           <a:xfrm>
-            <a:off x="731520" y="6446520"/>
+            <a:off x="731520" y="6327648"/>
             <a:ext cx="5486400" cy="320040"/>
           </a:xfrm>
           <a:prstGeom prst="rect">
@@ -9812,8 +10585,8 @@
         </p:nvSpPr>
         <p:spPr>
           <a:xfrm>
-            <a:off x="6217920" y="6446520"/>
-            <a:ext cx="5212080" cy="320040"/>
+            <a:off x="6217920" y="6327648"/>
+            <a:ext cx="5242255" cy="320040"/>
           </a:xfrm>
           <a:prstGeom prst="rect">
             <a:avLst/>
